--- a/aulas/aula-03-dfd-e-stride.pptx
+++ b/aulas/aula-03-dfd-e-stride.pptx
@@ -6,15 +6,15 @@
   </p:sldMasterIdLst>
   <p:sldIdLst>
     <p:sldId id="256" r:id="rId7"/>
-    <p:sldId id="257" r:id="rId8"/>
-    <p:sldId id="258" r:id="rId9"/>
-    <p:sldId id="259" r:id="rId10"/>
-    <p:sldId id="260" r:id="rId11"/>
-    <p:sldId id="261" r:id="rId12"/>
-    <p:sldId id="262" r:id="rId13"/>
-    <p:sldId id="263" r:id="rId14"/>
-    <p:sldId id="264" r:id="rId15"/>
-    <p:sldId id="265" r:id="rId16"/>
+    <p:sldId id="257" r:id="rId9"/>
+    <p:sldId id="258" r:id="rId10"/>
+    <p:sldId id="259" r:id="rId11"/>
+    <p:sldId id="260" r:id="rId12"/>
+    <p:sldId id="261" r:id="rId13"/>
+    <p:sldId id="262" r:id="rId14"/>
+    <p:sldId id="263" r:id="rId15"/>
+    <p:sldId id="264" r:id="rId16"/>
+    <p:sldId id="265" r:id="rId17"/>
   </p:sldIdLst>
   <p:sldSz cx="12191695" cy="6858000" type="screen4x3"/>
   <p:notesSz cx="6858000" cy="9144000"/>
@@ -114,6 +114,776 @@
     </a:lvl9pPr>
   </p:defaultTextStyle>
 </p:presentation>
+</file>
+
+<file path=ppt/notesMasters/notesMaster1.xml><?xml version="1.0" encoding="utf-8"?>
+<p:notesMaster xmlns:a="http://schemas.openxmlformats.org/drawingml/2006/main" xmlns:p="http://schemas.openxmlformats.org/presentationml/2006/main" xmlns:r="http://schemas.openxmlformats.org/officeDocument/2006/relationships">
+  <p:cSld>
+    <p:bg>
+      <p:bgRef idx="1001">
+        <a:schemeClr val="bg1"/>
+      </p:bgRef>
+    </p:bg>
+    <p:spTree>
+      <p:nvGrpSpPr>
+        <p:cNvPr id="1" name=""/>
+        <p:cNvGrpSpPr/>
+        <p:nvPr/>
+      </p:nvGrpSpPr>
+      <p:grpSpPr>
+        <a:xfrm>
+          <a:off x="0" y="0"/>
+          <a:ext cx="0" cy="0"/>
+          <a:chOff x="0" y="0"/>
+          <a:chExt cx="0" cy="0"/>
+        </a:xfrm>
+      </p:grpSpPr>
+      <p:sp>
+        <p:nvSpPr>
+          <p:cNvPr id="2" name="Header Placeholder 1"/>
+          <p:cNvSpPr>
+            <a:spLocks noGrp="1"/>
+          </p:cNvSpPr>
+          <p:nvPr>
+            <p:ph type="hdr" sz="quarter"/>
+          </p:nvPr>
+        </p:nvSpPr>
+        <p:spPr>
+          <a:xfrm>
+            <a:off x="0" y="0"/>
+            <a:ext cx="2971800" cy="457200"/>
+          </a:xfrm>
+          <a:prstGeom prst="rect">
+            <a:avLst/>
+          </a:prstGeom>
+        </p:spPr>
+        <p:txBody>
+          <a:bodyPr vert="horz" lIns="91440" tIns="45720" rIns="91440" bIns="45720" rtlCol="0"/>
+          <a:lstStyle>
+            <a:lvl1pPr algn="l">
+              <a:defRPr sz="1200"/>
+            </a:lvl1pPr>
+          </a:lstStyle>
+          <a:p>
+            <a:endParaRPr lang="en-US"/>
+          </a:p>
+        </p:txBody>
+      </p:sp>
+      <p:sp>
+        <p:nvSpPr>
+          <p:cNvPr id="3" name="Date Placeholder 2"/>
+          <p:cNvSpPr>
+            <a:spLocks noGrp="1"/>
+          </p:cNvSpPr>
+          <p:nvPr>
+            <p:ph type="dt" idx="1"/>
+          </p:nvPr>
+        </p:nvSpPr>
+        <p:spPr>
+          <a:xfrm>
+            <a:off x="3884613" y="0"/>
+            <a:ext cx="2971800" cy="457200"/>
+          </a:xfrm>
+          <a:prstGeom prst="rect">
+            <a:avLst/>
+          </a:prstGeom>
+        </p:spPr>
+        <p:txBody>
+          <a:bodyPr vert="horz" lIns="91440" tIns="45720" rIns="91440" bIns="45720" rtlCol="0"/>
+          <a:lstStyle>
+            <a:lvl1pPr algn="r">
+              <a:defRPr sz="1200"/>
+            </a:lvl1pPr>
+          </a:lstStyle>
+          <a:p>
+            <a:fld id="{0F89C1C7-3DCD-1040-A9CF-14679D8B5DDD}" type="datetimeFigureOut">
+              <a:rPr lang="en-US" smtClean="0"/>
+              <a:t>10/17/16</a:t>
+            </a:fld>
+            <a:endParaRPr lang="en-US"/>
+          </a:p>
+        </p:txBody>
+      </p:sp>
+      <p:sp>
+        <p:nvSpPr>
+          <p:cNvPr id="4" name="Slide Image Placeholder 3"/>
+          <p:cNvSpPr>
+            <a:spLocks noGrp="1" noRot="1" noChangeAspect="1"/>
+          </p:cNvSpPr>
+          <p:nvPr>
+            <p:ph type="sldImg" idx="2"/>
+          </p:nvPr>
+        </p:nvSpPr>
+        <p:spPr>
+          <a:xfrm>
+            <a:off x="1143000" y="685800"/>
+            <a:ext cx="4572000" cy="3429000"/>
+          </a:xfrm>
+          <a:prstGeom prst="rect">
+            <a:avLst/>
+          </a:prstGeom>
+          <a:noFill/>
+          <a:ln w="12700">
+            <a:solidFill>
+              <a:prstClr val="black"/>
+            </a:solidFill>
+          </a:ln>
+        </p:spPr>
+        <p:txBody>
+          <a:bodyPr vert="horz" lIns="91440" tIns="45720" rIns="91440" bIns="45720" rtlCol="0" anchor="ctr"/>
+          <a:lstStyle/>
+          <a:p>
+            <a:endParaRPr lang="en-US"/>
+          </a:p>
+        </p:txBody>
+      </p:sp>
+      <p:sp>
+        <p:nvSpPr>
+          <p:cNvPr id="5" name="Notes Placeholder 4"/>
+          <p:cNvSpPr>
+            <a:spLocks noGrp="1"/>
+          </p:cNvSpPr>
+          <p:nvPr>
+            <p:ph type="body" sz="quarter" idx="3"/>
+          </p:nvPr>
+        </p:nvSpPr>
+        <p:spPr>
+          <a:xfrm>
+            <a:off x="685800" y="4343400"/>
+            <a:ext cx="5486400" cy="4114800"/>
+          </a:xfrm>
+          <a:prstGeom prst="rect">
+            <a:avLst/>
+          </a:prstGeom>
+        </p:spPr>
+        <p:txBody>
+          <a:bodyPr vert="horz" lIns="91440" tIns="45720" rIns="91440" bIns="45720" rtlCol="0"/>
+          <a:lstStyle/>
+          <a:p>
+            <a:pPr lvl="0"/>
+            <a:r>
+              <a:rPr lang="en-US" smtClean="0"/>
+              <a:t>Click to edit Master text styles</a:t>
+            </a:r>
+          </a:p>
+          <a:p>
+            <a:pPr lvl="1"/>
+            <a:r>
+              <a:rPr lang="en-US" smtClean="0"/>
+              <a:t>Second level</a:t>
+            </a:r>
+          </a:p>
+          <a:p>
+            <a:pPr lvl="2"/>
+            <a:r>
+              <a:rPr lang="en-US" smtClean="0"/>
+              <a:t>Third level</a:t>
+            </a:r>
+          </a:p>
+          <a:p>
+            <a:pPr lvl="3"/>
+            <a:r>
+              <a:rPr lang="en-US" smtClean="0"/>
+              <a:t>Fourth level</a:t>
+            </a:r>
+          </a:p>
+          <a:p>
+            <a:pPr lvl="4"/>
+            <a:r>
+              <a:rPr lang="en-US" smtClean="0"/>
+              <a:t>Fifth level</a:t>
+            </a:r>
+            <a:endParaRPr lang="en-US"/>
+          </a:p>
+        </p:txBody>
+      </p:sp>
+      <p:sp>
+        <p:nvSpPr>
+          <p:cNvPr id="6" name="Footer Placeholder 5"/>
+          <p:cNvSpPr>
+            <a:spLocks noGrp="1"/>
+          </p:cNvSpPr>
+          <p:nvPr>
+            <p:ph type="ftr" sz="quarter" idx="4"/>
+          </p:nvPr>
+        </p:nvSpPr>
+        <p:spPr>
+          <a:xfrm>
+            <a:off x="0" y="8685213"/>
+            <a:ext cx="2971800" cy="457200"/>
+          </a:xfrm>
+          <a:prstGeom prst="rect">
+            <a:avLst/>
+          </a:prstGeom>
+        </p:spPr>
+        <p:txBody>
+          <a:bodyPr vert="horz" lIns="91440" tIns="45720" rIns="91440" bIns="45720" rtlCol="0" anchor="b"/>
+          <a:lstStyle>
+            <a:lvl1pPr algn="l">
+              <a:defRPr sz="1200"/>
+            </a:lvl1pPr>
+          </a:lstStyle>
+          <a:p>
+            <a:endParaRPr lang="en-US"/>
+          </a:p>
+        </p:txBody>
+      </p:sp>
+      <p:sp>
+        <p:nvSpPr>
+          <p:cNvPr id="7" name="Slide Number Placeholder 6"/>
+          <p:cNvSpPr>
+            <a:spLocks noGrp="1"/>
+          </p:cNvSpPr>
+          <p:nvPr>
+            <p:ph type="sldNum" sz="quarter" idx="5"/>
+          </p:nvPr>
+        </p:nvSpPr>
+        <p:spPr>
+          <a:xfrm>
+            <a:off x="3884613" y="8685213"/>
+            <a:ext cx="2971800" cy="457200"/>
+          </a:xfrm>
+          <a:prstGeom prst="rect">
+            <a:avLst/>
+          </a:prstGeom>
+        </p:spPr>
+        <p:txBody>
+          <a:bodyPr vert="horz" lIns="91440" tIns="45720" rIns="91440" bIns="45720" rtlCol="0" anchor="b"/>
+          <a:lstStyle>
+            <a:lvl1pPr algn="r">
+              <a:defRPr sz="1200"/>
+            </a:lvl1pPr>
+          </a:lstStyle>
+          <a:p>
+            <a:fld id="{BB5E49A5-4136-284D-997B-48E1D791AD67}" type="slidenum">
+              <a:rPr lang="en-US" smtClean="0"/>
+              <a:t>‹#›</a:t>
+            </a:fld>
+            <a:endParaRPr lang="en-US"/>
+          </a:p>
+        </p:txBody>
+      </p:sp>
+    </p:spTree>
+    <p:extLst>
+      <p:ext uri="{BB962C8B-B14F-4D97-AF65-F5344CB8AC3E}">
+        <p14:creationId xmlns:p14="http://schemas.microsoft.com/office/powerpoint/2010/main" val="2623252185"/>
+      </p:ext>
+    </p:extLst>
+  </p:cSld>
+  <p:clrMap bg1="lt1" tx1="dk1" bg2="lt2" tx2="dk2" accent1="accent1" accent2="accent2" accent3="accent3" accent4="accent4" accent5="accent5" accent6="accent6" hlink="hlink" folHlink="folHlink"/>
+  <p:notesStyle>
+    <a:lvl1pPr marL="0" algn="l" defTabSz="457200" rtl="0" eaLnBrk="1" latinLnBrk="0" hangingPunct="1">
+      <a:defRPr sz="1200" kern="1200">
+        <a:solidFill>
+          <a:schemeClr val="tx1"/>
+        </a:solidFill>
+        <a:latin typeface="+mn-lt"/>
+        <a:ea typeface="+mn-ea"/>
+        <a:cs typeface="+mn-cs"/>
+      </a:defRPr>
+    </a:lvl1pPr>
+    <a:lvl2pPr marL="457200" algn="l" defTabSz="457200" rtl="0" eaLnBrk="1" latinLnBrk="0" hangingPunct="1">
+      <a:defRPr sz="1200" kern="1200">
+        <a:solidFill>
+          <a:schemeClr val="tx1"/>
+        </a:solidFill>
+        <a:latin typeface="+mn-lt"/>
+        <a:ea typeface="+mn-ea"/>
+        <a:cs typeface="+mn-cs"/>
+      </a:defRPr>
+    </a:lvl2pPr>
+    <a:lvl3pPr marL="914400" algn="l" defTabSz="457200" rtl="0" eaLnBrk="1" latinLnBrk="0" hangingPunct="1">
+      <a:defRPr sz="1200" kern="1200">
+        <a:solidFill>
+          <a:schemeClr val="tx1"/>
+        </a:solidFill>
+        <a:latin typeface="+mn-lt"/>
+        <a:ea typeface="+mn-ea"/>
+        <a:cs typeface="+mn-cs"/>
+      </a:defRPr>
+    </a:lvl3pPr>
+    <a:lvl4pPr marL="1371600" algn="l" defTabSz="457200" rtl="0" eaLnBrk="1" latinLnBrk="0" hangingPunct="1">
+      <a:defRPr sz="1200" kern="1200">
+        <a:solidFill>
+          <a:schemeClr val="tx1"/>
+        </a:solidFill>
+        <a:latin typeface="+mn-lt"/>
+        <a:ea typeface="+mn-ea"/>
+        <a:cs typeface="+mn-cs"/>
+      </a:defRPr>
+    </a:lvl4pPr>
+    <a:lvl5pPr marL="1828800" algn="l" defTabSz="457200" rtl="0" eaLnBrk="1" latinLnBrk="0" hangingPunct="1">
+      <a:defRPr sz="1200" kern="1200">
+        <a:solidFill>
+          <a:schemeClr val="tx1"/>
+        </a:solidFill>
+        <a:latin typeface="+mn-lt"/>
+        <a:ea typeface="+mn-ea"/>
+        <a:cs typeface="+mn-cs"/>
+      </a:defRPr>
+    </a:lvl5pPr>
+    <a:lvl6pPr marL="2286000" algn="l" defTabSz="457200" rtl="0" eaLnBrk="1" latinLnBrk="0" hangingPunct="1">
+      <a:defRPr sz="1200" kern="1200">
+        <a:solidFill>
+          <a:schemeClr val="tx1"/>
+        </a:solidFill>
+        <a:latin typeface="+mn-lt"/>
+        <a:ea typeface="+mn-ea"/>
+        <a:cs typeface="+mn-cs"/>
+      </a:defRPr>
+    </a:lvl6pPr>
+    <a:lvl7pPr marL="2743200" algn="l" defTabSz="457200" rtl="0" eaLnBrk="1" latinLnBrk="0" hangingPunct="1">
+      <a:defRPr sz="1200" kern="1200">
+        <a:solidFill>
+          <a:schemeClr val="tx1"/>
+        </a:solidFill>
+        <a:latin typeface="+mn-lt"/>
+        <a:ea typeface="+mn-ea"/>
+        <a:cs typeface="+mn-cs"/>
+      </a:defRPr>
+    </a:lvl7pPr>
+    <a:lvl8pPr marL="3200400" algn="l" defTabSz="457200" rtl="0" eaLnBrk="1" latinLnBrk="0" hangingPunct="1">
+      <a:defRPr sz="1200" kern="1200">
+        <a:solidFill>
+          <a:schemeClr val="tx1"/>
+        </a:solidFill>
+        <a:latin typeface="+mn-lt"/>
+        <a:ea typeface="+mn-ea"/>
+        <a:cs typeface="+mn-cs"/>
+      </a:defRPr>
+    </a:lvl8pPr>
+    <a:lvl9pPr marL="3657600" algn="l" defTabSz="457200" rtl="0" eaLnBrk="1" latinLnBrk="0" hangingPunct="1">
+      <a:defRPr sz="1200" kern="1200">
+        <a:solidFill>
+          <a:schemeClr val="tx1"/>
+        </a:solidFill>
+        <a:latin typeface="+mn-lt"/>
+        <a:ea typeface="+mn-ea"/>
+        <a:cs typeface="+mn-cs"/>
+      </a:defRPr>
+    </a:lvl9pPr>
+  </p:notesStyle>
+</p:notesMaster>
+</file>
+
+<file path=ppt/notesSlides/notesSlide1.xml><?xml version="1.0" encoding="utf-8"?>
+<p:notes xmlns:a="http://schemas.openxmlformats.org/drawingml/2006/main" xmlns:p="http://schemas.openxmlformats.org/presentationml/2006/main" xmlns:r="http://schemas.openxmlformats.org/officeDocument/2006/relationships">
+  <p:cSld>
+    <p:spTree>
+      <p:nvGrpSpPr>
+        <p:cNvPr id="1" name=""/>
+        <p:cNvGrpSpPr/>
+        <p:nvPr/>
+      </p:nvGrpSpPr>
+      <p:grpSpPr>
+        <a:xfrm>
+          <a:off x="0" y="0"/>
+          <a:ext cx="0" cy="0"/>
+          <a:chOff x="0" y="0"/>
+          <a:chExt cx="0" cy="0"/>
+        </a:xfrm>
+      </p:grpSpPr>
+      <p:sp>
+        <p:nvSpPr>
+          <p:cNvPr id="2" name="Slide Image Placeholder 1"/>
+          <p:cNvSpPr>
+            <a:spLocks noGrp="1"/>
+          </p:cNvSpPr>
+          <p:nvPr>
+            <p:ph type="sldImg" idx="2"/>
+          </p:nvPr>
+        </p:nvSpPr>
+        <p:spPr/>
+      </p:sp>
+      <p:sp>
+        <p:nvSpPr>
+          <p:cNvPr id="3" name="Notes Placeholder 2"/>
+          <p:cNvSpPr>
+            <a:spLocks noGrp="1"/>
+          </p:cNvSpPr>
+          <p:nvPr>
+            <p:ph type="body" idx="3" sz="quarter"/>
+          </p:nvPr>
+        </p:nvSpPr>
+        <p:spPr/>
+        <p:txBody>
+          <a:bodyPr/>
+          <a:lstStyle/>
+          <a:p>
+            <a:r>
+              <a:t>Aula 3. Threat modeling é a atividade de descobrir, de forma sistemática, como o sistema pode ser atacado — e derivar requisitos de cada ameaça. Entregável: DFD + STRIDE-per-element + árvore de ataque do VidaPlus (Fase 2a).</a:t>
+            </a:r>
+          </a:p>
+        </p:txBody>
+      </p:sp>
+      <p:sp>
+        <p:nvSpPr>
+          <p:cNvPr id="4" name="Slide Number Placeholder 3"/>
+          <p:cNvSpPr>
+            <a:spLocks noGrp="1"/>
+          </p:cNvSpPr>
+          <p:nvPr>
+            <p:ph type="sldNum" idx="5" sz="quarter"/>
+          </p:nvPr>
+        </p:nvSpPr>
+        <p:spPr/>
+      </p:sp>
+    </p:spTree>
+  </p:cSld>
+  <p:clrMapOvr>
+    <a:masterClrMapping/>
+  </p:clrMapOvr>
+</p:notes>
+</file>
+
+<file path=ppt/notesSlides/notesSlide2.xml><?xml version="1.0" encoding="utf-8"?>
+<p:notes xmlns:a="http://schemas.openxmlformats.org/drawingml/2006/main" xmlns:p="http://schemas.openxmlformats.org/presentationml/2006/main" xmlns:r="http://schemas.openxmlformats.org/officeDocument/2006/relationships">
+  <p:cSld>
+    <p:spTree>
+      <p:nvGrpSpPr>
+        <p:cNvPr id="1" name=""/>
+        <p:cNvGrpSpPr/>
+        <p:nvPr/>
+      </p:nvGrpSpPr>
+      <p:grpSpPr>
+        <a:xfrm>
+          <a:off x="0" y="0"/>
+          <a:ext cx="0" cy="0"/>
+          <a:chOff x="0" y="0"/>
+          <a:chExt cx="0" cy="0"/>
+        </a:xfrm>
+      </p:grpSpPr>
+      <p:sp>
+        <p:nvSpPr>
+          <p:cNvPr id="2" name="Slide Image Placeholder 1"/>
+          <p:cNvSpPr>
+            <a:spLocks noGrp="1"/>
+          </p:cNvSpPr>
+          <p:nvPr>
+            <p:ph type="sldImg" idx="2"/>
+          </p:nvPr>
+        </p:nvSpPr>
+        <p:spPr/>
+      </p:sp>
+      <p:sp>
+        <p:nvSpPr>
+          <p:cNvPr id="3" name="Notes Placeholder 2"/>
+          <p:cNvSpPr>
+            <a:spLocks noGrp="1"/>
+          </p:cNvSpPr>
+          <p:nvPr>
+            <p:ph type="body" idx="3" sz="quarter"/>
+          </p:nvPr>
+        </p:nvSpPr>
+        <p:spPr/>
+        <p:txBody>
+          <a:bodyPr/>
+          <a:lstStyle/>
+          <a:p>
+            <a:r>
+              <a:t>Adam Shostack (Microsoft) resume threat modeling em 4 perguntas. Não é 'adivinhar ataques': parte-se de um desenho do sistema (pergunta 1), aplica-se um método sistemático de ameaças (pergunta 2), decide-se o que fazer com cada uma (pergunta 3) e valida-se a cobertura (pergunta 4). O resultado alimenta requisitos.</a:t>
+            </a:r>
+          </a:p>
+        </p:txBody>
+      </p:sp>
+      <p:sp>
+        <p:nvSpPr>
+          <p:cNvPr id="4" name="Slide Number Placeholder 3"/>
+          <p:cNvSpPr>
+            <a:spLocks noGrp="1"/>
+          </p:cNvSpPr>
+          <p:nvPr>
+            <p:ph type="sldNum" idx="5" sz="quarter"/>
+          </p:nvPr>
+        </p:nvSpPr>
+        <p:spPr/>
+      </p:sp>
+    </p:spTree>
+  </p:cSld>
+  <p:clrMapOvr>
+    <a:masterClrMapping/>
+  </p:clrMapOvr>
+</p:notes>
+</file>
+
+<file path=ppt/notesSlides/notesSlide3.xml><?xml version="1.0" encoding="utf-8"?>
+<p:notes xmlns:a="http://schemas.openxmlformats.org/drawingml/2006/main" xmlns:p="http://schemas.openxmlformats.org/presentationml/2006/main" xmlns:r="http://schemas.openxmlformats.org/officeDocument/2006/relationships">
+  <p:cSld>
+    <p:spTree>
+      <p:nvGrpSpPr>
+        <p:cNvPr id="1" name=""/>
+        <p:cNvGrpSpPr/>
+        <p:nvPr/>
+      </p:nvGrpSpPr>
+      <p:grpSpPr>
+        <a:xfrm>
+          <a:off x="0" y="0"/>
+          <a:ext cx="0" cy="0"/>
+          <a:chOff x="0" y="0"/>
+          <a:chExt cx="0" cy="0"/>
+        </a:xfrm>
+      </p:grpSpPr>
+      <p:sp>
+        <p:nvSpPr>
+          <p:cNvPr id="2" name="Slide Image Placeholder 1"/>
+          <p:cNvSpPr>
+            <a:spLocks noGrp="1"/>
+          </p:cNvSpPr>
+          <p:nvPr>
+            <p:ph type="sldImg" idx="2"/>
+          </p:nvPr>
+        </p:nvSpPr>
+        <p:spPr/>
+      </p:sp>
+      <p:sp>
+        <p:nvSpPr>
+          <p:cNvPr id="3" name="Notes Placeholder 2"/>
+          <p:cNvSpPr>
+            <a:spLocks noGrp="1"/>
+          </p:cNvSpPr>
+          <p:nvPr>
+            <p:ph type="body" idx="3" sz="quarter"/>
+          </p:nvPr>
+        </p:nvSpPr>
+        <p:spPr/>
+        <p:txBody>
+          <a:bodyPr/>
+          <a:lstStyle/>
+          <a:p>
+            <a:r>
+              <a:t>O DFD (Data Flow Diagram) mostra COMO os dados circulam. A trust boundary é a linha onde o nível de confiança muda (internet -&gt; aplicação -&gt; banco). Toda travessia de fronteira é um ponto de controle obrigatório: ali entram autenticação, validação de entrada e log. É nas fronteiras que a maioria das ameaças aparece.</a:t>
+            </a:r>
+          </a:p>
+        </p:txBody>
+      </p:sp>
+      <p:sp>
+        <p:nvSpPr>
+          <p:cNvPr id="4" name="Slide Number Placeholder 3"/>
+          <p:cNvSpPr>
+            <a:spLocks noGrp="1"/>
+          </p:cNvSpPr>
+          <p:nvPr>
+            <p:ph type="sldNum" idx="5" sz="quarter"/>
+          </p:nvPr>
+        </p:nvSpPr>
+        <p:spPr/>
+      </p:sp>
+    </p:spTree>
+  </p:cSld>
+  <p:clrMapOvr>
+    <a:masterClrMapping/>
+  </p:clrMapOvr>
+</p:notes>
+</file>
+
+<file path=ppt/notesSlides/notesSlide4.xml><?xml version="1.0" encoding="utf-8"?>
+<p:notes xmlns:a="http://schemas.openxmlformats.org/drawingml/2006/main" xmlns:p="http://schemas.openxmlformats.org/presentationml/2006/main" xmlns:r="http://schemas.openxmlformats.org/officeDocument/2006/relationships">
+  <p:cSld>
+    <p:spTree>
+      <p:nvGrpSpPr>
+        <p:cNvPr id="1" name=""/>
+        <p:cNvGrpSpPr/>
+        <p:nvPr/>
+      </p:nvGrpSpPr>
+      <p:grpSpPr>
+        <a:xfrm>
+          <a:off x="0" y="0"/>
+          <a:ext cx="0" cy="0"/>
+          <a:chOff x="0" y="0"/>
+          <a:chExt cx="0" cy="0"/>
+        </a:xfrm>
+      </p:grpSpPr>
+      <p:sp>
+        <p:nvSpPr>
+          <p:cNvPr id="2" name="Slide Image Placeholder 1"/>
+          <p:cNvSpPr>
+            <a:spLocks noGrp="1"/>
+          </p:cNvSpPr>
+          <p:nvPr>
+            <p:ph type="sldImg" idx="2"/>
+          </p:nvPr>
+        </p:nvSpPr>
+        <p:spPr/>
+      </p:sp>
+      <p:sp>
+        <p:nvSpPr>
+          <p:cNvPr id="3" name="Notes Placeholder 2"/>
+          <p:cNvSpPr>
+            <a:spLocks noGrp="1"/>
+          </p:cNvSpPr>
+          <p:nvPr>
+            <p:ph type="body" idx="3" sz="quarter"/>
+          </p:nvPr>
+        </p:nvSpPr>
+        <p:spPr/>
+        <p:txBody>
+          <a:bodyPr/>
+          <a:lstStyle/>
+          <a:p>
+            <a:r>
+              <a:t>STRIDE é o método mais usado. Cada letra é uma categoria de ameaça mapeada a uma propriedade de segurança violada. A técnica prática é STRIDE-per-element: para cada elemento do DFD, pergunte quais das 6 ameaças se aplicam. Isso torna a busca sistemática, em vez de depender de inspiração.</a:t>
+            </a:r>
+          </a:p>
+        </p:txBody>
+      </p:sp>
+      <p:sp>
+        <p:nvSpPr>
+          <p:cNvPr id="4" name="Slide Number Placeholder 3"/>
+          <p:cNvSpPr>
+            <a:spLocks noGrp="1"/>
+          </p:cNvSpPr>
+          <p:nvPr>
+            <p:ph type="sldNum" idx="5" sz="quarter"/>
+          </p:nvPr>
+        </p:nvSpPr>
+        <p:spPr/>
+      </p:sp>
+    </p:spTree>
+  </p:cSld>
+  <p:clrMapOvr>
+    <a:masterClrMapping/>
+  </p:clrMapOvr>
+</p:notes>
+</file>
+
+<file path=ppt/notesSlides/notesSlide5.xml><?xml version="1.0" encoding="utf-8"?>
+<p:notes xmlns:a="http://schemas.openxmlformats.org/drawingml/2006/main" xmlns:p="http://schemas.openxmlformats.org/presentationml/2006/main" xmlns:r="http://schemas.openxmlformats.org/officeDocument/2006/relationships">
+  <p:cSld>
+    <p:spTree>
+      <p:nvGrpSpPr>
+        <p:cNvPr id="1" name=""/>
+        <p:cNvGrpSpPr/>
+        <p:nvPr/>
+      </p:nvGrpSpPr>
+      <p:grpSpPr>
+        <a:xfrm>
+          <a:off x="0" y="0"/>
+          <a:ext cx="0" cy="0"/>
+          <a:chOff x="0" y="0"/>
+          <a:chExt cx="0" cy="0"/>
+        </a:xfrm>
+      </p:grpSpPr>
+      <p:sp>
+        <p:nvSpPr>
+          <p:cNvPr id="2" name="Slide Image Placeholder 1"/>
+          <p:cNvSpPr>
+            <a:spLocks noGrp="1"/>
+          </p:cNvSpPr>
+          <p:nvPr>
+            <p:ph type="sldImg" idx="2"/>
+          </p:nvPr>
+        </p:nvSpPr>
+        <p:spPr/>
+      </p:sp>
+      <p:sp>
+        <p:nvSpPr>
+          <p:cNvPr id="3" name="Notes Placeholder 2"/>
+          <p:cNvSpPr>
+            <a:spLocks noGrp="1"/>
+          </p:cNvSpPr>
+          <p:nvPr>
+            <p:ph type="body" idx="3" sz="quarter"/>
+          </p:nvPr>
+        </p:nvSpPr>
+        <p:spPr/>
+        <p:txBody>
+          <a:bodyPr/>
+          <a:lstStyle/>
+          <a:p>
+            <a:r>
+              <a:t>Exemplo de tabela STRIDE-per-element aplicada ao VidaPlus. Note como cada linha termina num REQUISITO de mitigação — é assim que o threat modeling 'gera' requisitos. A última linha é o IDOR: o download de exame precisa validar, no servidor, que o exame pertence ao usuário; senão, HTTP 403 sem vazar metadados.</a:t>
+            </a:r>
+          </a:p>
+        </p:txBody>
+      </p:sp>
+      <p:sp>
+        <p:nvSpPr>
+          <p:cNvPr id="4" name="Slide Number Placeholder 3"/>
+          <p:cNvSpPr>
+            <a:spLocks noGrp="1"/>
+          </p:cNvSpPr>
+          <p:nvPr>
+            <p:ph type="sldNum" idx="5" sz="quarter"/>
+          </p:nvPr>
+        </p:nvSpPr>
+        <p:spPr/>
+      </p:sp>
+    </p:spTree>
+  </p:cSld>
+  <p:clrMapOvr>
+    <a:masterClrMapping/>
+  </p:clrMapOvr>
+</p:notes>
+</file>
+
+<file path=ppt/notesSlides/notesSlide6.xml><?xml version="1.0" encoding="utf-8"?>
+<p:notes xmlns:a="http://schemas.openxmlformats.org/drawingml/2006/main" xmlns:p="http://schemas.openxmlformats.org/presentationml/2006/main" xmlns:r="http://schemas.openxmlformats.org/officeDocument/2006/relationships">
+  <p:cSld>
+    <p:spTree>
+      <p:nvGrpSpPr>
+        <p:cNvPr id="1" name=""/>
+        <p:cNvGrpSpPr/>
+        <p:nvPr/>
+      </p:nvGrpSpPr>
+      <p:grpSpPr>
+        <a:xfrm>
+          <a:off x="0" y="0"/>
+          <a:ext cx="0" cy="0"/>
+          <a:chOff x="0" y="0"/>
+          <a:chExt cx="0" cy="0"/>
+        </a:xfrm>
+      </p:grpSpPr>
+      <p:sp>
+        <p:nvSpPr>
+          <p:cNvPr id="2" name="Slide Image Placeholder 1"/>
+          <p:cNvSpPr>
+            <a:spLocks noGrp="1"/>
+          </p:cNvSpPr>
+          <p:nvPr>
+            <p:ph type="sldImg" idx="2"/>
+          </p:nvPr>
+        </p:nvSpPr>
+        <p:spPr/>
+      </p:sp>
+      <p:sp>
+        <p:nvSpPr>
+          <p:cNvPr id="3" name="Notes Placeholder 2"/>
+          <p:cNvSpPr>
+            <a:spLocks noGrp="1"/>
+          </p:cNvSpPr>
+          <p:nvPr>
+            <p:ph type="body" idx="3" sz="quarter"/>
+          </p:nvPr>
+        </p:nvSpPr>
+        <p:spPr/>
+        <p:txBody>
+          <a:bodyPr/>
+          <a:lstStyle/>
+          <a:p>
+            <a:r>
+              <a:t>A árvore de ataque (Bruce Schneier) tem a raiz = objetivo do atacante e folhas = passos concretos, cada um com custo/esforço; a defesa de cada folha é um requisito. Priorize defender o caminho mais BARATO para o atacante. Todo o modelo desta fase alimenta o catálogo de requisitos (Aula 5).</a:t>
+            </a:r>
+          </a:p>
+        </p:txBody>
+      </p:sp>
+      <p:sp>
+        <p:nvSpPr>
+          <p:cNvPr id="4" name="Slide Number Placeholder 3"/>
+          <p:cNvSpPr>
+            <a:spLocks noGrp="1"/>
+          </p:cNvSpPr>
+          <p:nvPr>
+            <p:ph type="sldNum" idx="5" sz="quarter"/>
+          </p:nvPr>
+        </p:nvSpPr>
+        <p:spPr/>
+      </p:sp>
+    </p:spTree>
+  </p:cSld>
+  <p:clrMapOvr>
+    <a:masterClrMapping/>
+  </p:clrMapOvr>
+</p:notes>
 </file>
 
 <file path=ppt/slideLayouts/slideLayout1.xml><?xml version="1.0" encoding="utf-8"?>
@@ -4132,7 +4902,7 @@
                 </a:solidFill>
                 <a:latin typeface="Open Sans"/>
               </a:rPr>
-              <a:t>O método de threat modeling</a:t>
+              <a:t>O método, em quatro perguntas</a:t>
             </a:r>
           </a:p>
         </p:txBody>
@@ -4268,7 +5038,7 @@
                 </a:solidFill>
                 <a:latin typeface="Open Sans"/>
               </a:rPr>
-              <a:t>DFD, componentes, trust boundaries</a:t>
+              <a:t>desenhar o DFD com componentes e fronteiras</a:t>
             </a:r>
           </a:p>
         </p:txBody>
@@ -4404,7 +5174,7 @@
                 </a:solidFill>
                 <a:latin typeface="Open Sans"/>
               </a:rPr>
-              <a:t>aplicar STRIDE por elemento</a:t>
+              <a:t>aplicar STRIDE a cada elemento</a:t>
             </a:r>
           </a:p>
         </p:txBody>
@@ -4540,7 +5310,7 @@
                 </a:solidFill>
                 <a:latin typeface="Open Sans"/>
               </a:rPr>
-              <a:t>mitigar/transferir/aceitar/eliminar</a:t>
+              <a:t>para cada ameaça: mitigar, transferir, aceitar ou eliminar</a:t>
             </a:r>
           </a:p>
         </p:txBody>
@@ -4676,7 +5446,7 @@
                 </a:solidFill>
                 <a:latin typeface="Open Sans"/>
               </a:rPr>
-              <a:t>validar cobertura e atualizar</a:t>
+              <a:t>validar a cobertura e atualizar quando mudar</a:t>
             </a:r>
           </a:p>
         </p:txBody>
@@ -4873,7 +5643,7 @@
                 </a:solidFill>
                 <a:latin typeface="Open Sans"/>
               </a:rPr>
-              <a:t>A base visual do modelo</a:t>
+              <a:t>A base visual — notação</a:t>
             </a:r>
           </a:p>
         </p:txBody>
@@ -4979,7 +5749,7 @@
                 </a:solidFill>
                 <a:latin typeface="Open Sans"/>
               </a:rPr>
-              <a:t>usuário, navegador, serviço de terceiros.</a:t>
+              <a:t>retângulo — usuário, navegador, serviço de terceiros.</a:t>
             </a:r>
           </a:p>
           <a:p>
@@ -5016,7 +5786,7 @@
                 </a:solidFill>
                 <a:latin typeface="Open Sans"/>
               </a:rPr>
-              <a:t>autenticar, recuperar exame, publicar laudo.</a:t>
+              <a:t>círculo — autenticar, recuperar exame, publicar laudo.</a:t>
             </a:r>
           </a:p>
           <a:p>
@@ -5053,7 +5823,7 @@
                 </a:solidFill>
                 <a:latin typeface="Open Sans"/>
               </a:rPr>
-              <a:t>banco, bucket de PDFs, logs.</a:t>
+              <a:t>duas linhas — banco, bucket de PDFs, logs.</a:t>
             </a:r>
           </a:p>
           <a:p>
@@ -5081,7 +5851,7 @@
                 </a:solidFill>
                 <a:latin typeface="Open Sans"/>
               </a:rPr>
-              <a:t>Fluxo: </a:t>
+              <a:t>Fluxo de dados: </a:t>
             </a:r>
             <a:r>
               <a:rPr sz="1800">
@@ -5090,7 +5860,7 @@
                 </a:solidFill>
                 <a:latin typeface="Open Sans"/>
               </a:rPr>
-              <a:t>credenciais, id do exame, PDF.</a:t>
+              <a:t>seta — credenciais, id do exame, PDF.</a:t>
             </a:r>
           </a:p>
           <a:p>
@@ -5127,7 +5897,7 @@
                 </a:solidFill>
                 <a:latin typeface="Open Sans"/>
               </a:rPr>
-              <a:t>onde o dado cruza zonas de confiança — ali vão os controles.</a:t>
+              <a:t>tracejado vermelho — onde o dado cruza zonas de confiança.</a:t>
             </a:r>
           </a:p>
         </p:txBody>
@@ -5565,7 +6335,7 @@
                 </a:solidFill>
                 <a:latin typeface="Open Sans"/>
               </a:rPr>
-              <a:t>Microsoft · categoria de ameaça vs propriedade violada</a:t>
+              <a:t>Microsoft · a ameaça e a propriedade que ela viola</a:t>
             </a:r>
           </a:p>
         </p:txBody>
@@ -5790,7 +6560,7 @@
                 </a:solidFill>
                 <a:latin typeface="Open Sans"/>
               </a:rPr>
-              <a:t>vs Authenticity — cookie roubado</a:t>
+              <a:t>vs Authenticity — passar-se por outro (cookie roubado)</a:t>
             </a:r>
           </a:p>
         </p:txBody>
@@ -6015,7 +6785,7 @@
                 </a:solidFill>
                 <a:latin typeface="Open Sans"/>
               </a:rPr>
-              <a:t>vs Integrity — alterar payload/parâmetro</a:t>
+              <a:t>vs Integrity — alterar request, payload, parâmetro</a:t>
             </a:r>
           </a:p>
         </p:txBody>
@@ -6240,7 +7010,7 @@
                 </a:solidFill>
                 <a:latin typeface="Open Sans"/>
               </a:rPr>
-              <a:t>vs Non-repudiation — faltam logs</a:t>
+              <a:t>vs Non-repudiation — negar ação; faltam logs</a:t>
             </a:r>
           </a:p>
         </p:txBody>
@@ -6465,7 +7235,7 @@
                 </a:solidFill>
                 <a:latin typeface="Open Sans"/>
               </a:rPr>
-              <a:t>vs Confidentiality — SQLi vaza tabela</a:t>
+              <a:t>vs Confidentiality — SQLi vaza tabela; stack trace</a:t>
             </a:r>
           </a:p>
         </p:txBody>
@@ -7067,7 +7837,7 @@
                 </a:solidFill>
                 <a:latin typeface="Open Sans"/>
               </a:rPr>
-              <a:t>STRIDE -&gt; requisito</a:t>
+              <a:t>STRIDE-per-element (exemplo)</a:t>
             </a:r>
           </a:p>
         </p:txBody>
@@ -7112,7 +7882,7 @@
                 </a:solidFill>
                 <a:latin typeface="Open Sans"/>
               </a:rPr>
-              <a:t>Cada ameaça deriva um requisito</a:t>
+              <a:t>Cada elemento × ameaça -&gt; requisito</a:t>
             </a:r>
           </a:p>
         </p:txBody>
@@ -7247,7 +8017,7 @@
                 </a:solidFill>
                 <a:latin typeface="Open Sans"/>
               </a:rPr>
-              <a:t>Spoofing</a:t>
+              <a:t>Login (processo)</a:t>
             </a:r>
           </a:p>
         </p:txBody>
@@ -7292,7 +8062,7 @@
                 </a:solidFill>
                 <a:latin typeface="Open Sans"/>
               </a:rPr>
-              <a:t>Authenticity</a:t>
+              <a:t>Spoofing</a:t>
             </a:r>
           </a:p>
         </p:txBody>
@@ -7337,7 +8107,7 @@
                 </a:solidFill>
                 <a:latin typeface="Open Sans"/>
               </a:rPr>
-              <a:t>autenticar toda requisição; MFA</a:t>
+              <a:t>MFA; bloqueio após N tentativas</a:t>
             </a:r>
           </a:p>
         </p:txBody>
@@ -7472,7 +8242,7 @@
                 </a:solidFill>
                 <a:latin typeface="Open Sans"/>
               </a:rPr>
-              <a:t>Tampering</a:t>
+              <a:t>Token de sessão (fluxo)</a:t>
             </a:r>
           </a:p>
         </p:txBody>
@@ -7517,7 +8287,7 @@
                 </a:solidFill>
                 <a:latin typeface="Open Sans"/>
               </a:rPr>
-              <a:t>Integrity</a:t>
+              <a:t>Tampering</a:t>
             </a:r>
           </a:p>
         </p:txBody>
@@ -7562,7 +8332,7 @@
                 </a:solidFill>
                 <a:latin typeface="Open Sans"/>
               </a:rPr>
-              <a:t>assinar/validar; TLS 1.3</a:t>
+              <a:t>JWT assinado; rejeitar alg:none</a:t>
             </a:r>
           </a:p>
         </p:txBody>
@@ -7697,7 +8467,7 @@
                 </a:solidFill>
                 <a:latin typeface="Open Sans"/>
               </a:rPr>
-              <a:t>Repudiation</a:t>
+              <a:t>Log (armazenamento)</a:t>
             </a:r>
           </a:p>
         </p:txBody>
@@ -7742,7 +8512,7 @@
                 </a:solidFill>
                 <a:latin typeface="Open Sans"/>
               </a:rPr>
-              <a:t>Non-repudiation</a:t>
+              <a:t>Repudiation</a:t>
             </a:r>
           </a:p>
         </p:txBody>
@@ -7787,7 +8557,7 @@
                 </a:solidFill>
                 <a:latin typeface="Open Sans"/>
               </a:rPr>
-              <a:t>trilha de auditoria assinada</a:t>
+              <a:t>logs assinados e imutáveis</a:t>
             </a:r>
           </a:p>
         </p:txBody>
@@ -7922,7 +8692,7 @@
                 </a:solidFill>
                 <a:latin typeface="Open Sans"/>
               </a:rPr>
-              <a:t>Info disclosure</a:t>
+              <a:t>Banco (armazenamento)</a:t>
             </a:r>
           </a:p>
         </p:txBody>
@@ -7967,7 +8737,7 @@
                 </a:solidFill>
                 <a:latin typeface="Open Sans"/>
               </a:rPr>
-              <a:t>Confidentiality</a:t>
+              <a:t>Info disclosure</a:t>
             </a:r>
           </a:p>
         </p:txBody>
@@ -8012,7 +8782,7 @@
                 </a:solidFill>
                 <a:latin typeface="Open Sans"/>
               </a:rPr>
-              <a:t>cifrar; não expor stack trace</a:t>
+              <a:t>AES-256 em repouso; acesso mínimo</a:t>
             </a:r>
           </a:p>
         </p:txBody>
@@ -8147,7 +8917,7 @@
                 </a:solidFill>
                 <a:latin typeface="Open Sans"/>
               </a:rPr>
-              <a:t>Elevation of Priv.</a:t>
+              <a:t>Download de exame</a:t>
             </a:r>
           </a:p>
         </p:txBody>
@@ -8192,7 +8962,7 @@
                 </a:solidFill>
                 <a:latin typeface="Open Sans"/>
               </a:rPr>
-              <a:t>Authorization</a:t>
+              <a:t>Elevation of Priv.</a:t>
             </a:r>
           </a:p>
         </p:txBody>
@@ -8237,7 +9007,7 @@
                 </a:solidFill>
                 <a:latin typeface="Open Sans"/>
               </a:rPr>
-              <a:t>deny by default; validar no servidor</a:t>
+              <a:t>validar ownership no servidor -&gt; 403</a:t>
             </a:r>
           </a:p>
         </p:txBody>
@@ -8781,7 +9551,7 @@
                 </a:solidFill>
                 <a:latin typeface="Open Sans"/>
               </a:rPr>
-              <a:t>desenhe o recorte (login, download de laudo) com fronteiras.</a:t>
+              <a:t>desenhe o recorte (login, download de laudo) com as fronteiras.</a:t>
             </a:r>
           </a:p>
           <a:p>
@@ -8855,7 +9625,7 @@
                 </a:solidFill>
                 <a:latin typeface="Open Sans"/>
               </a:rPr>
-              <a:t>decomponha o objetivo do atacante para o laudo.</a:t>
+              <a:t>decomponha o objetivo 'obter laudo de outro paciente'.</a:t>
             </a:r>
           </a:p>
           <a:p>
@@ -8929,7 +9699,7 @@
                 </a:solidFill>
                 <a:latin typeface="Open Sans"/>
               </a:rPr>
-              <a:t>o IDOR no download (paciente A baixa exame de B).</a:t>
+              <a:t>o IDOR no download (paciente A baixa o exame de B).</a:t>
             </a:r>
           </a:p>
         </p:txBody>
@@ -9305,4 +10075,324 @@
   </a:objectDefaults>
   <a:extraClrSchemeLst/>
 </a:theme>
+</file>
+
+<file path=ppt/theme/theme2.xml><?xml version="1.0" encoding="utf-8"?>
+<a:theme xmlns:a="http://schemas.openxmlformats.org/drawingml/2006/main" name="Office Theme">
+  <a:themeElements>
+    <a:clrScheme name="Office">
+      <a:dk1>
+        <a:sysClr val="windowText" lastClr="000000"/>
+      </a:dk1>
+      <a:lt1>
+        <a:sysClr val="window" lastClr="FFFFFF"/>
+      </a:lt1>
+      <a:dk2>
+        <a:srgbClr val="1F497D"/>
+      </a:dk2>
+      <a:lt2>
+        <a:srgbClr val="EEECE1"/>
+      </a:lt2>
+      <a:accent1>
+        <a:srgbClr val="4F81BD"/>
+      </a:accent1>
+      <a:accent2>
+        <a:srgbClr val="C0504D"/>
+      </a:accent2>
+      <a:accent3>
+        <a:srgbClr val="9BBB59"/>
+      </a:accent3>
+      <a:accent4>
+        <a:srgbClr val="8064A2"/>
+      </a:accent4>
+      <a:accent5>
+        <a:srgbClr val="4BACC6"/>
+      </a:accent5>
+      <a:accent6>
+        <a:srgbClr val="F79646"/>
+      </a:accent6>
+      <a:hlink>
+        <a:srgbClr val="0000FF"/>
+      </a:hlink>
+      <a:folHlink>
+        <a:srgbClr val="800080"/>
+      </a:folHlink>
+    </a:clrScheme>
+    <a:fontScheme name="Office">
+      <a:majorFont>
+        <a:latin typeface="Calibri"/>
+        <a:ea typeface=""/>
+        <a:cs typeface=""/>
+        <a:font script="Jpan" typeface="ＭＳ Ｐゴシック"/>
+        <a:font script="Hang" typeface="맑은 고딕"/>
+        <a:font script="Hans" typeface="宋体"/>
+        <a:font script="Hant" typeface="新細明體"/>
+        <a:font script="Arab" typeface="Times New Roman"/>
+        <a:font script="Hebr" typeface="Times New Roman"/>
+        <a:font script="Thai" typeface="Angsana New"/>
+        <a:font script="Ethi" typeface="Nyala"/>
+        <a:font script="Beng" typeface="Vrinda"/>
+        <a:font script="Gujr" typeface="Shruti"/>
+        <a:font script="Khmr" typeface="MoolBoran"/>
+        <a:font script="Knda" typeface="Tunga"/>
+        <a:font script="Guru" typeface="Raavi"/>
+        <a:font script="Cans" typeface="Euphemia"/>
+        <a:font script="Cher" typeface="Plantagenet Cherokee"/>
+        <a:font script="Yiii" typeface="Microsoft Yi Baiti"/>
+        <a:font script="Tibt" typeface="Microsoft Himalaya"/>
+        <a:font script="Thaa" typeface="MV Boli"/>
+        <a:font script="Deva" typeface="Mangal"/>
+        <a:font script="Telu" typeface="Gautami"/>
+        <a:font script="Taml" typeface="Latha"/>
+        <a:font script="Syrc" typeface="Estrangelo Edessa"/>
+        <a:font script="Orya" typeface="Kalinga"/>
+        <a:font script="Mlym" typeface="Kartika"/>
+        <a:font script="Laoo" typeface="DokChampa"/>
+        <a:font script="Sinh" typeface="Iskoola Pota"/>
+        <a:font script="Mong" typeface="Mongolian Baiti"/>
+        <a:font script="Viet" typeface="Times New Roman"/>
+        <a:font script="Uigh" typeface="Microsoft Uighur"/>
+        <a:font script="Geor" typeface="Sylfaen"/>
+      </a:majorFont>
+      <a:minorFont>
+        <a:latin typeface="Calibri"/>
+        <a:ea typeface=""/>
+        <a:cs typeface=""/>
+        <a:font script="Jpan" typeface="ＭＳ Ｐゴシック"/>
+        <a:font script="Hang" typeface="맑은 고딕"/>
+        <a:font script="Hans" typeface="宋体"/>
+        <a:font script="Hant" typeface="新細明體"/>
+        <a:font script="Arab" typeface="Arial"/>
+        <a:font script="Hebr" typeface="Arial"/>
+        <a:font script="Thai" typeface="Cordia New"/>
+        <a:font script="Ethi" typeface="Nyala"/>
+        <a:font script="Beng" typeface="Vrinda"/>
+        <a:font script="Gujr" typeface="Shruti"/>
+        <a:font script="Khmr" typeface="DaunPenh"/>
+        <a:font script="Knda" typeface="Tunga"/>
+        <a:font script="Guru" typeface="Raavi"/>
+        <a:font script="Cans" typeface="Euphemia"/>
+        <a:font script="Cher" typeface="Plantagenet Cherokee"/>
+        <a:font script="Yiii" typeface="Microsoft Yi Baiti"/>
+        <a:font script="Tibt" typeface="Microsoft Himalaya"/>
+        <a:font script="Thaa" typeface="MV Boli"/>
+        <a:font script="Deva" typeface="Mangal"/>
+        <a:font script="Telu" typeface="Gautami"/>
+        <a:font script="Taml" typeface="Latha"/>
+        <a:font script="Syrc" typeface="Estrangelo Edessa"/>
+        <a:font script="Orya" typeface="Kalinga"/>
+        <a:font script="Mlym" typeface="Kartika"/>
+        <a:font script="Laoo" typeface="DokChampa"/>
+        <a:font script="Sinh" typeface="Iskoola Pota"/>
+        <a:font script="Mong" typeface="Mongolian Baiti"/>
+        <a:font script="Viet" typeface="Arial"/>
+        <a:font script="Uigh" typeface="Microsoft Uighur"/>
+        <a:font script="Geor" typeface="Sylfaen"/>
+      </a:minorFont>
+    </a:fontScheme>
+    <a:fmtScheme name="Office">
+      <a:fillStyleLst>
+        <a:solidFill>
+          <a:schemeClr val="phClr"/>
+        </a:solidFill>
+        <a:gradFill rotWithShape="1">
+          <a:gsLst>
+            <a:gs pos="0">
+              <a:schemeClr val="phClr">
+                <a:tint val="50000"/>
+                <a:satMod val="300000"/>
+              </a:schemeClr>
+            </a:gs>
+            <a:gs pos="35000">
+              <a:schemeClr val="phClr">
+                <a:tint val="37000"/>
+                <a:satMod val="300000"/>
+              </a:schemeClr>
+            </a:gs>
+            <a:gs pos="100000">
+              <a:schemeClr val="phClr">
+                <a:tint val="15000"/>
+                <a:satMod val="350000"/>
+              </a:schemeClr>
+            </a:gs>
+          </a:gsLst>
+          <a:lin ang="16200000" scaled="1"/>
+        </a:gradFill>
+        <a:gradFill rotWithShape="1">
+          <a:gsLst>
+            <a:gs pos="0">
+              <a:schemeClr val="phClr">
+                <a:tint val="100000"/>
+                <a:shade val="100000"/>
+                <a:satMod val="130000"/>
+              </a:schemeClr>
+            </a:gs>
+            <a:gs pos="100000">
+              <a:schemeClr val="phClr">
+                <a:tint val="50000"/>
+                <a:shade val="100000"/>
+                <a:satMod val="350000"/>
+              </a:schemeClr>
+            </a:gs>
+          </a:gsLst>
+          <a:lin ang="16200000" scaled="0"/>
+        </a:gradFill>
+      </a:fillStyleLst>
+      <a:lnStyleLst>
+        <a:ln w="9525" cap="flat" cmpd="sng" algn="ctr">
+          <a:solidFill>
+            <a:schemeClr val="phClr">
+              <a:shade val="95000"/>
+              <a:satMod val="105000"/>
+            </a:schemeClr>
+          </a:solidFill>
+          <a:prstDash val="solid"/>
+        </a:ln>
+        <a:ln w="25400" cap="flat" cmpd="sng" algn="ctr">
+          <a:solidFill>
+            <a:schemeClr val="phClr"/>
+          </a:solidFill>
+          <a:prstDash val="solid"/>
+        </a:ln>
+        <a:ln w="38100" cap="flat" cmpd="sng" algn="ctr">
+          <a:solidFill>
+            <a:schemeClr val="phClr"/>
+          </a:solidFill>
+          <a:prstDash val="solid"/>
+        </a:ln>
+      </a:lnStyleLst>
+      <a:effectStyleLst>
+        <a:effectStyle>
+          <a:effectLst>
+            <a:outerShdw blurRad="40000" dist="20000" dir="5400000" rotWithShape="0">
+              <a:srgbClr val="000000">
+                <a:alpha val="38000"/>
+              </a:srgbClr>
+            </a:outerShdw>
+          </a:effectLst>
+        </a:effectStyle>
+        <a:effectStyle>
+          <a:effectLst>
+            <a:outerShdw blurRad="40000" dist="23000" dir="5400000" rotWithShape="0">
+              <a:srgbClr val="000000">
+                <a:alpha val="35000"/>
+              </a:srgbClr>
+            </a:outerShdw>
+          </a:effectLst>
+        </a:effectStyle>
+        <a:effectStyle>
+          <a:effectLst>
+            <a:outerShdw blurRad="40000" dist="23000" dir="5400000" rotWithShape="0">
+              <a:srgbClr val="000000">
+                <a:alpha val="35000"/>
+              </a:srgbClr>
+            </a:outerShdw>
+          </a:effectLst>
+          <a:scene3d>
+            <a:camera prst="orthographicFront">
+              <a:rot lat="0" lon="0" rev="0"/>
+            </a:camera>
+            <a:lightRig rig="threePt" dir="t">
+              <a:rot lat="0" lon="0" rev="1200000"/>
+            </a:lightRig>
+          </a:scene3d>
+          <a:sp3d>
+            <a:bevelT w="63500" h="25400"/>
+          </a:sp3d>
+        </a:effectStyle>
+      </a:effectStyleLst>
+      <a:bgFillStyleLst>
+        <a:solidFill>
+          <a:schemeClr val="phClr"/>
+        </a:solidFill>
+        <a:gradFill rotWithShape="1">
+          <a:gsLst>
+            <a:gs pos="0">
+              <a:schemeClr val="phClr">
+                <a:tint val="40000"/>
+                <a:satMod val="350000"/>
+              </a:schemeClr>
+            </a:gs>
+            <a:gs pos="40000">
+              <a:schemeClr val="phClr">
+                <a:tint val="45000"/>
+                <a:shade val="99000"/>
+                <a:satMod val="350000"/>
+              </a:schemeClr>
+            </a:gs>
+            <a:gs pos="100000">
+              <a:schemeClr val="phClr">
+                <a:shade val="20000"/>
+                <a:satMod val="255000"/>
+              </a:schemeClr>
+            </a:gs>
+          </a:gsLst>
+          <a:path path="circle">
+            <a:fillToRect l="50000" t="-80000" r="50000" b="180000"/>
+          </a:path>
+        </a:gradFill>
+        <a:gradFill rotWithShape="1">
+          <a:gsLst>
+            <a:gs pos="0">
+              <a:schemeClr val="phClr">
+                <a:tint val="80000"/>
+                <a:satMod val="300000"/>
+              </a:schemeClr>
+            </a:gs>
+            <a:gs pos="100000">
+              <a:schemeClr val="phClr">
+                <a:shade val="30000"/>
+                <a:satMod val="200000"/>
+              </a:schemeClr>
+            </a:gs>
+          </a:gsLst>
+          <a:path path="circle">
+            <a:fillToRect l="50000" t="50000" r="50000" b="50000"/>
+          </a:path>
+        </a:gradFill>
+      </a:bgFillStyleLst>
+    </a:fmtScheme>
+  </a:themeElements>
+  <a:objectDefaults>
+    <a:spDef>
+      <a:spPr/>
+      <a:bodyPr/>
+      <a:lstStyle/>
+      <a:style>
+        <a:lnRef idx="1">
+          <a:schemeClr val="accent1"/>
+        </a:lnRef>
+        <a:fillRef idx="3">
+          <a:schemeClr val="accent1"/>
+        </a:fillRef>
+        <a:effectRef idx="2">
+          <a:schemeClr val="accent1"/>
+        </a:effectRef>
+        <a:fontRef idx="minor">
+          <a:schemeClr val="lt1"/>
+        </a:fontRef>
+      </a:style>
+    </a:spDef>
+    <a:lnDef>
+      <a:spPr/>
+      <a:bodyPr/>
+      <a:lstStyle/>
+      <a:style>
+        <a:lnRef idx="2">
+          <a:schemeClr val="accent1"/>
+        </a:lnRef>
+        <a:fillRef idx="0">
+          <a:schemeClr val="accent1"/>
+        </a:fillRef>
+        <a:effectRef idx="1">
+          <a:schemeClr val="accent1"/>
+        </a:effectRef>
+        <a:fontRef idx="minor">
+          <a:schemeClr val="tx1"/>
+        </a:fontRef>
+      </a:style>
+    </a:lnDef>
+  </a:objectDefaults>
+  <a:extraClrSchemeLst/>
+</a:theme>
 </file>
--- a/aulas/aula-03-dfd-e-stride.pptx
+++ b/aulas/aula-03-dfd-e-stride.pptx
@@ -15,6 +15,7 @@
     <p:sldId id="263" r:id="rId15"/>
     <p:sldId id="264" r:id="rId16"/>
     <p:sldId id="265" r:id="rId17"/>
+    <p:sldId id="266" r:id="rId18"/>
   </p:sldIdLst>
   <p:sldSz cx="12191695" cy="6858000" type="screen4x3"/>
   <p:notesSz cx="6858000" cy="9144000"/>
@@ -721,7 +722,7 @@
           <a:lstStyle/>
           <a:p>
             <a:r>
-              <a:t>STRIDE é o método mais usado. Cada letra é uma categoria de ameaça mapeada a uma propriedade de segurança violada. A técnica prática é STRIDE-per-element: para cada elemento do DFD, pergunte quais das 6 ameaças se aplicam. Isso torna a busca sistemática, em vez de depender de inspiração.</a:t>
+              <a:t>Exemplo trabalhado do próprio VidaPlus: o titular (Usuário/navegador, do lado NÃO confiável) cruza a fronteira de confiança (tracejado vermelho) para os processos 1.0 Autenticar e 2.0 Recuperar exame (lado confiável), que acessam o armazenamento D1 Exames (PII de saúde). Repare como o requisito de segurança vira uma NOTA presa ao elemento que ele protege: na travessia da fronteira, REQ-AUTH (autenticar + validar entrada, TLS 1.3); no acesso ao dado sensível, REQ-CR (cifrar em AES-256 e liberar só ao dono — exatamente o controle contra o IDOR do exame). Esse é o formato do entregável da Fase 2a: cada travessia de fronteira e cada dado sensível ganham um requisito rastreável.</a:t>
             </a:r>
           </a:p>
         </p:txBody>
@@ -791,7 +792,7 @@
           <a:lstStyle/>
           <a:p>
             <a:r>
-              <a:t>Exemplo de tabela STRIDE-per-element aplicada ao VidaPlus. Note como cada linha termina num REQUISITO de mitigação — é assim que o threat modeling 'gera' requisitos. A última linha é o IDOR: o download de exame precisa validar, no servidor, que o exame pertence ao usuário; senão, HTTP 403 sem vazar metadados.</a:t>
+              <a:t>STRIDE é o método mais usado. Cada letra é uma categoria de ameaça mapeada a uma propriedade de segurança violada. A técnica prática é STRIDE-per-element: para cada elemento do DFD, pergunte quais das 6 ameaças se aplicam. Isso torna a busca sistemática, em vez de depender de inspiração.</a:t>
             </a:r>
           </a:p>
         </p:txBody>
@@ -817,6 +818,76 @@
 </file>
 
 <file path=ppt/notesSlides/notesSlide6.xml><?xml version="1.0" encoding="utf-8"?>
+<p:notes xmlns:a="http://schemas.openxmlformats.org/drawingml/2006/main" xmlns:p="http://schemas.openxmlformats.org/presentationml/2006/main" xmlns:r="http://schemas.openxmlformats.org/officeDocument/2006/relationships">
+  <p:cSld>
+    <p:spTree>
+      <p:nvGrpSpPr>
+        <p:cNvPr id="1" name=""/>
+        <p:cNvGrpSpPr/>
+        <p:nvPr/>
+      </p:nvGrpSpPr>
+      <p:grpSpPr>
+        <a:xfrm>
+          <a:off x="0" y="0"/>
+          <a:ext cx="0" cy="0"/>
+          <a:chOff x="0" y="0"/>
+          <a:chExt cx="0" cy="0"/>
+        </a:xfrm>
+      </p:grpSpPr>
+      <p:sp>
+        <p:nvSpPr>
+          <p:cNvPr id="2" name="Slide Image Placeholder 1"/>
+          <p:cNvSpPr>
+            <a:spLocks noGrp="1"/>
+          </p:cNvSpPr>
+          <p:nvPr>
+            <p:ph type="sldImg" idx="2"/>
+          </p:nvPr>
+        </p:nvSpPr>
+        <p:spPr/>
+      </p:sp>
+      <p:sp>
+        <p:nvSpPr>
+          <p:cNvPr id="3" name="Notes Placeholder 2"/>
+          <p:cNvSpPr>
+            <a:spLocks noGrp="1"/>
+          </p:cNvSpPr>
+          <p:nvPr>
+            <p:ph type="body" idx="3" sz="quarter"/>
+          </p:nvPr>
+        </p:nvSpPr>
+        <p:spPr/>
+        <p:txBody>
+          <a:bodyPr/>
+          <a:lstStyle/>
+          <a:p>
+            <a:r>
+              <a:t>Exemplo de tabela STRIDE-per-element aplicada ao VidaPlus. Note como cada linha termina num REQUISITO de mitigação — é assim que o threat modeling 'gera' requisitos. A última linha é o IDOR: o download de exame precisa validar, no servidor, que o exame pertence ao usuário; senão, HTTP 403 sem vazar metadados.</a:t>
+            </a:r>
+          </a:p>
+        </p:txBody>
+      </p:sp>
+      <p:sp>
+        <p:nvSpPr>
+          <p:cNvPr id="4" name="Slide Number Placeholder 3"/>
+          <p:cNvSpPr>
+            <a:spLocks noGrp="1"/>
+          </p:cNvSpPr>
+          <p:nvPr>
+            <p:ph type="sldNum" idx="5" sz="quarter"/>
+          </p:nvPr>
+        </p:nvSpPr>
+        <p:spPr/>
+      </p:sp>
+    </p:spTree>
+  </p:cSld>
+  <p:clrMapOvr>
+    <a:masterClrMapping/>
+  </p:clrMapOvr>
+</p:notes>
+</file>
+
+<file path=ppt/notesSlides/notesSlide7.xml><?xml version="1.0" encoding="utf-8"?>
 <p:notes xmlns:a="http://schemas.openxmlformats.org/drawingml/2006/main" xmlns:p="http://schemas.openxmlformats.org/presentationml/2006/main" xmlns:r="http://schemas.openxmlformats.org/officeDocument/2006/relationships">
   <p:cSld>
     <p:spTree>
@@ -4231,6 +4302,457 @@
         <p:spPr>
           <a:xfrm>
             <a:off x="0" y="0"/>
+            <a:ext cx="12191695" cy="1234440"/>
+          </a:xfrm>
+          <a:prstGeom prst="rect">
+            <a:avLst/>
+          </a:prstGeom>
+          <a:solidFill>
+            <a:srgbClr val="2D7A3D"/>
+          </a:solidFill>
+          <a:ln>
+            <a:noFill/>
+          </a:ln>
+          <a:effectLst/>
+        </p:spPr>
+        <p:style>
+          <a:lnRef idx="1">
+            <a:schemeClr val="accent1"/>
+          </a:lnRef>
+          <a:fillRef idx="3">
+            <a:schemeClr val="accent1"/>
+          </a:fillRef>
+          <a:effectRef idx="2">
+            <a:schemeClr val="accent1"/>
+          </a:effectRef>
+          <a:fontRef idx="minor">
+            <a:schemeClr val="lt1"/>
+          </a:fontRef>
+        </p:style>
+        <p:txBody>
+          <a:bodyPr rtlCol="0" anchor="ctr"/>
+          <a:lstStyle/>
+          <a:p>
+            <a:pPr algn="ctr"/>
+          </a:p>
+        </p:txBody>
+      </p:sp>
+      <p:sp>
+        <p:nvSpPr>
+          <p:cNvPr id="3" name="TextBox 2"/>
+          <p:cNvSpPr txBox="1"/>
+          <p:nvPr/>
+        </p:nvSpPr>
+        <p:spPr>
+          <a:xfrm>
+            <a:off x="457200" y="164592"/>
+            <a:ext cx="11247120" cy="640080"/>
+          </a:xfrm>
+          <a:prstGeom prst="rect">
+            <a:avLst/>
+          </a:prstGeom>
+          <a:noFill/>
+        </p:spPr>
+        <p:txBody>
+          <a:bodyPr wrap="square" anchor="t" lIns="0" rIns="0" tIns="0" bIns="0">
+            <a:spAutoFit/>
+          </a:bodyPr>
+          <a:lstStyle/>
+          <a:p>
+            <a:pPr algn="l">
+              <a:lnSpc>
+                <a:spcPct val="100000"/>
+              </a:lnSpc>
+              <a:spcBef>
+                <a:spcPts val="0"/>
+              </a:spcBef>
+              <a:spcAft>
+                <a:spcPts val="600"/>
+              </a:spcAft>
+            </a:pPr>
+            <a:r>
+              <a:rPr sz="3200" b="1" i="0">
+                <a:solidFill>
+                  <a:srgbClr val="FFFFFF"/>
+                </a:solidFill>
+                <a:latin typeface="Open Sans"/>
+              </a:rPr>
+              <a:t>Entregável da Fase 2a</a:t>
+            </a:r>
+          </a:p>
+        </p:txBody>
+      </p:sp>
+      <p:sp>
+        <p:nvSpPr>
+          <p:cNvPr id="4" name="TextBox 3"/>
+          <p:cNvSpPr txBox="1"/>
+          <p:nvPr/>
+        </p:nvSpPr>
+        <p:spPr>
+          <a:xfrm>
+            <a:off x="457200" y="777240"/>
+            <a:ext cx="11247120" cy="365760"/>
+          </a:xfrm>
+          <a:prstGeom prst="rect">
+            <a:avLst/>
+          </a:prstGeom>
+          <a:noFill/>
+        </p:spPr>
+        <p:txBody>
+          <a:bodyPr wrap="square" anchor="t" lIns="0" rIns="0" tIns="0" bIns="0">
+            <a:spAutoFit/>
+          </a:bodyPr>
+          <a:lstStyle/>
+          <a:p>
+            <a:pPr algn="l">
+              <a:lnSpc>
+                <a:spcPct val="100000"/>
+              </a:lnSpc>
+              <a:spcBef>
+                <a:spcPts val="0"/>
+              </a:spcBef>
+              <a:spcAft>
+                <a:spcPts val="600"/>
+              </a:spcAft>
+            </a:pPr>
+            <a:r>
+              <a:rPr sz="1600" b="0" i="1">
+                <a:solidFill>
+                  <a:srgbClr val="E0E8DB"/>
+                </a:solidFill>
+                <a:latin typeface="Open Sans"/>
+              </a:rPr>
+              <a:t>Modelo de ameaças de segurança</a:t>
+            </a:r>
+          </a:p>
+        </p:txBody>
+      </p:sp>
+      <p:sp>
+        <p:nvSpPr>
+          <p:cNvPr id="5" name="Rounded Rectangle 4"/>
+          <p:cNvSpPr/>
+          <p:nvPr/>
+        </p:nvSpPr>
+        <p:spPr>
+          <a:xfrm>
+            <a:off x="411480" y="1463040"/>
+            <a:ext cx="11384280" cy="5029200"/>
+          </a:xfrm>
+          <a:prstGeom prst="roundRect">
+            <a:avLst/>
+          </a:prstGeom>
+          <a:solidFill>
+            <a:srgbClr val="F5F5F5"/>
+          </a:solidFill>
+          <a:ln w="15875">
+            <a:solidFill>
+              <a:srgbClr val="7CB342"/>
+            </a:solidFill>
+          </a:ln>
+          <a:effectLst/>
+        </p:spPr>
+        <p:style>
+          <a:lnRef idx="1">
+            <a:schemeClr val="accent1"/>
+          </a:lnRef>
+          <a:fillRef idx="3">
+            <a:schemeClr val="accent1"/>
+          </a:fillRef>
+          <a:effectRef idx="2">
+            <a:schemeClr val="accent1"/>
+          </a:effectRef>
+          <a:fontRef idx="minor">
+            <a:schemeClr val="lt1"/>
+          </a:fontRef>
+        </p:style>
+        <p:txBody>
+          <a:bodyPr rtlCol="0" anchor="ctr"/>
+          <a:lstStyle/>
+          <a:p>
+            <a:pPr algn="ctr"/>
+          </a:p>
+        </p:txBody>
+      </p:sp>
+      <p:sp>
+        <p:nvSpPr>
+          <p:cNvPr id="6" name="TextBox 5"/>
+          <p:cNvSpPr txBox="1"/>
+          <p:nvPr/>
+        </p:nvSpPr>
+        <p:spPr>
+          <a:xfrm>
+            <a:off x="868680" y="1783080"/>
+            <a:ext cx="10515600" cy="4572000"/>
+          </a:xfrm>
+          <a:prstGeom prst="rect">
+            <a:avLst/>
+          </a:prstGeom>
+          <a:noFill/>
+        </p:spPr>
+        <p:txBody>
+          <a:bodyPr wrap="square">
+            <a:spAutoFit/>
+          </a:bodyPr>
+          <a:lstStyle/>
+          <a:p>
+            <a:pPr algn="l">
+              <a:lnSpc>
+                <a:spcPct val="110000"/>
+              </a:lnSpc>
+              <a:spcAft>
+                <a:spcPts val="1400"/>
+              </a:spcAft>
+            </a:pPr>
+            <a:r>
+              <a:rPr sz="2000" b="1">
+                <a:solidFill>
+                  <a:srgbClr val="7CB342"/>
+                </a:solidFill>
+                <a:latin typeface="Open Sans"/>
+              </a:rPr>
+              <a:t>▸ </a:t>
+            </a:r>
+            <a:r>
+              <a:rPr sz="1800" b="1">
+                <a:solidFill>
+                  <a:srgbClr val="2D7A3D"/>
+                </a:solidFill>
+                <a:latin typeface="Open Sans"/>
+              </a:rPr>
+              <a:t>DFD: </a:t>
+            </a:r>
+            <a:r>
+              <a:rPr sz="1800">
+                <a:solidFill>
+                  <a:srgbClr val="212121"/>
+                </a:solidFill>
+                <a:latin typeface="Open Sans"/>
+              </a:rPr>
+              <a:t>desenhe o recorte (login, download de laudo) com as fronteiras.</a:t>
+            </a:r>
+          </a:p>
+          <a:p>
+            <a:pPr algn="l">
+              <a:lnSpc>
+                <a:spcPct val="110000"/>
+              </a:lnSpc>
+              <a:spcAft>
+                <a:spcPts val="1400"/>
+              </a:spcAft>
+            </a:pPr>
+            <a:r>
+              <a:rPr sz="2000" b="1">
+                <a:solidFill>
+                  <a:srgbClr val="7CB342"/>
+                </a:solidFill>
+                <a:latin typeface="Open Sans"/>
+              </a:rPr>
+              <a:t>▸ </a:t>
+            </a:r>
+            <a:r>
+              <a:rPr sz="1800" b="1">
+                <a:solidFill>
+                  <a:srgbClr val="2D7A3D"/>
+                </a:solidFill>
+                <a:latin typeface="Open Sans"/>
+              </a:rPr>
+              <a:t>STRIDE-per-element: </a:t>
+            </a:r>
+            <a:r>
+              <a:rPr sz="1800">
+                <a:solidFill>
+                  <a:srgbClr val="212121"/>
+                </a:solidFill>
+                <a:latin typeface="Open Sans"/>
+              </a:rPr>
+              <a:t>para cada elemento, marque as ameaças e o requisito.</a:t>
+            </a:r>
+          </a:p>
+          <a:p>
+            <a:pPr algn="l">
+              <a:lnSpc>
+                <a:spcPct val="110000"/>
+              </a:lnSpc>
+              <a:spcAft>
+                <a:spcPts val="1400"/>
+              </a:spcAft>
+            </a:pPr>
+            <a:r>
+              <a:rPr sz="2000" b="1">
+                <a:solidFill>
+                  <a:srgbClr val="7CB342"/>
+                </a:solidFill>
+                <a:latin typeface="Open Sans"/>
+              </a:rPr>
+              <a:t>▸ </a:t>
+            </a:r>
+            <a:r>
+              <a:rPr sz="1800" b="1">
+                <a:solidFill>
+                  <a:srgbClr val="2D7A3D"/>
+                </a:solidFill>
+                <a:latin typeface="Open Sans"/>
+              </a:rPr>
+              <a:t>Árvore de ataque: </a:t>
+            </a:r>
+            <a:r>
+              <a:rPr sz="1800">
+                <a:solidFill>
+                  <a:srgbClr val="212121"/>
+                </a:solidFill>
+                <a:latin typeface="Open Sans"/>
+              </a:rPr>
+              <a:t>decomponha o objetivo 'obter laudo de outro paciente'.</a:t>
+            </a:r>
+          </a:p>
+          <a:p>
+            <a:pPr algn="l">
+              <a:lnSpc>
+                <a:spcPct val="110000"/>
+              </a:lnSpc>
+              <a:spcAft>
+                <a:spcPts val="1400"/>
+              </a:spcAft>
+            </a:pPr>
+            <a:r>
+              <a:rPr sz="2000" b="1">
+                <a:solidFill>
+                  <a:srgbClr val="7CB342"/>
+                </a:solidFill>
+                <a:latin typeface="Open Sans"/>
+              </a:rPr>
+              <a:t>▸ </a:t>
+            </a:r>
+            <a:r>
+              <a:rPr sz="1800" b="1">
+                <a:solidFill>
+                  <a:srgbClr val="2D7A3D"/>
+                </a:solidFill>
+                <a:latin typeface="Open Sans"/>
+              </a:rPr>
+              <a:t>Derive requisitos: </a:t>
+            </a:r>
+            <a:r>
+              <a:rPr sz="1800">
+                <a:solidFill>
+                  <a:srgbClr val="212121"/>
+                </a:solidFill>
+                <a:latin typeface="Open Sans"/>
+              </a:rPr>
+              <a:t>cada ameaça concreta vira um requisito testável.</a:t>
+            </a:r>
+          </a:p>
+          <a:p>
+            <a:pPr algn="l">
+              <a:lnSpc>
+                <a:spcPct val="110000"/>
+              </a:lnSpc>
+              <a:spcAft>
+                <a:spcPts val="1400"/>
+              </a:spcAft>
+            </a:pPr>
+            <a:r>
+              <a:rPr sz="2000" b="1">
+                <a:solidFill>
+                  <a:srgbClr val="7CB342"/>
+                </a:solidFill>
+                <a:latin typeface="Open Sans"/>
+              </a:rPr>
+              <a:t>▸ </a:t>
+            </a:r>
+            <a:r>
+              <a:rPr sz="1800" b="1">
+                <a:solidFill>
+                  <a:srgbClr val="2D7A3D"/>
+                </a:solidFill>
+                <a:latin typeface="Open Sans"/>
+              </a:rPr>
+              <a:t>Alvo do exercício: </a:t>
+            </a:r>
+            <a:r>
+              <a:rPr sz="1800">
+                <a:solidFill>
+                  <a:srgbClr val="212121"/>
+                </a:solidFill>
+                <a:latin typeface="Open Sans"/>
+              </a:rPr>
+              <a:t>o IDOR no download (paciente A baixa o exame de B).</a:t>
+            </a:r>
+          </a:p>
+        </p:txBody>
+      </p:sp>
+      <p:sp>
+        <p:nvSpPr>
+          <p:cNvPr id="7" name="TextBox 6"/>
+          <p:cNvSpPr txBox="1"/>
+          <p:nvPr/>
+        </p:nvSpPr>
+        <p:spPr>
+          <a:xfrm>
+            <a:off x="10972800" y="6446520"/>
+            <a:ext cx="914400" cy="320040"/>
+          </a:xfrm>
+          <a:prstGeom prst="rect">
+            <a:avLst/>
+          </a:prstGeom>
+          <a:noFill/>
+        </p:spPr>
+        <p:txBody>
+          <a:bodyPr wrap="square" anchor="t" lIns="0" rIns="0" tIns="0" bIns="0">
+            <a:spAutoFit/>
+          </a:bodyPr>
+          <a:lstStyle/>
+          <a:p>
+            <a:pPr algn="r">
+              <a:lnSpc>
+                <a:spcPct val="100000"/>
+              </a:lnSpc>
+              <a:spcBef>
+                <a:spcPts val="0"/>
+              </a:spcBef>
+              <a:spcAft>
+                <a:spcPts val="600"/>
+              </a:spcAft>
+            </a:pPr>
+            <a:r>
+              <a:rPr sz="1100" b="0" i="0">
+                <a:solidFill>
+                  <a:srgbClr val="616161"/>
+                </a:solidFill>
+                <a:latin typeface="Open Sans"/>
+              </a:rPr>
+              <a:t>10</a:t>
+            </a:r>
+          </a:p>
+        </p:txBody>
+      </p:sp>
+    </p:spTree>
+  </p:cSld>
+  <p:clrMapOvr>
+    <a:masterClrMapping/>
+  </p:clrMapOvr>
+</p:sld>
+</file>
+
+<file path=ppt/slides/slide11.xml><?xml version="1.0" encoding="utf-8"?>
+<p:sld xmlns:a="http://schemas.openxmlformats.org/drawingml/2006/main" xmlns:p="http://schemas.openxmlformats.org/presentationml/2006/main" xmlns:r="http://schemas.openxmlformats.org/officeDocument/2006/relationships">
+  <p:cSld>
+    <p:spTree>
+      <p:nvGrpSpPr>
+        <p:cNvPr id="1" name=""/>
+        <p:cNvGrpSpPr/>
+        <p:nvPr/>
+      </p:nvGrpSpPr>
+      <p:grpSpPr/>
+      <p:sp>
+        <p:nvSpPr>
+          <p:cNvPr id="2" name="Rectangle 1"/>
+          <p:cNvSpPr/>
+          <p:nvPr/>
+        </p:nvSpPr>
+        <p:spPr>
+          <a:xfrm>
+            <a:off x="0" y="0"/>
             <a:ext cx="12191695" cy="6858000"/>
           </a:xfrm>
           <a:prstGeom prst="rect">
@@ -5974,13 +6496,13 @@
         <p:spPr>
           <a:xfrm>
             <a:off x="0" y="0"/>
-            <a:ext cx="12191695" cy="6858000"/>
+            <a:ext cx="12191695" cy="1234440"/>
           </a:xfrm>
           <a:prstGeom prst="rect">
             <a:avLst/>
           </a:prstGeom>
           <a:solidFill>
-            <a:srgbClr val="1F5232"/>
+            <a:srgbClr val="2D7A3D"/>
           </a:solidFill>
           <a:ln>
             <a:noFill/>
@@ -6017,8 +6539,8 @@
         </p:nvSpPr>
         <p:spPr>
           <a:xfrm>
-            <a:off x="457200" y="2194560"/>
-            <a:ext cx="11247120" cy="548640"/>
+            <a:off x="457200" y="164592"/>
+            <a:ext cx="11247120" cy="640080"/>
           </a:xfrm>
           <a:prstGeom prst="rect">
             <a:avLst/>
@@ -6031,7 +6553,7 @@
           </a:bodyPr>
           <a:lstStyle/>
           <a:p>
-            <a:pPr algn="ctr">
+            <a:pPr algn="l">
               <a:lnSpc>
                 <a:spcPct val="100000"/>
               </a:lnSpc>
@@ -6043,13 +6565,13 @@
               </a:spcAft>
             </a:pPr>
             <a:r>
-              <a:rPr sz="2000" b="1" i="0">
-                <a:solidFill>
-                  <a:srgbClr val="7CB342"/>
+              <a:rPr sz="3200" b="1" i="0">
+                <a:solidFill>
+                  <a:srgbClr val="FFFFFF"/>
                 </a:solidFill>
                 <a:latin typeface="Open Sans"/>
               </a:rPr>
-              <a:t>PARTE 2</a:t>
+              <a:t>DFD com trust boundaries — exemplo</a:t>
             </a:r>
           </a:p>
         </p:txBody>
@@ -6062,8 +6584,8 @@
         </p:nvSpPr>
         <p:spPr>
           <a:xfrm>
-            <a:off x="457200" y="2834640"/>
-            <a:ext cx="11247120" cy="1280160"/>
+            <a:off x="457200" y="777240"/>
+            <a:ext cx="11247120" cy="365760"/>
           </a:xfrm>
           <a:prstGeom prst="rect">
             <a:avLst/>
@@ -6076,7 +6598,7 @@
           </a:bodyPr>
           <a:lstStyle/>
           <a:p>
-            <a:pPr algn="ctr">
+            <a:pPr algn="l">
               <a:lnSpc>
                 <a:spcPct val="100000"/>
               </a:lnSpc>
@@ -6088,27 +6610,51 @@
               </a:spcAft>
             </a:pPr>
             <a:r>
-              <a:rPr sz="6000" b="1" i="0">
-                <a:solidFill>
-                  <a:srgbClr val="FFFFFF"/>
+              <a:rPr sz="1600" b="0" i="1">
+                <a:solidFill>
+                  <a:srgbClr val="E0E8DB"/>
                 </a:solidFill>
                 <a:latin typeface="Open Sans"/>
               </a:rPr>
-              <a:t>STRIDE</a:t>
-            </a:r>
-          </a:p>
-        </p:txBody>
-      </p:sp>
-      <p:sp>
-        <p:nvSpPr>
-          <p:cNvPr id="5" name="TextBox 4"/>
+              <a:t>O requisito de segurança como nota na própria modelagem</a:t>
+            </a:r>
+          </a:p>
+        </p:txBody>
+      </p:sp>
+      <p:pic>
+        <p:nvPicPr>
+          <p:cNvPr id="5" name="Picture 4" descr="dfd_exemplo.png"/>
+          <p:cNvPicPr>
+            <a:picLocks noChangeAspect="1"/>
+          </p:cNvPicPr>
+          <p:nvPr/>
+        </p:nvPicPr>
+        <p:blipFill>
+          <a:blip r:embed="rId2"/>
+          <a:stretch>
+            <a:fillRect/>
+          </a:stretch>
+        </p:blipFill>
+        <p:spPr>
+          <a:xfrm>
+            <a:off x="426567" y="1689291"/>
+            <a:ext cx="11338560" cy="4485257"/>
+          </a:xfrm>
+          <a:prstGeom prst="rect">
+            <a:avLst/>
+          </a:prstGeom>
+        </p:spPr>
+      </p:pic>
+      <p:sp>
+        <p:nvSpPr>
+          <p:cNvPr id="6" name="TextBox 5"/>
           <p:cNvSpPr txBox="1"/>
           <p:nvPr/>
         </p:nvSpPr>
         <p:spPr>
           <a:xfrm>
-            <a:off x="457200" y="4297680"/>
-            <a:ext cx="11247120" cy="457200"/>
+            <a:off x="10972800" y="6446520"/>
+            <a:ext cx="914400" cy="320040"/>
           </a:xfrm>
           <a:prstGeom prst="rect">
             <a:avLst/>
@@ -6121,7 +6667,7 @@
           </a:bodyPr>
           <a:lstStyle/>
           <a:p>
-            <a:pPr algn="ctr">
+            <a:pPr algn="r">
               <a:lnSpc>
                 <a:spcPct val="100000"/>
               </a:lnSpc>
@@ -6133,58 +6679,14 @@
               </a:spcAft>
             </a:pPr>
             <a:r>
-              <a:rPr sz="2200" b="0" i="1">
-                <a:solidFill>
-                  <a:srgbClr val="CCD7C0"/>
+              <a:rPr sz="1100" b="0" i="0">
+                <a:solidFill>
+                  <a:srgbClr val="616161"/>
                 </a:solidFill>
                 <a:latin typeface="Open Sans"/>
               </a:rPr>
-              <a:t>Cada letra = uma ameaça × uma propriedade</a:t>
-            </a:r>
-          </a:p>
-        </p:txBody>
-      </p:sp>
-      <p:sp>
-        <p:nvSpPr>
-          <p:cNvPr id="6" name="Rectangle 5"/>
-          <p:cNvSpPr/>
-          <p:nvPr/>
-        </p:nvSpPr>
-        <p:spPr>
-          <a:xfrm>
-            <a:off x="5184648" y="4983480"/>
-            <a:ext cx="1828800" cy="25400"/>
-          </a:xfrm>
-          <a:prstGeom prst="rect">
-            <a:avLst/>
-          </a:prstGeom>
-          <a:solidFill>
-            <a:srgbClr val="7CB342"/>
-          </a:solidFill>
-          <a:ln>
-            <a:noFill/>
-          </a:ln>
-          <a:effectLst/>
-        </p:spPr>
-        <p:style>
-          <a:lnRef idx="1">
-            <a:schemeClr val="accent1"/>
-          </a:lnRef>
-          <a:fillRef idx="3">
-            <a:schemeClr val="accent1"/>
-          </a:fillRef>
-          <a:effectRef idx="2">
-            <a:schemeClr val="accent1"/>
-          </a:effectRef>
-          <a:fontRef idx="minor">
-            <a:schemeClr val="lt1"/>
-          </a:fontRef>
-        </p:style>
-        <p:txBody>
-          <a:bodyPr rtlCol="0" anchor="ctr"/>
-          <a:lstStyle/>
-          <a:p>
-            <a:pPr algn="ctr"/>
+              <a:t>5</a:t>
+            </a:r>
           </a:p>
         </p:txBody>
       </p:sp>
@@ -6215,13 +6717,13 @@
         <p:spPr>
           <a:xfrm>
             <a:off x="0" y="0"/>
-            <a:ext cx="12191695" cy="1234440"/>
+            <a:ext cx="12191695" cy="6858000"/>
           </a:xfrm>
           <a:prstGeom prst="rect">
             <a:avLst/>
           </a:prstGeom>
           <a:solidFill>
-            <a:srgbClr val="2D7A3D"/>
+            <a:srgbClr val="1F5232"/>
           </a:solidFill>
           <a:ln>
             <a:noFill/>
@@ -6258,188 +6760,8 @@
         </p:nvSpPr>
         <p:spPr>
           <a:xfrm>
-            <a:off x="457200" y="164592"/>
-            <a:ext cx="11247120" cy="640080"/>
-          </a:xfrm>
-          <a:prstGeom prst="rect">
-            <a:avLst/>
-          </a:prstGeom>
-          <a:noFill/>
-        </p:spPr>
-        <p:txBody>
-          <a:bodyPr wrap="square" anchor="t" lIns="0" rIns="0" tIns="0" bIns="0">
-            <a:spAutoFit/>
-          </a:bodyPr>
-          <a:lstStyle/>
-          <a:p>
-            <a:pPr algn="l">
-              <a:lnSpc>
-                <a:spcPct val="100000"/>
-              </a:lnSpc>
-              <a:spcBef>
-                <a:spcPts val="0"/>
-              </a:spcBef>
-              <a:spcAft>
-                <a:spcPts val="600"/>
-              </a:spcAft>
-            </a:pPr>
-            <a:r>
-              <a:rPr sz="3200" b="1" i="0">
-                <a:solidFill>
-                  <a:srgbClr val="FFFFFF"/>
-                </a:solidFill>
-                <a:latin typeface="Open Sans"/>
-              </a:rPr>
-              <a:t>STRIDE</a:t>
-            </a:r>
-          </a:p>
-        </p:txBody>
-      </p:sp>
-      <p:sp>
-        <p:nvSpPr>
-          <p:cNvPr id="4" name="TextBox 3"/>
-          <p:cNvSpPr txBox="1"/>
-          <p:nvPr/>
-        </p:nvSpPr>
-        <p:spPr>
-          <a:xfrm>
-            <a:off x="457200" y="777240"/>
-            <a:ext cx="11247120" cy="365760"/>
-          </a:xfrm>
-          <a:prstGeom prst="rect">
-            <a:avLst/>
-          </a:prstGeom>
-          <a:noFill/>
-        </p:spPr>
-        <p:txBody>
-          <a:bodyPr wrap="square" anchor="t" lIns="0" rIns="0" tIns="0" bIns="0">
-            <a:spAutoFit/>
-          </a:bodyPr>
-          <a:lstStyle/>
-          <a:p>
-            <a:pPr algn="l">
-              <a:lnSpc>
-                <a:spcPct val="100000"/>
-              </a:lnSpc>
-              <a:spcBef>
-                <a:spcPts val="0"/>
-              </a:spcBef>
-              <a:spcAft>
-                <a:spcPts val="600"/>
-              </a:spcAft>
-            </a:pPr>
-            <a:r>
-              <a:rPr sz="1600" b="0" i="1">
-                <a:solidFill>
-                  <a:srgbClr val="E0E8DB"/>
-                </a:solidFill>
-                <a:latin typeface="Open Sans"/>
-              </a:rPr>
-              <a:t>Microsoft · a ameaça e a propriedade que ela viola</a:t>
-            </a:r>
-          </a:p>
-        </p:txBody>
-      </p:sp>
-      <p:sp>
-        <p:nvSpPr>
-          <p:cNvPr id="5" name="Rounded Rectangle 4"/>
-          <p:cNvSpPr/>
-          <p:nvPr/>
-        </p:nvSpPr>
-        <p:spPr>
-          <a:xfrm>
-            <a:off x="411480" y="1463040"/>
-            <a:ext cx="3703320" cy="2468880"/>
-          </a:xfrm>
-          <a:prstGeom prst="roundRect">
-            <a:avLst/>
-          </a:prstGeom>
-          <a:solidFill>
-            <a:srgbClr val="F5F5F5"/>
-          </a:solidFill>
-          <a:ln w="19050">
-            <a:solidFill>
-              <a:srgbClr val="B71C1C"/>
-            </a:solidFill>
-          </a:ln>
-          <a:effectLst/>
-        </p:spPr>
-        <p:style>
-          <a:lnRef idx="1">
-            <a:schemeClr val="accent1"/>
-          </a:lnRef>
-          <a:fillRef idx="3">
-            <a:schemeClr val="accent1"/>
-          </a:fillRef>
-          <a:effectRef idx="2">
-            <a:schemeClr val="accent1"/>
-          </a:effectRef>
-          <a:fontRef idx="minor">
-            <a:schemeClr val="lt1"/>
-          </a:fontRef>
-        </p:style>
-        <p:txBody>
-          <a:bodyPr rtlCol="0" anchor="ctr"/>
-          <a:lstStyle/>
-          <a:p>
-            <a:pPr algn="ctr"/>
-          </a:p>
-        </p:txBody>
-      </p:sp>
-      <p:sp>
-        <p:nvSpPr>
-          <p:cNvPr id="6" name="Oval 5"/>
-          <p:cNvSpPr/>
-          <p:nvPr/>
-        </p:nvSpPr>
-        <p:spPr>
-          <a:xfrm>
-            <a:off x="1943100" y="1664208"/>
-            <a:ext cx="640080" cy="640080"/>
-          </a:xfrm>
-          <a:prstGeom prst="ellipse">
-            <a:avLst/>
-          </a:prstGeom>
-          <a:solidFill>
-            <a:srgbClr val="B71C1C"/>
-          </a:solidFill>
-          <a:ln>
-            <a:noFill/>
-          </a:ln>
-          <a:effectLst/>
-        </p:spPr>
-        <p:style>
-          <a:lnRef idx="1">
-            <a:schemeClr val="accent1"/>
-          </a:lnRef>
-          <a:fillRef idx="3">
-            <a:schemeClr val="accent1"/>
-          </a:fillRef>
-          <a:effectRef idx="2">
-            <a:schemeClr val="accent1"/>
-          </a:effectRef>
-          <a:fontRef idx="minor">
-            <a:schemeClr val="lt1"/>
-          </a:fontRef>
-        </p:style>
-        <p:txBody>
-          <a:bodyPr rtlCol="0" anchor="ctr"/>
-          <a:lstStyle/>
-          <a:p>
-            <a:pPr algn="ctr"/>
-          </a:p>
-        </p:txBody>
-      </p:sp>
-      <p:sp>
-        <p:nvSpPr>
-          <p:cNvPr id="7" name="TextBox 6"/>
-          <p:cNvSpPr txBox="1"/>
-          <p:nvPr/>
-        </p:nvSpPr>
-        <p:spPr>
-          <a:xfrm>
-            <a:off x="1943100" y="1755648"/>
-            <a:ext cx="640080" cy="457200"/>
+            <a:off x="457200" y="2194560"/>
+            <a:ext cx="11247120" cy="548640"/>
           </a:xfrm>
           <a:prstGeom prst="rect">
             <a:avLst/>
@@ -6464,27 +6786,27 @@
               </a:spcAft>
             </a:pPr>
             <a:r>
-              <a:rPr sz="1600" b="1" i="0">
-                <a:solidFill>
-                  <a:srgbClr val="FFFFFF"/>
+              <a:rPr sz="2000" b="1" i="0">
+                <a:solidFill>
+                  <a:srgbClr val="7CB342"/>
                 </a:solidFill>
                 <a:latin typeface="Open Sans"/>
               </a:rPr>
-              <a:t>01</a:t>
-            </a:r>
-          </a:p>
-        </p:txBody>
-      </p:sp>
-      <p:sp>
-        <p:nvSpPr>
-          <p:cNvPr id="8" name="TextBox 7"/>
+              <a:t>PARTE 2</a:t>
+            </a:r>
+          </a:p>
+        </p:txBody>
+      </p:sp>
+      <p:sp>
+        <p:nvSpPr>
+          <p:cNvPr id="4" name="TextBox 3"/>
           <p:cNvSpPr txBox="1"/>
           <p:nvPr/>
         </p:nvSpPr>
         <p:spPr>
           <a:xfrm>
-            <a:off x="594360" y="2377440"/>
-            <a:ext cx="3337560" cy="457200"/>
+            <a:off x="457200" y="2834640"/>
+            <a:ext cx="11247120" cy="1280160"/>
           </a:xfrm>
           <a:prstGeom prst="rect">
             <a:avLst/>
@@ -6509,162 +6831,27 @@
               </a:spcAft>
             </a:pPr>
             <a:r>
-              <a:rPr sz="1800" b="1" i="0">
-                <a:solidFill>
-                  <a:srgbClr val="2D7A3D"/>
+              <a:rPr sz="6000" b="1" i="0">
+                <a:solidFill>
+                  <a:srgbClr val="FFFFFF"/>
                 </a:solidFill>
                 <a:latin typeface="Open Sans"/>
               </a:rPr>
-              <a:t>Spoofing</a:t>
-            </a:r>
-          </a:p>
-        </p:txBody>
-      </p:sp>
-      <p:sp>
-        <p:nvSpPr>
-          <p:cNvPr id="9" name="TextBox 8"/>
+              <a:t>STRIDE</a:t>
+            </a:r>
+          </a:p>
+        </p:txBody>
+      </p:sp>
+      <p:sp>
+        <p:nvSpPr>
+          <p:cNvPr id="5" name="TextBox 4"/>
           <p:cNvSpPr txBox="1"/>
           <p:nvPr/>
         </p:nvSpPr>
         <p:spPr>
           <a:xfrm>
-            <a:off x="640080" y="2880360"/>
-            <a:ext cx="3246120" cy="914400"/>
-          </a:xfrm>
-          <a:prstGeom prst="rect">
-            <a:avLst/>
-          </a:prstGeom>
-          <a:noFill/>
-        </p:spPr>
-        <p:txBody>
-          <a:bodyPr wrap="square" anchor="t" lIns="0" rIns="0" tIns="0" bIns="0">
-            <a:spAutoFit/>
-          </a:bodyPr>
-          <a:lstStyle/>
-          <a:p>
-            <a:pPr algn="ctr">
-              <a:lnSpc>
-                <a:spcPct val="110000"/>
-              </a:lnSpc>
-              <a:spcBef>
-                <a:spcPts val="0"/>
-              </a:spcBef>
-              <a:spcAft>
-                <a:spcPts val="600"/>
-              </a:spcAft>
-            </a:pPr>
-            <a:r>
-              <a:rPr sz="1300" b="0" i="0">
-                <a:solidFill>
-                  <a:srgbClr val="212121"/>
-                </a:solidFill>
-                <a:latin typeface="Open Sans"/>
-              </a:rPr>
-              <a:t>vs Authenticity — passar-se por outro (cookie roubado)</a:t>
-            </a:r>
-          </a:p>
-        </p:txBody>
-      </p:sp>
-      <p:sp>
-        <p:nvSpPr>
-          <p:cNvPr id="10" name="Rounded Rectangle 9"/>
-          <p:cNvSpPr/>
-          <p:nvPr/>
-        </p:nvSpPr>
-        <p:spPr>
-          <a:xfrm>
-            <a:off x="4416552" y="1463040"/>
-            <a:ext cx="3703320" cy="2468880"/>
-          </a:xfrm>
-          <a:prstGeom prst="roundRect">
-            <a:avLst/>
-          </a:prstGeom>
-          <a:solidFill>
-            <a:srgbClr val="F5F5F5"/>
-          </a:solidFill>
-          <a:ln w="19050">
-            <a:solidFill>
-              <a:srgbClr val="B71C1C"/>
-            </a:solidFill>
-          </a:ln>
-          <a:effectLst/>
-        </p:spPr>
-        <p:style>
-          <a:lnRef idx="1">
-            <a:schemeClr val="accent1"/>
-          </a:lnRef>
-          <a:fillRef idx="3">
-            <a:schemeClr val="accent1"/>
-          </a:fillRef>
-          <a:effectRef idx="2">
-            <a:schemeClr val="accent1"/>
-          </a:effectRef>
-          <a:fontRef idx="minor">
-            <a:schemeClr val="lt1"/>
-          </a:fontRef>
-        </p:style>
-        <p:txBody>
-          <a:bodyPr rtlCol="0" anchor="ctr"/>
-          <a:lstStyle/>
-          <a:p>
-            <a:pPr algn="ctr"/>
-          </a:p>
-        </p:txBody>
-      </p:sp>
-      <p:sp>
-        <p:nvSpPr>
-          <p:cNvPr id="11" name="Oval 10"/>
-          <p:cNvSpPr/>
-          <p:nvPr/>
-        </p:nvSpPr>
-        <p:spPr>
-          <a:xfrm>
-            <a:off x="5948172" y="1664208"/>
-            <a:ext cx="640080" cy="640080"/>
-          </a:xfrm>
-          <a:prstGeom prst="ellipse">
-            <a:avLst/>
-          </a:prstGeom>
-          <a:solidFill>
-            <a:srgbClr val="B71C1C"/>
-          </a:solidFill>
-          <a:ln>
-            <a:noFill/>
-          </a:ln>
-          <a:effectLst/>
-        </p:spPr>
-        <p:style>
-          <a:lnRef idx="1">
-            <a:schemeClr val="accent1"/>
-          </a:lnRef>
-          <a:fillRef idx="3">
-            <a:schemeClr val="accent1"/>
-          </a:fillRef>
-          <a:effectRef idx="2">
-            <a:schemeClr val="accent1"/>
-          </a:effectRef>
-          <a:fontRef idx="minor">
-            <a:schemeClr val="lt1"/>
-          </a:fontRef>
-        </p:style>
-        <p:txBody>
-          <a:bodyPr rtlCol="0" anchor="ctr"/>
-          <a:lstStyle/>
-          <a:p>
-            <a:pPr algn="ctr"/>
-          </a:p>
-        </p:txBody>
-      </p:sp>
-      <p:sp>
-        <p:nvSpPr>
-          <p:cNvPr id="12" name="TextBox 11"/>
-          <p:cNvSpPr txBox="1"/>
-          <p:nvPr/>
-        </p:nvSpPr>
-        <p:spPr>
-          <a:xfrm>
-            <a:off x="5948172" y="1755648"/>
-            <a:ext cx="640080" cy="457200"/>
+            <a:off x="457200" y="4297680"/>
+            <a:ext cx="11247120" cy="457200"/>
           </a:xfrm>
           <a:prstGeom prst="rect">
             <a:avLst/>
@@ -6689,128 +6876,36 @@
               </a:spcAft>
             </a:pPr>
             <a:r>
-              <a:rPr sz="1600" b="1" i="0">
-                <a:solidFill>
-                  <a:srgbClr val="FFFFFF"/>
+              <a:rPr sz="2200" b="0" i="1">
+                <a:solidFill>
+                  <a:srgbClr val="CCD7C0"/>
                 </a:solidFill>
                 <a:latin typeface="Open Sans"/>
               </a:rPr>
-              <a:t>02</a:t>
-            </a:r>
-          </a:p>
-        </p:txBody>
-      </p:sp>
-      <p:sp>
-        <p:nvSpPr>
-          <p:cNvPr id="13" name="TextBox 12"/>
-          <p:cNvSpPr txBox="1"/>
-          <p:nvPr/>
-        </p:nvSpPr>
-        <p:spPr>
-          <a:xfrm>
-            <a:off x="4599432" y="2377440"/>
-            <a:ext cx="3337560" cy="457200"/>
-          </a:xfrm>
-          <a:prstGeom prst="rect">
-            <a:avLst/>
-          </a:prstGeom>
-          <a:noFill/>
-        </p:spPr>
-        <p:txBody>
-          <a:bodyPr wrap="square" anchor="t" lIns="0" rIns="0" tIns="0" bIns="0">
-            <a:spAutoFit/>
-          </a:bodyPr>
-          <a:lstStyle/>
-          <a:p>
-            <a:pPr algn="ctr">
-              <a:lnSpc>
-                <a:spcPct val="100000"/>
-              </a:lnSpc>
-              <a:spcBef>
-                <a:spcPts val="0"/>
-              </a:spcBef>
-              <a:spcAft>
-                <a:spcPts val="600"/>
-              </a:spcAft>
-            </a:pPr>
-            <a:r>
-              <a:rPr sz="1800" b="1" i="0">
-                <a:solidFill>
-                  <a:srgbClr val="2D7A3D"/>
-                </a:solidFill>
-                <a:latin typeface="Open Sans"/>
-              </a:rPr>
-              <a:t>Tampering</a:t>
-            </a:r>
-          </a:p>
-        </p:txBody>
-      </p:sp>
-      <p:sp>
-        <p:nvSpPr>
-          <p:cNvPr id="14" name="TextBox 13"/>
-          <p:cNvSpPr txBox="1"/>
-          <p:nvPr/>
-        </p:nvSpPr>
-        <p:spPr>
-          <a:xfrm>
-            <a:off x="4645152" y="2880360"/>
-            <a:ext cx="3246120" cy="914400"/>
-          </a:xfrm>
-          <a:prstGeom prst="rect">
-            <a:avLst/>
-          </a:prstGeom>
-          <a:noFill/>
-        </p:spPr>
-        <p:txBody>
-          <a:bodyPr wrap="square" anchor="t" lIns="0" rIns="0" tIns="0" bIns="0">
-            <a:spAutoFit/>
-          </a:bodyPr>
-          <a:lstStyle/>
-          <a:p>
-            <a:pPr algn="ctr">
-              <a:lnSpc>
-                <a:spcPct val="110000"/>
-              </a:lnSpc>
-              <a:spcBef>
-                <a:spcPts val="0"/>
-              </a:spcBef>
-              <a:spcAft>
-                <a:spcPts val="600"/>
-              </a:spcAft>
-            </a:pPr>
-            <a:r>
-              <a:rPr sz="1300" b="0" i="0">
-                <a:solidFill>
-                  <a:srgbClr val="212121"/>
-                </a:solidFill>
-                <a:latin typeface="Open Sans"/>
-              </a:rPr>
-              <a:t>vs Integrity — alterar request, payload, parâmetro</a:t>
-            </a:r>
-          </a:p>
-        </p:txBody>
-      </p:sp>
-      <p:sp>
-        <p:nvSpPr>
-          <p:cNvPr id="15" name="Rounded Rectangle 14"/>
+              <a:t>Cada letra = uma ameaça × uma propriedade</a:t>
+            </a:r>
+          </a:p>
+        </p:txBody>
+      </p:sp>
+      <p:sp>
+        <p:nvSpPr>
+          <p:cNvPr id="6" name="Rectangle 5"/>
           <p:cNvSpPr/>
           <p:nvPr/>
         </p:nvSpPr>
         <p:spPr>
           <a:xfrm>
-            <a:off x="8421624" y="1463040"/>
-            <a:ext cx="3703320" cy="2468880"/>
-          </a:xfrm>
-          <a:prstGeom prst="roundRect">
+            <a:off x="5184648" y="4983480"/>
+            <a:ext cx="1828800" cy="25400"/>
+          </a:xfrm>
+          <a:prstGeom prst="rect">
             <a:avLst/>
           </a:prstGeom>
           <a:solidFill>
-            <a:srgbClr val="F5F5F5"/>
+            <a:srgbClr val="7CB342"/>
           </a:solidFill>
-          <a:ln w="19050">
-            <a:solidFill>
-              <a:srgbClr val="B71C1C"/>
-            </a:solidFill>
+          <a:ln>
+            <a:noFill/>
           </a:ln>
           <a:effectLst/>
         </p:spPr>
@@ -6833,905 +6928,6 @@
           <a:lstStyle/>
           <a:p>
             <a:pPr algn="ctr"/>
-          </a:p>
-        </p:txBody>
-      </p:sp>
-      <p:sp>
-        <p:nvSpPr>
-          <p:cNvPr id="16" name="Oval 15"/>
-          <p:cNvSpPr/>
-          <p:nvPr/>
-        </p:nvSpPr>
-        <p:spPr>
-          <a:xfrm>
-            <a:off x="9953244" y="1664208"/>
-            <a:ext cx="640080" cy="640080"/>
-          </a:xfrm>
-          <a:prstGeom prst="ellipse">
-            <a:avLst/>
-          </a:prstGeom>
-          <a:solidFill>
-            <a:srgbClr val="B71C1C"/>
-          </a:solidFill>
-          <a:ln>
-            <a:noFill/>
-          </a:ln>
-          <a:effectLst/>
-        </p:spPr>
-        <p:style>
-          <a:lnRef idx="1">
-            <a:schemeClr val="accent1"/>
-          </a:lnRef>
-          <a:fillRef idx="3">
-            <a:schemeClr val="accent1"/>
-          </a:fillRef>
-          <a:effectRef idx="2">
-            <a:schemeClr val="accent1"/>
-          </a:effectRef>
-          <a:fontRef idx="minor">
-            <a:schemeClr val="lt1"/>
-          </a:fontRef>
-        </p:style>
-        <p:txBody>
-          <a:bodyPr rtlCol="0" anchor="ctr"/>
-          <a:lstStyle/>
-          <a:p>
-            <a:pPr algn="ctr"/>
-          </a:p>
-        </p:txBody>
-      </p:sp>
-      <p:sp>
-        <p:nvSpPr>
-          <p:cNvPr id="17" name="TextBox 16"/>
-          <p:cNvSpPr txBox="1"/>
-          <p:nvPr/>
-        </p:nvSpPr>
-        <p:spPr>
-          <a:xfrm>
-            <a:off x="9953244" y="1755648"/>
-            <a:ext cx="640080" cy="457200"/>
-          </a:xfrm>
-          <a:prstGeom prst="rect">
-            <a:avLst/>
-          </a:prstGeom>
-          <a:noFill/>
-        </p:spPr>
-        <p:txBody>
-          <a:bodyPr wrap="square" anchor="t" lIns="0" rIns="0" tIns="0" bIns="0">
-            <a:spAutoFit/>
-          </a:bodyPr>
-          <a:lstStyle/>
-          <a:p>
-            <a:pPr algn="ctr">
-              <a:lnSpc>
-                <a:spcPct val="100000"/>
-              </a:lnSpc>
-              <a:spcBef>
-                <a:spcPts val="0"/>
-              </a:spcBef>
-              <a:spcAft>
-                <a:spcPts val="600"/>
-              </a:spcAft>
-            </a:pPr>
-            <a:r>
-              <a:rPr sz="1600" b="1" i="0">
-                <a:solidFill>
-                  <a:srgbClr val="FFFFFF"/>
-                </a:solidFill>
-                <a:latin typeface="Open Sans"/>
-              </a:rPr>
-              <a:t>03</a:t>
-            </a:r>
-          </a:p>
-        </p:txBody>
-      </p:sp>
-      <p:sp>
-        <p:nvSpPr>
-          <p:cNvPr id="18" name="TextBox 17"/>
-          <p:cNvSpPr txBox="1"/>
-          <p:nvPr/>
-        </p:nvSpPr>
-        <p:spPr>
-          <a:xfrm>
-            <a:off x="8604504" y="2377440"/>
-            <a:ext cx="3337560" cy="457200"/>
-          </a:xfrm>
-          <a:prstGeom prst="rect">
-            <a:avLst/>
-          </a:prstGeom>
-          <a:noFill/>
-        </p:spPr>
-        <p:txBody>
-          <a:bodyPr wrap="square" anchor="t" lIns="0" rIns="0" tIns="0" bIns="0">
-            <a:spAutoFit/>
-          </a:bodyPr>
-          <a:lstStyle/>
-          <a:p>
-            <a:pPr algn="ctr">
-              <a:lnSpc>
-                <a:spcPct val="100000"/>
-              </a:lnSpc>
-              <a:spcBef>
-                <a:spcPts val="0"/>
-              </a:spcBef>
-              <a:spcAft>
-                <a:spcPts val="600"/>
-              </a:spcAft>
-            </a:pPr>
-            <a:r>
-              <a:rPr sz="1800" b="1" i="0">
-                <a:solidFill>
-                  <a:srgbClr val="2D7A3D"/>
-                </a:solidFill>
-                <a:latin typeface="Open Sans"/>
-              </a:rPr>
-              <a:t>Repudiation</a:t>
-            </a:r>
-          </a:p>
-        </p:txBody>
-      </p:sp>
-      <p:sp>
-        <p:nvSpPr>
-          <p:cNvPr id="19" name="TextBox 18"/>
-          <p:cNvSpPr txBox="1"/>
-          <p:nvPr/>
-        </p:nvSpPr>
-        <p:spPr>
-          <a:xfrm>
-            <a:off x="8650224" y="2880360"/>
-            <a:ext cx="3246120" cy="914400"/>
-          </a:xfrm>
-          <a:prstGeom prst="rect">
-            <a:avLst/>
-          </a:prstGeom>
-          <a:noFill/>
-        </p:spPr>
-        <p:txBody>
-          <a:bodyPr wrap="square" anchor="t" lIns="0" rIns="0" tIns="0" bIns="0">
-            <a:spAutoFit/>
-          </a:bodyPr>
-          <a:lstStyle/>
-          <a:p>
-            <a:pPr algn="ctr">
-              <a:lnSpc>
-                <a:spcPct val="110000"/>
-              </a:lnSpc>
-              <a:spcBef>
-                <a:spcPts val="0"/>
-              </a:spcBef>
-              <a:spcAft>
-                <a:spcPts val="600"/>
-              </a:spcAft>
-            </a:pPr>
-            <a:r>
-              <a:rPr sz="1300" b="0" i="0">
-                <a:solidFill>
-                  <a:srgbClr val="212121"/>
-                </a:solidFill>
-                <a:latin typeface="Open Sans"/>
-              </a:rPr>
-              <a:t>vs Non-repudiation — negar ação; faltam logs</a:t>
-            </a:r>
-          </a:p>
-        </p:txBody>
-      </p:sp>
-      <p:sp>
-        <p:nvSpPr>
-          <p:cNvPr id="20" name="Rounded Rectangle 19"/>
-          <p:cNvSpPr/>
-          <p:nvPr/>
-        </p:nvSpPr>
-        <p:spPr>
-          <a:xfrm>
-            <a:off x="411480" y="4023360"/>
-            <a:ext cx="3703320" cy="2468880"/>
-          </a:xfrm>
-          <a:prstGeom prst="roundRect">
-            <a:avLst/>
-          </a:prstGeom>
-          <a:solidFill>
-            <a:srgbClr val="F5F5F5"/>
-          </a:solidFill>
-          <a:ln w="19050">
-            <a:solidFill>
-              <a:srgbClr val="B71C1C"/>
-            </a:solidFill>
-          </a:ln>
-          <a:effectLst/>
-        </p:spPr>
-        <p:style>
-          <a:lnRef idx="1">
-            <a:schemeClr val="accent1"/>
-          </a:lnRef>
-          <a:fillRef idx="3">
-            <a:schemeClr val="accent1"/>
-          </a:fillRef>
-          <a:effectRef idx="2">
-            <a:schemeClr val="accent1"/>
-          </a:effectRef>
-          <a:fontRef idx="minor">
-            <a:schemeClr val="lt1"/>
-          </a:fontRef>
-        </p:style>
-        <p:txBody>
-          <a:bodyPr rtlCol="0" anchor="ctr"/>
-          <a:lstStyle/>
-          <a:p>
-            <a:pPr algn="ctr"/>
-          </a:p>
-        </p:txBody>
-      </p:sp>
-      <p:sp>
-        <p:nvSpPr>
-          <p:cNvPr id="21" name="Oval 20"/>
-          <p:cNvSpPr/>
-          <p:nvPr/>
-        </p:nvSpPr>
-        <p:spPr>
-          <a:xfrm>
-            <a:off x="1943100" y="4224528"/>
-            <a:ext cx="640080" cy="640080"/>
-          </a:xfrm>
-          <a:prstGeom prst="ellipse">
-            <a:avLst/>
-          </a:prstGeom>
-          <a:solidFill>
-            <a:srgbClr val="B71C1C"/>
-          </a:solidFill>
-          <a:ln>
-            <a:noFill/>
-          </a:ln>
-          <a:effectLst/>
-        </p:spPr>
-        <p:style>
-          <a:lnRef idx="1">
-            <a:schemeClr val="accent1"/>
-          </a:lnRef>
-          <a:fillRef idx="3">
-            <a:schemeClr val="accent1"/>
-          </a:fillRef>
-          <a:effectRef idx="2">
-            <a:schemeClr val="accent1"/>
-          </a:effectRef>
-          <a:fontRef idx="minor">
-            <a:schemeClr val="lt1"/>
-          </a:fontRef>
-        </p:style>
-        <p:txBody>
-          <a:bodyPr rtlCol="0" anchor="ctr"/>
-          <a:lstStyle/>
-          <a:p>
-            <a:pPr algn="ctr"/>
-          </a:p>
-        </p:txBody>
-      </p:sp>
-      <p:sp>
-        <p:nvSpPr>
-          <p:cNvPr id="22" name="TextBox 21"/>
-          <p:cNvSpPr txBox="1"/>
-          <p:nvPr/>
-        </p:nvSpPr>
-        <p:spPr>
-          <a:xfrm>
-            <a:off x="1943100" y="4315968"/>
-            <a:ext cx="640080" cy="457200"/>
-          </a:xfrm>
-          <a:prstGeom prst="rect">
-            <a:avLst/>
-          </a:prstGeom>
-          <a:noFill/>
-        </p:spPr>
-        <p:txBody>
-          <a:bodyPr wrap="square" anchor="t" lIns="0" rIns="0" tIns="0" bIns="0">
-            <a:spAutoFit/>
-          </a:bodyPr>
-          <a:lstStyle/>
-          <a:p>
-            <a:pPr algn="ctr">
-              <a:lnSpc>
-                <a:spcPct val="100000"/>
-              </a:lnSpc>
-              <a:spcBef>
-                <a:spcPts val="0"/>
-              </a:spcBef>
-              <a:spcAft>
-                <a:spcPts val="600"/>
-              </a:spcAft>
-            </a:pPr>
-            <a:r>
-              <a:rPr sz="1600" b="1" i="0">
-                <a:solidFill>
-                  <a:srgbClr val="FFFFFF"/>
-                </a:solidFill>
-                <a:latin typeface="Open Sans"/>
-              </a:rPr>
-              <a:t>04</a:t>
-            </a:r>
-          </a:p>
-        </p:txBody>
-      </p:sp>
-      <p:sp>
-        <p:nvSpPr>
-          <p:cNvPr id="23" name="TextBox 22"/>
-          <p:cNvSpPr txBox="1"/>
-          <p:nvPr/>
-        </p:nvSpPr>
-        <p:spPr>
-          <a:xfrm>
-            <a:off x="594360" y="4937760"/>
-            <a:ext cx="3337560" cy="457200"/>
-          </a:xfrm>
-          <a:prstGeom prst="rect">
-            <a:avLst/>
-          </a:prstGeom>
-          <a:noFill/>
-        </p:spPr>
-        <p:txBody>
-          <a:bodyPr wrap="square" anchor="t" lIns="0" rIns="0" tIns="0" bIns="0">
-            <a:spAutoFit/>
-          </a:bodyPr>
-          <a:lstStyle/>
-          <a:p>
-            <a:pPr algn="ctr">
-              <a:lnSpc>
-                <a:spcPct val="100000"/>
-              </a:lnSpc>
-              <a:spcBef>
-                <a:spcPts val="0"/>
-              </a:spcBef>
-              <a:spcAft>
-                <a:spcPts val="600"/>
-              </a:spcAft>
-            </a:pPr>
-            <a:r>
-              <a:rPr sz="1800" b="1" i="0">
-                <a:solidFill>
-                  <a:srgbClr val="2D7A3D"/>
-                </a:solidFill>
-                <a:latin typeface="Open Sans"/>
-              </a:rPr>
-              <a:t>Info disclosure</a:t>
-            </a:r>
-          </a:p>
-        </p:txBody>
-      </p:sp>
-      <p:sp>
-        <p:nvSpPr>
-          <p:cNvPr id="24" name="TextBox 23"/>
-          <p:cNvSpPr txBox="1"/>
-          <p:nvPr/>
-        </p:nvSpPr>
-        <p:spPr>
-          <a:xfrm>
-            <a:off x="640080" y="5440680"/>
-            <a:ext cx="3246120" cy="914400"/>
-          </a:xfrm>
-          <a:prstGeom prst="rect">
-            <a:avLst/>
-          </a:prstGeom>
-          <a:noFill/>
-        </p:spPr>
-        <p:txBody>
-          <a:bodyPr wrap="square" anchor="t" lIns="0" rIns="0" tIns="0" bIns="0">
-            <a:spAutoFit/>
-          </a:bodyPr>
-          <a:lstStyle/>
-          <a:p>
-            <a:pPr algn="ctr">
-              <a:lnSpc>
-                <a:spcPct val="110000"/>
-              </a:lnSpc>
-              <a:spcBef>
-                <a:spcPts val="0"/>
-              </a:spcBef>
-              <a:spcAft>
-                <a:spcPts val="600"/>
-              </a:spcAft>
-            </a:pPr>
-            <a:r>
-              <a:rPr sz="1300" b="0" i="0">
-                <a:solidFill>
-                  <a:srgbClr val="212121"/>
-                </a:solidFill>
-                <a:latin typeface="Open Sans"/>
-              </a:rPr>
-              <a:t>vs Confidentiality — SQLi vaza tabela; stack trace</a:t>
-            </a:r>
-          </a:p>
-        </p:txBody>
-      </p:sp>
-      <p:sp>
-        <p:nvSpPr>
-          <p:cNvPr id="25" name="Rounded Rectangle 24"/>
-          <p:cNvSpPr/>
-          <p:nvPr/>
-        </p:nvSpPr>
-        <p:spPr>
-          <a:xfrm>
-            <a:off x="4416552" y="4023360"/>
-            <a:ext cx="3703320" cy="2468880"/>
-          </a:xfrm>
-          <a:prstGeom prst="roundRect">
-            <a:avLst/>
-          </a:prstGeom>
-          <a:solidFill>
-            <a:srgbClr val="F5F5F5"/>
-          </a:solidFill>
-          <a:ln w="19050">
-            <a:solidFill>
-              <a:srgbClr val="B71C1C"/>
-            </a:solidFill>
-          </a:ln>
-          <a:effectLst/>
-        </p:spPr>
-        <p:style>
-          <a:lnRef idx="1">
-            <a:schemeClr val="accent1"/>
-          </a:lnRef>
-          <a:fillRef idx="3">
-            <a:schemeClr val="accent1"/>
-          </a:fillRef>
-          <a:effectRef idx="2">
-            <a:schemeClr val="accent1"/>
-          </a:effectRef>
-          <a:fontRef idx="minor">
-            <a:schemeClr val="lt1"/>
-          </a:fontRef>
-        </p:style>
-        <p:txBody>
-          <a:bodyPr rtlCol="0" anchor="ctr"/>
-          <a:lstStyle/>
-          <a:p>
-            <a:pPr algn="ctr"/>
-          </a:p>
-        </p:txBody>
-      </p:sp>
-      <p:sp>
-        <p:nvSpPr>
-          <p:cNvPr id="26" name="Oval 25"/>
-          <p:cNvSpPr/>
-          <p:nvPr/>
-        </p:nvSpPr>
-        <p:spPr>
-          <a:xfrm>
-            <a:off x="5948172" y="4224528"/>
-            <a:ext cx="640080" cy="640080"/>
-          </a:xfrm>
-          <a:prstGeom prst="ellipse">
-            <a:avLst/>
-          </a:prstGeom>
-          <a:solidFill>
-            <a:srgbClr val="B71C1C"/>
-          </a:solidFill>
-          <a:ln>
-            <a:noFill/>
-          </a:ln>
-          <a:effectLst/>
-        </p:spPr>
-        <p:style>
-          <a:lnRef idx="1">
-            <a:schemeClr val="accent1"/>
-          </a:lnRef>
-          <a:fillRef idx="3">
-            <a:schemeClr val="accent1"/>
-          </a:fillRef>
-          <a:effectRef idx="2">
-            <a:schemeClr val="accent1"/>
-          </a:effectRef>
-          <a:fontRef idx="minor">
-            <a:schemeClr val="lt1"/>
-          </a:fontRef>
-        </p:style>
-        <p:txBody>
-          <a:bodyPr rtlCol="0" anchor="ctr"/>
-          <a:lstStyle/>
-          <a:p>
-            <a:pPr algn="ctr"/>
-          </a:p>
-        </p:txBody>
-      </p:sp>
-      <p:sp>
-        <p:nvSpPr>
-          <p:cNvPr id="27" name="TextBox 26"/>
-          <p:cNvSpPr txBox="1"/>
-          <p:nvPr/>
-        </p:nvSpPr>
-        <p:spPr>
-          <a:xfrm>
-            <a:off x="5948172" y="4315968"/>
-            <a:ext cx="640080" cy="457200"/>
-          </a:xfrm>
-          <a:prstGeom prst="rect">
-            <a:avLst/>
-          </a:prstGeom>
-          <a:noFill/>
-        </p:spPr>
-        <p:txBody>
-          <a:bodyPr wrap="square" anchor="t" lIns="0" rIns="0" tIns="0" bIns="0">
-            <a:spAutoFit/>
-          </a:bodyPr>
-          <a:lstStyle/>
-          <a:p>
-            <a:pPr algn="ctr">
-              <a:lnSpc>
-                <a:spcPct val="100000"/>
-              </a:lnSpc>
-              <a:spcBef>
-                <a:spcPts val="0"/>
-              </a:spcBef>
-              <a:spcAft>
-                <a:spcPts val="600"/>
-              </a:spcAft>
-            </a:pPr>
-            <a:r>
-              <a:rPr sz="1600" b="1" i="0">
-                <a:solidFill>
-                  <a:srgbClr val="FFFFFF"/>
-                </a:solidFill>
-                <a:latin typeface="Open Sans"/>
-              </a:rPr>
-              <a:t>05</a:t>
-            </a:r>
-          </a:p>
-        </p:txBody>
-      </p:sp>
-      <p:sp>
-        <p:nvSpPr>
-          <p:cNvPr id="28" name="TextBox 27"/>
-          <p:cNvSpPr txBox="1"/>
-          <p:nvPr/>
-        </p:nvSpPr>
-        <p:spPr>
-          <a:xfrm>
-            <a:off x="4599432" y="4937760"/>
-            <a:ext cx="3337560" cy="457200"/>
-          </a:xfrm>
-          <a:prstGeom prst="rect">
-            <a:avLst/>
-          </a:prstGeom>
-          <a:noFill/>
-        </p:spPr>
-        <p:txBody>
-          <a:bodyPr wrap="square" anchor="t" lIns="0" rIns="0" tIns="0" bIns="0">
-            <a:spAutoFit/>
-          </a:bodyPr>
-          <a:lstStyle/>
-          <a:p>
-            <a:pPr algn="ctr">
-              <a:lnSpc>
-                <a:spcPct val="100000"/>
-              </a:lnSpc>
-              <a:spcBef>
-                <a:spcPts val="0"/>
-              </a:spcBef>
-              <a:spcAft>
-                <a:spcPts val="600"/>
-              </a:spcAft>
-            </a:pPr>
-            <a:r>
-              <a:rPr sz="1800" b="1" i="0">
-                <a:solidFill>
-                  <a:srgbClr val="2D7A3D"/>
-                </a:solidFill>
-                <a:latin typeface="Open Sans"/>
-              </a:rPr>
-              <a:t>Denial of Service</a:t>
-            </a:r>
-          </a:p>
-        </p:txBody>
-      </p:sp>
-      <p:sp>
-        <p:nvSpPr>
-          <p:cNvPr id="29" name="TextBox 28"/>
-          <p:cNvSpPr txBox="1"/>
-          <p:nvPr/>
-        </p:nvSpPr>
-        <p:spPr>
-          <a:xfrm>
-            <a:off x="4645152" y="5440680"/>
-            <a:ext cx="3246120" cy="914400"/>
-          </a:xfrm>
-          <a:prstGeom prst="rect">
-            <a:avLst/>
-          </a:prstGeom>
-          <a:noFill/>
-        </p:spPr>
-        <p:txBody>
-          <a:bodyPr wrap="square" anchor="t" lIns="0" rIns="0" tIns="0" bIns="0">
-            <a:spAutoFit/>
-          </a:bodyPr>
-          <a:lstStyle/>
-          <a:p>
-            <a:pPr algn="ctr">
-              <a:lnSpc>
-                <a:spcPct val="110000"/>
-              </a:lnSpc>
-              <a:spcBef>
-                <a:spcPts val="0"/>
-              </a:spcBef>
-              <a:spcAft>
-                <a:spcPts val="600"/>
-              </a:spcAft>
-            </a:pPr>
-            <a:r>
-              <a:rPr sz="1300" b="0" i="0">
-                <a:solidFill>
-                  <a:srgbClr val="212121"/>
-                </a:solidFill>
-                <a:latin typeface="Open Sans"/>
-              </a:rPr>
-              <a:t>vs Availability — exaustão de recursos</a:t>
-            </a:r>
-          </a:p>
-        </p:txBody>
-      </p:sp>
-      <p:sp>
-        <p:nvSpPr>
-          <p:cNvPr id="30" name="Rounded Rectangle 29"/>
-          <p:cNvSpPr/>
-          <p:nvPr/>
-        </p:nvSpPr>
-        <p:spPr>
-          <a:xfrm>
-            <a:off x="8421624" y="4023360"/>
-            <a:ext cx="3703320" cy="2468880"/>
-          </a:xfrm>
-          <a:prstGeom prst="roundRect">
-            <a:avLst/>
-          </a:prstGeom>
-          <a:solidFill>
-            <a:srgbClr val="F5F5F5"/>
-          </a:solidFill>
-          <a:ln w="19050">
-            <a:solidFill>
-              <a:srgbClr val="B71C1C"/>
-            </a:solidFill>
-          </a:ln>
-          <a:effectLst/>
-        </p:spPr>
-        <p:style>
-          <a:lnRef idx="1">
-            <a:schemeClr val="accent1"/>
-          </a:lnRef>
-          <a:fillRef idx="3">
-            <a:schemeClr val="accent1"/>
-          </a:fillRef>
-          <a:effectRef idx="2">
-            <a:schemeClr val="accent1"/>
-          </a:effectRef>
-          <a:fontRef idx="minor">
-            <a:schemeClr val="lt1"/>
-          </a:fontRef>
-        </p:style>
-        <p:txBody>
-          <a:bodyPr rtlCol="0" anchor="ctr"/>
-          <a:lstStyle/>
-          <a:p>
-            <a:pPr algn="ctr"/>
-          </a:p>
-        </p:txBody>
-      </p:sp>
-      <p:sp>
-        <p:nvSpPr>
-          <p:cNvPr id="31" name="Oval 30"/>
-          <p:cNvSpPr/>
-          <p:nvPr/>
-        </p:nvSpPr>
-        <p:spPr>
-          <a:xfrm>
-            <a:off x="9953244" y="4224528"/>
-            <a:ext cx="640080" cy="640080"/>
-          </a:xfrm>
-          <a:prstGeom prst="ellipse">
-            <a:avLst/>
-          </a:prstGeom>
-          <a:solidFill>
-            <a:srgbClr val="B71C1C"/>
-          </a:solidFill>
-          <a:ln>
-            <a:noFill/>
-          </a:ln>
-          <a:effectLst/>
-        </p:spPr>
-        <p:style>
-          <a:lnRef idx="1">
-            <a:schemeClr val="accent1"/>
-          </a:lnRef>
-          <a:fillRef idx="3">
-            <a:schemeClr val="accent1"/>
-          </a:fillRef>
-          <a:effectRef idx="2">
-            <a:schemeClr val="accent1"/>
-          </a:effectRef>
-          <a:fontRef idx="minor">
-            <a:schemeClr val="lt1"/>
-          </a:fontRef>
-        </p:style>
-        <p:txBody>
-          <a:bodyPr rtlCol="0" anchor="ctr"/>
-          <a:lstStyle/>
-          <a:p>
-            <a:pPr algn="ctr"/>
-          </a:p>
-        </p:txBody>
-      </p:sp>
-      <p:sp>
-        <p:nvSpPr>
-          <p:cNvPr id="32" name="TextBox 31"/>
-          <p:cNvSpPr txBox="1"/>
-          <p:nvPr/>
-        </p:nvSpPr>
-        <p:spPr>
-          <a:xfrm>
-            <a:off x="9953244" y="4315968"/>
-            <a:ext cx="640080" cy="457200"/>
-          </a:xfrm>
-          <a:prstGeom prst="rect">
-            <a:avLst/>
-          </a:prstGeom>
-          <a:noFill/>
-        </p:spPr>
-        <p:txBody>
-          <a:bodyPr wrap="square" anchor="t" lIns="0" rIns="0" tIns="0" bIns="0">
-            <a:spAutoFit/>
-          </a:bodyPr>
-          <a:lstStyle/>
-          <a:p>
-            <a:pPr algn="ctr">
-              <a:lnSpc>
-                <a:spcPct val="100000"/>
-              </a:lnSpc>
-              <a:spcBef>
-                <a:spcPts val="0"/>
-              </a:spcBef>
-              <a:spcAft>
-                <a:spcPts val="600"/>
-              </a:spcAft>
-            </a:pPr>
-            <a:r>
-              <a:rPr sz="1600" b="1" i="0">
-                <a:solidFill>
-                  <a:srgbClr val="FFFFFF"/>
-                </a:solidFill>
-                <a:latin typeface="Open Sans"/>
-              </a:rPr>
-              <a:t>06</a:t>
-            </a:r>
-          </a:p>
-        </p:txBody>
-      </p:sp>
-      <p:sp>
-        <p:nvSpPr>
-          <p:cNvPr id="33" name="TextBox 32"/>
-          <p:cNvSpPr txBox="1"/>
-          <p:nvPr/>
-        </p:nvSpPr>
-        <p:spPr>
-          <a:xfrm>
-            <a:off x="8604504" y="4937760"/>
-            <a:ext cx="3337560" cy="457200"/>
-          </a:xfrm>
-          <a:prstGeom prst="rect">
-            <a:avLst/>
-          </a:prstGeom>
-          <a:noFill/>
-        </p:spPr>
-        <p:txBody>
-          <a:bodyPr wrap="square" anchor="t" lIns="0" rIns="0" tIns="0" bIns="0">
-            <a:spAutoFit/>
-          </a:bodyPr>
-          <a:lstStyle/>
-          <a:p>
-            <a:pPr algn="ctr">
-              <a:lnSpc>
-                <a:spcPct val="100000"/>
-              </a:lnSpc>
-              <a:spcBef>
-                <a:spcPts val="0"/>
-              </a:spcBef>
-              <a:spcAft>
-                <a:spcPts val="600"/>
-              </a:spcAft>
-            </a:pPr>
-            <a:r>
-              <a:rPr sz="1800" b="1" i="0">
-                <a:solidFill>
-                  <a:srgbClr val="2D7A3D"/>
-                </a:solidFill>
-                <a:latin typeface="Open Sans"/>
-              </a:rPr>
-              <a:t>Elevation of Priv.</a:t>
-            </a:r>
-          </a:p>
-        </p:txBody>
-      </p:sp>
-      <p:sp>
-        <p:nvSpPr>
-          <p:cNvPr id="34" name="TextBox 33"/>
-          <p:cNvSpPr txBox="1"/>
-          <p:nvPr/>
-        </p:nvSpPr>
-        <p:spPr>
-          <a:xfrm>
-            <a:off x="8650224" y="5440680"/>
-            <a:ext cx="3246120" cy="914400"/>
-          </a:xfrm>
-          <a:prstGeom prst="rect">
-            <a:avLst/>
-          </a:prstGeom>
-          <a:noFill/>
-        </p:spPr>
-        <p:txBody>
-          <a:bodyPr wrap="square" anchor="t" lIns="0" rIns="0" tIns="0" bIns="0">
-            <a:spAutoFit/>
-          </a:bodyPr>
-          <a:lstStyle/>
-          <a:p>
-            <a:pPr algn="ctr">
-              <a:lnSpc>
-                <a:spcPct val="110000"/>
-              </a:lnSpc>
-              <a:spcBef>
-                <a:spcPts val="0"/>
-              </a:spcBef>
-              <a:spcAft>
-                <a:spcPts val="600"/>
-              </a:spcAft>
-            </a:pPr>
-            <a:r>
-              <a:rPr sz="1300" b="0" i="0">
-                <a:solidFill>
-                  <a:srgbClr val="212121"/>
-                </a:solidFill>
-                <a:latin typeface="Open Sans"/>
-              </a:rPr>
-              <a:t>vs Authorization — IDOR, JWT alg:none</a:t>
-            </a:r>
-          </a:p>
-        </p:txBody>
-      </p:sp>
-      <p:sp>
-        <p:nvSpPr>
-          <p:cNvPr id="35" name="TextBox 34"/>
-          <p:cNvSpPr txBox="1"/>
-          <p:nvPr/>
-        </p:nvSpPr>
-        <p:spPr>
-          <a:xfrm>
-            <a:off x="10972800" y="6446520"/>
-            <a:ext cx="914400" cy="320040"/>
-          </a:xfrm>
-          <a:prstGeom prst="rect">
-            <a:avLst/>
-          </a:prstGeom>
-          <a:noFill/>
-        </p:spPr>
-        <p:txBody>
-          <a:bodyPr wrap="square" anchor="t" lIns="0" rIns="0" tIns="0" bIns="0">
-            <a:spAutoFit/>
-          </a:bodyPr>
-          <a:lstStyle/>
-          <a:p>
-            <a:pPr algn="r">
-              <a:lnSpc>
-                <a:spcPct val="100000"/>
-              </a:lnSpc>
-              <a:spcBef>
-                <a:spcPts val="0"/>
-              </a:spcBef>
-              <a:spcAft>
-                <a:spcPts val="600"/>
-              </a:spcAft>
-            </a:pPr>
-            <a:r>
-              <a:rPr sz="1100" b="0" i="0">
-                <a:solidFill>
-                  <a:srgbClr val="616161"/>
-                </a:solidFill>
-                <a:latin typeface="Open Sans"/>
-              </a:rPr>
-              <a:t>6</a:t>
-            </a:r>
           </a:p>
         </p:txBody>
       </p:sp>
@@ -7837,7 +7033,7 @@
                 </a:solidFill>
                 <a:latin typeface="Open Sans"/>
               </a:rPr>
-              <a:t>STRIDE-per-element (exemplo)</a:t>
+              <a:t>STRIDE</a:t>
             </a:r>
           </a:p>
         </p:txBody>
@@ -7882,7 +7078,7 @@
                 </a:solidFill>
                 <a:latin typeface="Open Sans"/>
               </a:rPr>
-              <a:t>Cada elemento × ameaça -&gt; requisito</a:t>
+              <a:t>Microsoft · a ameaça e a propriedade que ela viola</a:t>
             </a:r>
           </a:p>
         </p:txBody>
@@ -7895,18 +7091,18 @@
         </p:nvSpPr>
         <p:spPr>
           <a:xfrm>
-            <a:off x="411480" y="1508760"/>
-            <a:ext cx="11384280" cy="749808"/>
+            <a:off x="411480" y="1463040"/>
+            <a:ext cx="3703320" cy="2468880"/>
           </a:xfrm>
           <a:prstGeom prst="roundRect">
             <a:avLst/>
           </a:prstGeom>
           <a:solidFill>
-            <a:srgbClr val="E8F0DB"/>
+            <a:srgbClr val="F5F5F5"/>
           </a:solidFill>
-          <a:ln w="12700">
+          <a:ln w="19050">
             <a:solidFill>
-              <a:srgbClr val="7CB342"/>
+              <a:srgbClr val="B71C1C"/>
             </a:solidFill>
           </a:ln>
           <a:effectLst/>
@@ -7935,20 +7131,20 @@
       </p:sp>
       <p:sp>
         <p:nvSpPr>
-          <p:cNvPr id="6" name="Rounded Rectangle 5"/>
+          <p:cNvPr id="6" name="Oval 5"/>
           <p:cNvSpPr/>
           <p:nvPr/>
         </p:nvSpPr>
         <p:spPr>
           <a:xfrm>
-            <a:off x="502920" y="1600200"/>
-            <a:ext cx="1920240" cy="566927"/>
-          </a:xfrm>
-          <a:prstGeom prst="roundRect">
+            <a:off x="1943100" y="1664208"/>
+            <a:ext cx="640080" cy="640080"/>
+          </a:xfrm>
+          <a:prstGeom prst="ellipse">
             <a:avLst/>
           </a:prstGeom>
           <a:solidFill>
-            <a:srgbClr val="2D7A3D"/>
+            <a:srgbClr val="B71C1C"/>
           </a:solidFill>
           <a:ln>
             <a:noFill/>
@@ -7985,8 +7181,8 @@
         </p:nvSpPr>
         <p:spPr>
           <a:xfrm>
-            <a:off x="502920" y="1709928"/>
-            <a:ext cx="1920240" cy="457200"/>
+            <a:off x="1943100" y="1755648"/>
+            <a:ext cx="640080" cy="457200"/>
           </a:xfrm>
           <a:prstGeom prst="rect">
             <a:avLst/>
@@ -8011,13 +7207,13 @@
               </a:spcAft>
             </a:pPr>
             <a:r>
-              <a:rPr sz="1800" b="1" i="0">
+              <a:rPr sz="1600" b="1" i="0">
                 <a:solidFill>
                   <a:srgbClr val="FFFFFF"/>
                 </a:solidFill>
                 <a:latin typeface="Open Sans"/>
               </a:rPr>
-              <a:t>Login (processo)</a:t>
+              <a:t>01</a:t>
             </a:r>
           </a:p>
         </p:txBody>
@@ -8030,188 +7226,8 @@
         </p:nvSpPr>
         <p:spPr>
           <a:xfrm>
-            <a:off x="2697480" y="1709928"/>
-            <a:ext cx="3657600" cy="457200"/>
-          </a:xfrm>
-          <a:prstGeom prst="rect">
-            <a:avLst/>
-          </a:prstGeom>
-          <a:noFill/>
-        </p:spPr>
-        <p:txBody>
-          <a:bodyPr wrap="square" anchor="t" lIns="0" rIns="0" tIns="0" bIns="0">
-            <a:spAutoFit/>
-          </a:bodyPr>
-          <a:lstStyle/>
-          <a:p>
-            <a:pPr algn="l">
-              <a:lnSpc>
-                <a:spcPct val="100000"/>
-              </a:lnSpc>
-              <a:spcBef>
-                <a:spcPts val="0"/>
-              </a:spcBef>
-              <a:spcAft>
-                <a:spcPts val="600"/>
-              </a:spcAft>
-            </a:pPr>
-            <a:r>
-              <a:rPr sz="1500" b="1" i="0">
-                <a:solidFill>
-                  <a:srgbClr val="2D7A3D"/>
-                </a:solidFill>
-                <a:latin typeface="Open Sans"/>
-              </a:rPr>
-              <a:t>Spoofing</a:t>
-            </a:r>
-          </a:p>
-        </p:txBody>
-      </p:sp>
-      <p:sp>
-        <p:nvSpPr>
-          <p:cNvPr id="9" name="TextBox 8"/>
-          <p:cNvSpPr txBox="1"/>
-          <p:nvPr/>
-        </p:nvSpPr>
-        <p:spPr>
-          <a:xfrm>
-            <a:off x="6492240" y="1728216"/>
-            <a:ext cx="5120640" cy="457200"/>
-          </a:xfrm>
-          <a:prstGeom prst="rect">
-            <a:avLst/>
-          </a:prstGeom>
-          <a:noFill/>
-        </p:spPr>
-        <p:txBody>
-          <a:bodyPr wrap="square" anchor="t" lIns="0" rIns="0" tIns="0" bIns="0">
-            <a:spAutoFit/>
-          </a:bodyPr>
-          <a:lstStyle/>
-          <a:p>
-            <a:pPr algn="l">
-              <a:lnSpc>
-                <a:spcPct val="100000"/>
-              </a:lnSpc>
-              <a:spcBef>
-                <a:spcPts val="0"/>
-              </a:spcBef>
-              <a:spcAft>
-                <a:spcPts val="600"/>
-              </a:spcAft>
-            </a:pPr>
-            <a:r>
-              <a:rPr sz="1300" b="0" i="0">
-                <a:solidFill>
-                  <a:srgbClr val="212121"/>
-                </a:solidFill>
-                <a:latin typeface="Open Sans"/>
-              </a:rPr>
-              <a:t>MFA; bloqueio após N tentativas</a:t>
-            </a:r>
-          </a:p>
-        </p:txBody>
-      </p:sp>
-      <p:sp>
-        <p:nvSpPr>
-          <p:cNvPr id="10" name="Rounded Rectangle 9"/>
-          <p:cNvSpPr/>
-          <p:nvPr/>
-        </p:nvSpPr>
-        <p:spPr>
-          <a:xfrm>
-            <a:off x="411480" y="2313432"/>
-            <a:ext cx="11384280" cy="749808"/>
-          </a:xfrm>
-          <a:prstGeom prst="roundRect">
-            <a:avLst/>
-          </a:prstGeom>
-          <a:solidFill>
-            <a:srgbClr val="E8F0DB"/>
-          </a:solidFill>
-          <a:ln w="12700">
-            <a:solidFill>
-              <a:srgbClr val="7CB342"/>
-            </a:solidFill>
-          </a:ln>
-          <a:effectLst/>
-        </p:spPr>
-        <p:style>
-          <a:lnRef idx="1">
-            <a:schemeClr val="accent1"/>
-          </a:lnRef>
-          <a:fillRef idx="3">
-            <a:schemeClr val="accent1"/>
-          </a:fillRef>
-          <a:effectRef idx="2">
-            <a:schemeClr val="accent1"/>
-          </a:effectRef>
-          <a:fontRef idx="minor">
-            <a:schemeClr val="lt1"/>
-          </a:fontRef>
-        </p:style>
-        <p:txBody>
-          <a:bodyPr rtlCol="0" anchor="ctr"/>
-          <a:lstStyle/>
-          <a:p>
-            <a:pPr algn="ctr"/>
-          </a:p>
-        </p:txBody>
-      </p:sp>
-      <p:sp>
-        <p:nvSpPr>
-          <p:cNvPr id="11" name="Rounded Rectangle 10"/>
-          <p:cNvSpPr/>
-          <p:nvPr/>
-        </p:nvSpPr>
-        <p:spPr>
-          <a:xfrm>
-            <a:off x="502920" y="2404872"/>
-            <a:ext cx="1920240" cy="566927"/>
-          </a:xfrm>
-          <a:prstGeom prst="roundRect">
-            <a:avLst/>
-          </a:prstGeom>
-          <a:solidFill>
-            <a:srgbClr val="2D7A3D"/>
-          </a:solidFill>
-          <a:ln>
-            <a:noFill/>
-          </a:ln>
-          <a:effectLst/>
-        </p:spPr>
-        <p:style>
-          <a:lnRef idx="1">
-            <a:schemeClr val="accent1"/>
-          </a:lnRef>
-          <a:fillRef idx="3">
-            <a:schemeClr val="accent1"/>
-          </a:fillRef>
-          <a:effectRef idx="2">
-            <a:schemeClr val="accent1"/>
-          </a:effectRef>
-          <a:fontRef idx="minor">
-            <a:schemeClr val="lt1"/>
-          </a:fontRef>
-        </p:style>
-        <p:txBody>
-          <a:bodyPr rtlCol="0" anchor="ctr"/>
-          <a:lstStyle/>
-          <a:p>
-            <a:pPr algn="ctr"/>
-          </a:p>
-        </p:txBody>
-      </p:sp>
-      <p:sp>
-        <p:nvSpPr>
-          <p:cNvPr id="12" name="TextBox 11"/>
-          <p:cNvSpPr txBox="1"/>
-          <p:nvPr/>
-        </p:nvSpPr>
-        <p:spPr>
-          <a:xfrm>
-            <a:off x="502920" y="2514600"/>
-            <a:ext cx="1920240" cy="457200"/>
+            <a:off x="594360" y="2377440"/>
+            <a:ext cx="3337560" cy="457200"/>
           </a:xfrm>
           <a:prstGeom prst="rect">
             <a:avLst/>
@@ -8238,25 +7254,25 @@
             <a:r>
               <a:rPr sz="1800" b="1" i="0">
                 <a:solidFill>
-                  <a:srgbClr val="FFFFFF"/>
+                  <a:srgbClr val="2D7A3D"/>
                 </a:solidFill>
                 <a:latin typeface="Open Sans"/>
               </a:rPr>
-              <a:t>Token de sessão (fluxo)</a:t>
-            </a:r>
-          </a:p>
-        </p:txBody>
-      </p:sp>
-      <p:sp>
-        <p:nvSpPr>
-          <p:cNvPr id="13" name="TextBox 12"/>
+              <a:t>Spoofing</a:t>
+            </a:r>
+          </a:p>
+        </p:txBody>
+      </p:sp>
+      <p:sp>
+        <p:nvSpPr>
+          <p:cNvPr id="9" name="TextBox 8"/>
           <p:cNvSpPr txBox="1"/>
           <p:nvPr/>
         </p:nvSpPr>
         <p:spPr>
           <a:xfrm>
-            <a:off x="2697480" y="2514600"/>
-            <a:ext cx="3657600" cy="457200"/>
+            <a:off x="640080" y="2880360"/>
+            <a:ext cx="3246120" cy="914400"/>
           </a:xfrm>
           <a:prstGeom prst="rect">
             <a:avLst/>
@@ -8269,9 +7285,9 @@
           </a:bodyPr>
           <a:lstStyle/>
           <a:p>
-            <a:pPr algn="l">
+            <a:pPr algn="ctr">
               <a:lnSpc>
-                <a:spcPct val="100000"/>
+                <a:spcPct val="110000"/>
               </a:lnSpc>
               <a:spcBef>
                 <a:spcPts val="0"/>
@@ -8281,82 +7297,37 @@
               </a:spcAft>
             </a:pPr>
             <a:r>
-              <a:rPr sz="1500" b="1" i="0">
-                <a:solidFill>
-                  <a:srgbClr val="2D7A3D"/>
+              <a:rPr sz="1300" b="0" i="0">
+                <a:solidFill>
+                  <a:srgbClr val="212121"/>
                 </a:solidFill>
                 <a:latin typeface="Open Sans"/>
               </a:rPr>
-              <a:t>Tampering</a:t>
-            </a:r>
-          </a:p>
-        </p:txBody>
-      </p:sp>
-      <p:sp>
-        <p:nvSpPr>
-          <p:cNvPr id="14" name="TextBox 13"/>
-          <p:cNvSpPr txBox="1"/>
-          <p:nvPr/>
-        </p:nvSpPr>
-        <p:spPr>
-          <a:xfrm>
-            <a:off x="6492240" y="2532887"/>
-            <a:ext cx="5120640" cy="457200"/>
-          </a:xfrm>
-          <a:prstGeom prst="rect">
-            <a:avLst/>
-          </a:prstGeom>
-          <a:noFill/>
-        </p:spPr>
-        <p:txBody>
-          <a:bodyPr wrap="square" anchor="t" lIns="0" rIns="0" tIns="0" bIns="0">
-            <a:spAutoFit/>
-          </a:bodyPr>
-          <a:lstStyle/>
-          <a:p>
-            <a:pPr algn="l">
-              <a:lnSpc>
-                <a:spcPct val="100000"/>
-              </a:lnSpc>
-              <a:spcBef>
-                <a:spcPts val="0"/>
-              </a:spcBef>
-              <a:spcAft>
-                <a:spcPts val="600"/>
-              </a:spcAft>
-            </a:pPr>
-            <a:r>
-              <a:rPr sz="1300" b="0" i="0">
-                <a:solidFill>
-                  <a:srgbClr val="212121"/>
-                </a:solidFill>
-                <a:latin typeface="Open Sans"/>
-              </a:rPr>
-              <a:t>JWT assinado; rejeitar alg:none</a:t>
-            </a:r>
-          </a:p>
-        </p:txBody>
-      </p:sp>
-      <p:sp>
-        <p:nvSpPr>
-          <p:cNvPr id="15" name="Rounded Rectangle 14"/>
+              <a:t>vs Authenticity — passar-se por outro (cookie roubado)</a:t>
+            </a:r>
+          </a:p>
+        </p:txBody>
+      </p:sp>
+      <p:sp>
+        <p:nvSpPr>
+          <p:cNvPr id="10" name="Rounded Rectangle 9"/>
           <p:cNvSpPr/>
           <p:nvPr/>
         </p:nvSpPr>
         <p:spPr>
           <a:xfrm>
-            <a:off x="411480" y="3118103"/>
-            <a:ext cx="11384280" cy="749808"/>
+            <a:off x="4416552" y="1463040"/>
+            <a:ext cx="3703320" cy="2468880"/>
           </a:xfrm>
           <a:prstGeom prst="roundRect">
             <a:avLst/>
           </a:prstGeom>
           <a:solidFill>
-            <a:srgbClr val="E8F0DB"/>
+            <a:srgbClr val="F5F5F5"/>
           </a:solidFill>
-          <a:ln w="12700">
+          <a:ln w="19050">
             <a:solidFill>
-              <a:srgbClr val="7CB342"/>
+              <a:srgbClr val="B71C1C"/>
             </a:solidFill>
           </a:ln>
           <a:effectLst/>
@@ -8385,20 +7356,20 @@
       </p:sp>
       <p:sp>
         <p:nvSpPr>
-          <p:cNvPr id="16" name="Rounded Rectangle 15"/>
+          <p:cNvPr id="11" name="Oval 10"/>
           <p:cNvSpPr/>
           <p:nvPr/>
         </p:nvSpPr>
         <p:spPr>
           <a:xfrm>
-            <a:off x="502920" y="3209544"/>
-            <a:ext cx="1920240" cy="566927"/>
-          </a:xfrm>
-          <a:prstGeom prst="roundRect">
+            <a:off x="5948172" y="1664208"/>
+            <a:ext cx="640080" cy="640080"/>
+          </a:xfrm>
+          <a:prstGeom prst="ellipse">
             <a:avLst/>
           </a:prstGeom>
           <a:solidFill>
-            <a:srgbClr val="2D7A3D"/>
+            <a:srgbClr val="B71C1C"/>
           </a:solidFill>
           <a:ln>
             <a:noFill/>
@@ -8429,14 +7400,14 @@
       </p:sp>
       <p:sp>
         <p:nvSpPr>
-          <p:cNvPr id="17" name="TextBox 16"/>
+          <p:cNvPr id="12" name="TextBox 11"/>
           <p:cNvSpPr txBox="1"/>
           <p:nvPr/>
         </p:nvSpPr>
         <p:spPr>
           <a:xfrm>
-            <a:off x="502920" y="3319272"/>
-            <a:ext cx="1920240" cy="457200"/>
+            <a:off x="5948172" y="1755648"/>
+            <a:ext cx="640080" cy="457200"/>
           </a:xfrm>
           <a:prstGeom prst="rect">
             <a:avLst/>
@@ -8461,207 +7432,27 @@
               </a:spcAft>
             </a:pPr>
             <a:r>
-              <a:rPr sz="1800" b="1" i="0">
+              <a:rPr sz="1600" b="1" i="0">
                 <a:solidFill>
                   <a:srgbClr val="FFFFFF"/>
                 </a:solidFill>
                 <a:latin typeface="Open Sans"/>
               </a:rPr>
-              <a:t>Log (armazenamento)</a:t>
-            </a:r>
-          </a:p>
-        </p:txBody>
-      </p:sp>
-      <p:sp>
-        <p:nvSpPr>
-          <p:cNvPr id="18" name="TextBox 17"/>
+              <a:t>02</a:t>
+            </a:r>
+          </a:p>
+        </p:txBody>
+      </p:sp>
+      <p:sp>
+        <p:nvSpPr>
+          <p:cNvPr id="13" name="TextBox 12"/>
           <p:cNvSpPr txBox="1"/>
           <p:nvPr/>
         </p:nvSpPr>
         <p:spPr>
           <a:xfrm>
-            <a:off x="2697480" y="3319272"/>
-            <a:ext cx="3657600" cy="457200"/>
-          </a:xfrm>
-          <a:prstGeom prst="rect">
-            <a:avLst/>
-          </a:prstGeom>
-          <a:noFill/>
-        </p:spPr>
-        <p:txBody>
-          <a:bodyPr wrap="square" anchor="t" lIns="0" rIns="0" tIns="0" bIns="0">
-            <a:spAutoFit/>
-          </a:bodyPr>
-          <a:lstStyle/>
-          <a:p>
-            <a:pPr algn="l">
-              <a:lnSpc>
-                <a:spcPct val="100000"/>
-              </a:lnSpc>
-              <a:spcBef>
-                <a:spcPts val="0"/>
-              </a:spcBef>
-              <a:spcAft>
-                <a:spcPts val="600"/>
-              </a:spcAft>
-            </a:pPr>
-            <a:r>
-              <a:rPr sz="1500" b="1" i="0">
-                <a:solidFill>
-                  <a:srgbClr val="2D7A3D"/>
-                </a:solidFill>
-                <a:latin typeface="Open Sans"/>
-              </a:rPr>
-              <a:t>Repudiation</a:t>
-            </a:r>
-          </a:p>
-        </p:txBody>
-      </p:sp>
-      <p:sp>
-        <p:nvSpPr>
-          <p:cNvPr id="19" name="TextBox 18"/>
-          <p:cNvSpPr txBox="1"/>
-          <p:nvPr/>
-        </p:nvSpPr>
-        <p:spPr>
-          <a:xfrm>
-            <a:off x="6492240" y="3337559"/>
-            <a:ext cx="5120640" cy="457200"/>
-          </a:xfrm>
-          <a:prstGeom prst="rect">
-            <a:avLst/>
-          </a:prstGeom>
-          <a:noFill/>
-        </p:spPr>
-        <p:txBody>
-          <a:bodyPr wrap="square" anchor="t" lIns="0" rIns="0" tIns="0" bIns="0">
-            <a:spAutoFit/>
-          </a:bodyPr>
-          <a:lstStyle/>
-          <a:p>
-            <a:pPr algn="l">
-              <a:lnSpc>
-                <a:spcPct val="100000"/>
-              </a:lnSpc>
-              <a:spcBef>
-                <a:spcPts val="0"/>
-              </a:spcBef>
-              <a:spcAft>
-                <a:spcPts val="600"/>
-              </a:spcAft>
-            </a:pPr>
-            <a:r>
-              <a:rPr sz="1300" b="0" i="0">
-                <a:solidFill>
-                  <a:srgbClr val="212121"/>
-                </a:solidFill>
-                <a:latin typeface="Open Sans"/>
-              </a:rPr>
-              <a:t>logs assinados e imutáveis</a:t>
-            </a:r>
-          </a:p>
-        </p:txBody>
-      </p:sp>
-      <p:sp>
-        <p:nvSpPr>
-          <p:cNvPr id="20" name="Rounded Rectangle 19"/>
-          <p:cNvSpPr/>
-          <p:nvPr/>
-        </p:nvSpPr>
-        <p:spPr>
-          <a:xfrm>
-            <a:off x="411480" y="3922775"/>
-            <a:ext cx="11384280" cy="749808"/>
-          </a:xfrm>
-          <a:prstGeom prst="roundRect">
-            <a:avLst/>
-          </a:prstGeom>
-          <a:solidFill>
-            <a:srgbClr val="E8F0DB"/>
-          </a:solidFill>
-          <a:ln w="12700">
-            <a:solidFill>
-              <a:srgbClr val="7CB342"/>
-            </a:solidFill>
-          </a:ln>
-          <a:effectLst/>
-        </p:spPr>
-        <p:style>
-          <a:lnRef idx="1">
-            <a:schemeClr val="accent1"/>
-          </a:lnRef>
-          <a:fillRef idx="3">
-            <a:schemeClr val="accent1"/>
-          </a:fillRef>
-          <a:effectRef idx="2">
-            <a:schemeClr val="accent1"/>
-          </a:effectRef>
-          <a:fontRef idx="minor">
-            <a:schemeClr val="lt1"/>
-          </a:fontRef>
-        </p:style>
-        <p:txBody>
-          <a:bodyPr rtlCol="0" anchor="ctr"/>
-          <a:lstStyle/>
-          <a:p>
-            <a:pPr algn="ctr"/>
-          </a:p>
-        </p:txBody>
-      </p:sp>
-      <p:sp>
-        <p:nvSpPr>
-          <p:cNvPr id="21" name="Rounded Rectangle 20"/>
-          <p:cNvSpPr/>
-          <p:nvPr/>
-        </p:nvSpPr>
-        <p:spPr>
-          <a:xfrm>
-            <a:off x="502920" y="4014215"/>
-            <a:ext cx="1920240" cy="566927"/>
-          </a:xfrm>
-          <a:prstGeom prst="roundRect">
-            <a:avLst/>
-          </a:prstGeom>
-          <a:solidFill>
-            <a:srgbClr val="2D7A3D"/>
-          </a:solidFill>
-          <a:ln>
-            <a:noFill/>
-          </a:ln>
-          <a:effectLst/>
-        </p:spPr>
-        <p:style>
-          <a:lnRef idx="1">
-            <a:schemeClr val="accent1"/>
-          </a:lnRef>
-          <a:fillRef idx="3">
-            <a:schemeClr val="accent1"/>
-          </a:fillRef>
-          <a:effectRef idx="2">
-            <a:schemeClr val="accent1"/>
-          </a:effectRef>
-          <a:fontRef idx="minor">
-            <a:schemeClr val="lt1"/>
-          </a:fontRef>
-        </p:style>
-        <p:txBody>
-          <a:bodyPr rtlCol="0" anchor="ctr"/>
-          <a:lstStyle/>
-          <a:p>
-            <a:pPr algn="ctr"/>
-          </a:p>
-        </p:txBody>
-      </p:sp>
-      <p:sp>
-        <p:nvSpPr>
-          <p:cNvPr id="22" name="TextBox 21"/>
-          <p:cNvSpPr txBox="1"/>
-          <p:nvPr/>
-        </p:nvSpPr>
-        <p:spPr>
-          <a:xfrm>
-            <a:off x="502920" y="4123943"/>
-            <a:ext cx="1920240" cy="457200"/>
+            <a:off x="4599432" y="2377440"/>
+            <a:ext cx="3337560" cy="457200"/>
           </a:xfrm>
           <a:prstGeom prst="rect">
             <a:avLst/>
@@ -8688,25 +7479,25 @@
             <a:r>
               <a:rPr sz="1800" b="1" i="0">
                 <a:solidFill>
-                  <a:srgbClr val="FFFFFF"/>
+                  <a:srgbClr val="2D7A3D"/>
                 </a:solidFill>
                 <a:latin typeface="Open Sans"/>
               </a:rPr>
-              <a:t>Banco (armazenamento)</a:t>
-            </a:r>
-          </a:p>
-        </p:txBody>
-      </p:sp>
-      <p:sp>
-        <p:nvSpPr>
-          <p:cNvPr id="23" name="TextBox 22"/>
+              <a:t>Tampering</a:t>
+            </a:r>
+          </a:p>
+        </p:txBody>
+      </p:sp>
+      <p:sp>
+        <p:nvSpPr>
+          <p:cNvPr id="14" name="TextBox 13"/>
           <p:cNvSpPr txBox="1"/>
           <p:nvPr/>
         </p:nvSpPr>
         <p:spPr>
           <a:xfrm>
-            <a:off x="2697480" y="4123943"/>
-            <a:ext cx="3657600" cy="457200"/>
+            <a:off x="4645152" y="2880360"/>
+            <a:ext cx="3246120" cy="914400"/>
           </a:xfrm>
           <a:prstGeom prst="rect">
             <a:avLst/>
@@ -8719,9 +7510,9 @@
           </a:bodyPr>
           <a:lstStyle/>
           <a:p>
-            <a:pPr algn="l">
+            <a:pPr algn="ctr">
               <a:lnSpc>
-                <a:spcPct val="100000"/>
+                <a:spcPct val="110000"/>
               </a:lnSpc>
               <a:spcBef>
                 <a:spcPts val="0"/>
@@ -8731,82 +7522,37 @@
               </a:spcAft>
             </a:pPr>
             <a:r>
-              <a:rPr sz="1500" b="1" i="0">
-                <a:solidFill>
-                  <a:srgbClr val="2D7A3D"/>
+              <a:rPr sz="1300" b="0" i="0">
+                <a:solidFill>
+                  <a:srgbClr val="212121"/>
                 </a:solidFill>
                 <a:latin typeface="Open Sans"/>
               </a:rPr>
-              <a:t>Info disclosure</a:t>
-            </a:r>
-          </a:p>
-        </p:txBody>
-      </p:sp>
-      <p:sp>
-        <p:nvSpPr>
-          <p:cNvPr id="24" name="TextBox 23"/>
-          <p:cNvSpPr txBox="1"/>
-          <p:nvPr/>
-        </p:nvSpPr>
-        <p:spPr>
-          <a:xfrm>
-            <a:off x="6492240" y="4142231"/>
-            <a:ext cx="5120640" cy="457200"/>
-          </a:xfrm>
-          <a:prstGeom prst="rect">
-            <a:avLst/>
-          </a:prstGeom>
-          <a:noFill/>
-        </p:spPr>
-        <p:txBody>
-          <a:bodyPr wrap="square" anchor="t" lIns="0" rIns="0" tIns="0" bIns="0">
-            <a:spAutoFit/>
-          </a:bodyPr>
-          <a:lstStyle/>
-          <a:p>
-            <a:pPr algn="l">
-              <a:lnSpc>
-                <a:spcPct val="100000"/>
-              </a:lnSpc>
-              <a:spcBef>
-                <a:spcPts val="0"/>
-              </a:spcBef>
-              <a:spcAft>
-                <a:spcPts val="600"/>
-              </a:spcAft>
-            </a:pPr>
-            <a:r>
-              <a:rPr sz="1300" b="0" i="0">
-                <a:solidFill>
-                  <a:srgbClr val="212121"/>
-                </a:solidFill>
-                <a:latin typeface="Open Sans"/>
-              </a:rPr>
-              <a:t>AES-256 em repouso; acesso mínimo</a:t>
-            </a:r>
-          </a:p>
-        </p:txBody>
-      </p:sp>
-      <p:sp>
-        <p:nvSpPr>
-          <p:cNvPr id="25" name="Rounded Rectangle 24"/>
+              <a:t>vs Integrity — alterar request, payload, parâmetro</a:t>
+            </a:r>
+          </a:p>
+        </p:txBody>
+      </p:sp>
+      <p:sp>
+        <p:nvSpPr>
+          <p:cNvPr id="15" name="Rounded Rectangle 14"/>
           <p:cNvSpPr/>
           <p:nvPr/>
         </p:nvSpPr>
         <p:spPr>
           <a:xfrm>
-            <a:off x="411480" y="4727448"/>
-            <a:ext cx="11384280" cy="749808"/>
+            <a:off x="8421624" y="1463040"/>
+            <a:ext cx="3703320" cy="2468880"/>
           </a:xfrm>
           <a:prstGeom prst="roundRect">
             <a:avLst/>
           </a:prstGeom>
           <a:solidFill>
-            <a:srgbClr val="E8F0DB"/>
+            <a:srgbClr val="F5F5F5"/>
           </a:solidFill>
-          <a:ln w="12700">
+          <a:ln w="19050">
             <a:solidFill>
-              <a:srgbClr val="7CB342"/>
+              <a:srgbClr val="B71C1C"/>
             </a:solidFill>
           </a:ln>
           <a:effectLst/>
@@ -8835,20 +7581,20 @@
       </p:sp>
       <p:sp>
         <p:nvSpPr>
-          <p:cNvPr id="26" name="Rounded Rectangle 25"/>
+          <p:cNvPr id="16" name="Oval 15"/>
           <p:cNvSpPr/>
           <p:nvPr/>
         </p:nvSpPr>
         <p:spPr>
           <a:xfrm>
-            <a:off x="502920" y="4818888"/>
-            <a:ext cx="1920240" cy="566927"/>
-          </a:xfrm>
-          <a:prstGeom prst="roundRect">
+            <a:off x="9953244" y="1664208"/>
+            <a:ext cx="640080" cy="640080"/>
+          </a:xfrm>
+          <a:prstGeom prst="ellipse">
             <a:avLst/>
           </a:prstGeom>
           <a:solidFill>
-            <a:srgbClr val="2D7A3D"/>
+            <a:srgbClr val="B71C1C"/>
           </a:solidFill>
           <a:ln>
             <a:noFill/>
@@ -8879,14 +7625,14 @@
       </p:sp>
       <p:sp>
         <p:nvSpPr>
-          <p:cNvPr id="27" name="TextBox 26"/>
+          <p:cNvPr id="17" name="TextBox 16"/>
           <p:cNvSpPr txBox="1"/>
           <p:nvPr/>
         </p:nvSpPr>
         <p:spPr>
           <a:xfrm>
-            <a:off x="502920" y="4928616"/>
-            <a:ext cx="1920240" cy="457200"/>
+            <a:off x="9953244" y="1755648"/>
+            <a:ext cx="640080" cy="457200"/>
           </a:xfrm>
           <a:prstGeom prst="rect">
             <a:avLst/>
@@ -8911,27 +7657,27 @@
               </a:spcAft>
             </a:pPr>
             <a:r>
-              <a:rPr sz="1800" b="1" i="0">
+              <a:rPr sz="1600" b="1" i="0">
                 <a:solidFill>
                   <a:srgbClr val="FFFFFF"/>
                 </a:solidFill>
                 <a:latin typeface="Open Sans"/>
               </a:rPr>
-              <a:t>Download de exame</a:t>
-            </a:r>
-          </a:p>
-        </p:txBody>
-      </p:sp>
-      <p:sp>
-        <p:nvSpPr>
-          <p:cNvPr id="28" name="TextBox 27"/>
+              <a:t>03</a:t>
+            </a:r>
+          </a:p>
+        </p:txBody>
+      </p:sp>
+      <p:sp>
+        <p:nvSpPr>
+          <p:cNvPr id="18" name="TextBox 17"/>
           <p:cNvSpPr txBox="1"/>
           <p:nvPr/>
         </p:nvSpPr>
         <p:spPr>
           <a:xfrm>
-            <a:off x="2697480" y="4928616"/>
-            <a:ext cx="3657600" cy="457200"/>
+            <a:off x="8604504" y="2377440"/>
+            <a:ext cx="3337560" cy="457200"/>
           </a:xfrm>
           <a:prstGeom prst="rect">
             <a:avLst/>
@@ -8944,7 +7690,7 @@
           </a:bodyPr>
           <a:lstStyle/>
           <a:p>
-            <a:pPr algn="l">
+            <a:pPr algn="ctr">
               <a:lnSpc>
                 <a:spcPct val="100000"/>
               </a:lnSpc>
@@ -8956,27 +7702,27 @@
               </a:spcAft>
             </a:pPr>
             <a:r>
-              <a:rPr sz="1500" b="1" i="0">
+              <a:rPr sz="1800" b="1" i="0">
                 <a:solidFill>
                   <a:srgbClr val="2D7A3D"/>
                 </a:solidFill>
                 <a:latin typeface="Open Sans"/>
               </a:rPr>
-              <a:t>Elevation of Priv.</a:t>
-            </a:r>
-          </a:p>
-        </p:txBody>
-      </p:sp>
-      <p:sp>
-        <p:nvSpPr>
-          <p:cNvPr id="29" name="TextBox 28"/>
+              <a:t>Repudiation</a:t>
+            </a:r>
+          </a:p>
+        </p:txBody>
+      </p:sp>
+      <p:sp>
+        <p:nvSpPr>
+          <p:cNvPr id="19" name="TextBox 18"/>
           <p:cNvSpPr txBox="1"/>
           <p:nvPr/>
         </p:nvSpPr>
         <p:spPr>
           <a:xfrm>
-            <a:off x="6492240" y="4946904"/>
-            <a:ext cx="5120640" cy="457200"/>
+            <a:off x="8650224" y="2880360"/>
+            <a:ext cx="3246120" cy="914400"/>
           </a:xfrm>
           <a:prstGeom prst="rect">
             <a:avLst/>
@@ -8989,7 +7735,142 @@
           </a:bodyPr>
           <a:lstStyle/>
           <a:p>
-            <a:pPr algn="l">
+            <a:pPr algn="ctr">
+              <a:lnSpc>
+                <a:spcPct val="110000"/>
+              </a:lnSpc>
+              <a:spcBef>
+                <a:spcPts val="0"/>
+              </a:spcBef>
+              <a:spcAft>
+                <a:spcPts val="600"/>
+              </a:spcAft>
+            </a:pPr>
+            <a:r>
+              <a:rPr sz="1300" b="0" i="0">
+                <a:solidFill>
+                  <a:srgbClr val="212121"/>
+                </a:solidFill>
+                <a:latin typeface="Open Sans"/>
+              </a:rPr>
+              <a:t>vs Non-repudiation — negar ação; faltam logs</a:t>
+            </a:r>
+          </a:p>
+        </p:txBody>
+      </p:sp>
+      <p:sp>
+        <p:nvSpPr>
+          <p:cNvPr id="20" name="Rounded Rectangle 19"/>
+          <p:cNvSpPr/>
+          <p:nvPr/>
+        </p:nvSpPr>
+        <p:spPr>
+          <a:xfrm>
+            <a:off x="411480" y="4023360"/>
+            <a:ext cx="3703320" cy="2468880"/>
+          </a:xfrm>
+          <a:prstGeom prst="roundRect">
+            <a:avLst/>
+          </a:prstGeom>
+          <a:solidFill>
+            <a:srgbClr val="F5F5F5"/>
+          </a:solidFill>
+          <a:ln w="19050">
+            <a:solidFill>
+              <a:srgbClr val="B71C1C"/>
+            </a:solidFill>
+          </a:ln>
+          <a:effectLst/>
+        </p:spPr>
+        <p:style>
+          <a:lnRef idx="1">
+            <a:schemeClr val="accent1"/>
+          </a:lnRef>
+          <a:fillRef idx="3">
+            <a:schemeClr val="accent1"/>
+          </a:fillRef>
+          <a:effectRef idx="2">
+            <a:schemeClr val="accent1"/>
+          </a:effectRef>
+          <a:fontRef idx="minor">
+            <a:schemeClr val="lt1"/>
+          </a:fontRef>
+        </p:style>
+        <p:txBody>
+          <a:bodyPr rtlCol="0" anchor="ctr"/>
+          <a:lstStyle/>
+          <a:p>
+            <a:pPr algn="ctr"/>
+          </a:p>
+        </p:txBody>
+      </p:sp>
+      <p:sp>
+        <p:nvSpPr>
+          <p:cNvPr id="21" name="Oval 20"/>
+          <p:cNvSpPr/>
+          <p:nvPr/>
+        </p:nvSpPr>
+        <p:spPr>
+          <a:xfrm>
+            <a:off x="1943100" y="4224528"/>
+            <a:ext cx="640080" cy="640080"/>
+          </a:xfrm>
+          <a:prstGeom prst="ellipse">
+            <a:avLst/>
+          </a:prstGeom>
+          <a:solidFill>
+            <a:srgbClr val="B71C1C"/>
+          </a:solidFill>
+          <a:ln>
+            <a:noFill/>
+          </a:ln>
+          <a:effectLst/>
+        </p:spPr>
+        <p:style>
+          <a:lnRef idx="1">
+            <a:schemeClr val="accent1"/>
+          </a:lnRef>
+          <a:fillRef idx="3">
+            <a:schemeClr val="accent1"/>
+          </a:fillRef>
+          <a:effectRef idx="2">
+            <a:schemeClr val="accent1"/>
+          </a:effectRef>
+          <a:fontRef idx="minor">
+            <a:schemeClr val="lt1"/>
+          </a:fontRef>
+        </p:style>
+        <p:txBody>
+          <a:bodyPr rtlCol="0" anchor="ctr"/>
+          <a:lstStyle/>
+          <a:p>
+            <a:pPr algn="ctr"/>
+          </a:p>
+        </p:txBody>
+      </p:sp>
+      <p:sp>
+        <p:nvSpPr>
+          <p:cNvPr id="22" name="TextBox 21"/>
+          <p:cNvSpPr txBox="1"/>
+          <p:nvPr/>
+        </p:nvSpPr>
+        <p:spPr>
+          <a:xfrm>
+            <a:off x="1943100" y="4315968"/>
+            <a:ext cx="640080" cy="457200"/>
+          </a:xfrm>
+          <a:prstGeom prst="rect">
+            <a:avLst/>
+          </a:prstGeom>
+          <a:noFill/>
+        </p:spPr>
+        <p:txBody>
+          <a:bodyPr wrap="square" anchor="t" lIns="0" rIns="0" tIns="0" bIns="0">
+            <a:spAutoFit/>
+          </a:bodyPr>
+          <a:lstStyle/>
+          <a:p>
+            <a:pPr algn="ctr">
               <a:lnSpc>
                 <a:spcPct val="100000"/>
               </a:lnSpc>
@@ -9001,20 +7882,560 @@
               </a:spcAft>
             </a:pPr>
             <a:r>
-              <a:rPr sz="1300" b="0" i="0">
-                <a:solidFill>
-                  <a:srgbClr val="212121"/>
+              <a:rPr sz="1600" b="1" i="0">
+                <a:solidFill>
+                  <a:srgbClr val="FFFFFF"/>
                 </a:solidFill>
                 <a:latin typeface="Open Sans"/>
               </a:rPr>
-              <a:t>validar ownership no servidor -&gt; 403</a:t>
-            </a:r>
-          </a:p>
-        </p:txBody>
-      </p:sp>
-      <p:sp>
-        <p:nvSpPr>
-          <p:cNvPr id="30" name="TextBox 29"/>
+              <a:t>04</a:t>
+            </a:r>
+          </a:p>
+        </p:txBody>
+      </p:sp>
+      <p:sp>
+        <p:nvSpPr>
+          <p:cNvPr id="23" name="TextBox 22"/>
+          <p:cNvSpPr txBox="1"/>
+          <p:nvPr/>
+        </p:nvSpPr>
+        <p:spPr>
+          <a:xfrm>
+            <a:off x="594360" y="4937760"/>
+            <a:ext cx="3337560" cy="457200"/>
+          </a:xfrm>
+          <a:prstGeom prst="rect">
+            <a:avLst/>
+          </a:prstGeom>
+          <a:noFill/>
+        </p:spPr>
+        <p:txBody>
+          <a:bodyPr wrap="square" anchor="t" lIns="0" rIns="0" tIns="0" bIns="0">
+            <a:spAutoFit/>
+          </a:bodyPr>
+          <a:lstStyle/>
+          <a:p>
+            <a:pPr algn="ctr">
+              <a:lnSpc>
+                <a:spcPct val="100000"/>
+              </a:lnSpc>
+              <a:spcBef>
+                <a:spcPts val="0"/>
+              </a:spcBef>
+              <a:spcAft>
+                <a:spcPts val="600"/>
+              </a:spcAft>
+            </a:pPr>
+            <a:r>
+              <a:rPr sz="1800" b="1" i="0">
+                <a:solidFill>
+                  <a:srgbClr val="2D7A3D"/>
+                </a:solidFill>
+                <a:latin typeface="Open Sans"/>
+              </a:rPr>
+              <a:t>Info disclosure</a:t>
+            </a:r>
+          </a:p>
+        </p:txBody>
+      </p:sp>
+      <p:sp>
+        <p:nvSpPr>
+          <p:cNvPr id="24" name="TextBox 23"/>
+          <p:cNvSpPr txBox="1"/>
+          <p:nvPr/>
+        </p:nvSpPr>
+        <p:spPr>
+          <a:xfrm>
+            <a:off x="640080" y="5440680"/>
+            <a:ext cx="3246120" cy="914400"/>
+          </a:xfrm>
+          <a:prstGeom prst="rect">
+            <a:avLst/>
+          </a:prstGeom>
+          <a:noFill/>
+        </p:spPr>
+        <p:txBody>
+          <a:bodyPr wrap="square" anchor="t" lIns="0" rIns="0" tIns="0" bIns="0">
+            <a:spAutoFit/>
+          </a:bodyPr>
+          <a:lstStyle/>
+          <a:p>
+            <a:pPr algn="ctr">
+              <a:lnSpc>
+                <a:spcPct val="110000"/>
+              </a:lnSpc>
+              <a:spcBef>
+                <a:spcPts val="0"/>
+              </a:spcBef>
+              <a:spcAft>
+                <a:spcPts val="600"/>
+              </a:spcAft>
+            </a:pPr>
+            <a:r>
+              <a:rPr sz="1300" b="0" i="0">
+                <a:solidFill>
+                  <a:srgbClr val="212121"/>
+                </a:solidFill>
+                <a:latin typeface="Open Sans"/>
+              </a:rPr>
+              <a:t>vs Confidentiality — SQLi vaza tabela; stack trace</a:t>
+            </a:r>
+          </a:p>
+        </p:txBody>
+      </p:sp>
+      <p:sp>
+        <p:nvSpPr>
+          <p:cNvPr id="25" name="Rounded Rectangle 24"/>
+          <p:cNvSpPr/>
+          <p:nvPr/>
+        </p:nvSpPr>
+        <p:spPr>
+          <a:xfrm>
+            <a:off x="4416552" y="4023360"/>
+            <a:ext cx="3703320" cy="2468880"/>
+          </a:xfrm>
+          <a:prstGeom prst="roundRect">
+            <a:avLst/>
+          </a:prstGeom>
+          <a:solidFill>
+            <a:srgbClr val="F5F5F5"/>
+          </a:solidFill>
+          <a:ln w="19050">
+            <a:solidFill>
+              <a:srgbClr val="B71C1C"/>
+            </a:solidFill>
+          </a:ln>
+          <a:effectLst/>
+        </p:spPr>
+        <p:style>
+          <a:lnRef idx="1">
+            <a:schemeClr val="accent1"/>
+          </a:lnRef>
+          <a:fillRef idx="3">
+            <a:schemeClr val="accent1"/>
+          </a:fillRef>
+          <a:effectRef idx="2">
+            <a:schemeClr val="accent1"/>
+          </a:effectRef>
+          <a:fontRef idx="minor">
+            <a:schemeClr val="lt1"/>
+          </a:fontRef>
+        </p:style>
+        <p:txBody>
+          <a:bodyPr rtlCol="0" anchor="ctr"/>
+          <a:lstStyle/>
+          <a:p>
+            <a:pPr algn="ctr"/>
+          </a:p>
+        </p:txBody>
+      </p:sp>
+      <p:sp>
+        <p:nvSpPr>
+          <p:cNvPr id="26" name="Oval 25"/>
+          <p:cNvSpPr/>
+          <p:nvPr/>
+        </p:nvSpPr>
+        <p:spPr>
+          <a:xfrm>
+            <a:off x="5948172" y="4224528"/>
+            <a:ext cx="640080" cy="640080"/>
+          </a:xfrm>
+          <a:prstGeom prst="ellipse">
+            <a:avLst/>
+          </a:prstGeom>
+          <a:solidFill>
+            <a:srgbClr val="B71C1C"/>
+          </a:solidFill>
+          <a:ln>
+            <a:noFill/>
+          </a:ln>
+          <a:effectLst/>
+        </p:spPr>
+        <p:style>
+          <a:lnRef idx="1">
+            <a:schemeClr val="accent1"/>
+          </a:lnRef>
+          <a:fillRef idx="3">
+            <a:schemeClr val="accent1"/>
+          </a:fillRef>
+          <a:effectRef idx="2">
+            <a:schemeClr val="accent1"/>
+          </a:effectRef>
+          <a:fontRef idx="minor">
+            <a:schemeClr val="lt1"/>
+          </a:fontRef>
+        </p:style>
+        <p:txBody>
+          <a:bodyPr rtlCol="0" anchor="ctr"/>
+          <a:lstStyle/>
+          <a:p>
+            <a:pPr algn="ctr"/>
+          </a:p>
+        </p:txBody>
+      </p:sp>
+      <p:sp>
+        <p:nvSpPr>
+          <p:cNvPr id="27" name="TextBox 26"/>
+          <p:cNvSpPr txBox="1"/>
+          <p:nvPr/>
+        </p:nvSpPr>
+        <p:spPr>
+          <a:xfrm>
+            <a:off x="5948172" y="4315968"/>
+            <a:ext cx="640080" cy="457200"/>
+          </a:xfrm>
+          <a:prstGeom prst="rect">
+            <a:avLst/>
+          </a:prstGeom>
+          <a:noFill/>
+        </p:spPr>
+        <p:txBody>
+          <a:bodyPr wrap="square" anchor="t" lIns="0" rIns="0" tIns="0" bIns="0">
+            <a:spAutoFit/>
+          </a:bodyPr>
+          <a:lstStyle/>
+          <a:p>
+            <a:pPr algn="ctr">
+              <a:lnSpc>
+                <a:spcPct val="100000"/>
+              </a:lnSpc>
+              <a:spcBef>
+                <a:spcPts val="0"/>
+              </a:spcBef>
+              <a:spcAft>
+                <a:spcPts val="600"/>
+              </a:spcAft>
+            </a:pPr>
+            <a:r>
+              <a:rPr sz="1600" b="1" i="0">
+                <a:solidFill>
+                  <a:srgbClr val="FFFFFF"/>
+                </a:solidFill>
+                <a:latin typeface="Open Sans"/>
+              </a:rPr>
+              <a:t>05</a:t>
+            </a:r>
+          </a:p>
+        </p:txBody>
+      </p:sp>
+      <p:sp>
+        <p:nvSpPr>
+          <p:cNvPr id="28" name="TextBox 27"/>
+          <p:cNvSpPr txBox="1"/>
+          <p:nvPr/>
+        </p:nvSpPr>
+        <p:spPr>
+          <a:xfrm>
+            <a:off x="4599432" y="4937760"/>
+            <a:ext cx="3337560" cy="457200"/>
+          </a:xfrm>
+          <a:prstGeom prst="rect">
+            <a:avLst/>
+          </a:prstGeom>
+          <a:noFill/>
+        </p:spPr>
+        <p:txBody>
+          <a:bodyPr wrap="square" anchor="t" lIns="0" rIns="0" tIns="0" bIns="0">
+            <a:spAutoFit/>
+          </a:bodyPr>
+          <a:lstStyle/>
+          <a:p>
+            <a:pPr algn="ctr">
+              <a:lnSpc>
+                <a:spcPct val="100000"/>
+              </a:lnSpc>
+              <a:spcBef>
+                <a:spcPts val="0"/>
+              </a:spcBef>
+              <a:spcAft>
+                <a:spcPts val="600"/>
+              </a:spcAft>
+            </a:pPr>
+            <a:r>
+              <a:rPr sz="1800" b="1" i="0">
+                <a:solidFill>
+                  <a:srgbClr val="2D7A3D"/>
+                </a:solidFill>
+                <a:latin typeface="Open Sans"/>
+              </a:rPr>
+              <a:t>Denial of Service</a:t>
+            </a:r>
+          </a:p>
+        </p:txBody>
+      </p:sp>
+      <p:sp>
+        <p:nvSpPr>
+          <p:cNvPr id="29" name="TextBox 28"/>
+          <p:cNvSpPr txBox="1"/>
+          <p:nvPr/>
+        </p:nvSpPr>
+        <p:spPr>
+          <a:xfrm>
+            <a:off x="4645152" y="5440680"/>
+            <a:ext cx="3246120" cy="914400"/>
+          </a:xfrm>
+          <a:prstGeom prst="rect">
+            <a:avLst/>
+          </a:prstGeom>
+          <a:noFill/>
+        </p:spPr>
+        <p:txBody>
+          <a:bodyPr wrap="square" anchor="t" lIns="0" rIns="0" tIns="0" bIns="0">
+            <a:spAutoFit/>
+          </a:bodyPr>
+          <a:lstStyle/>
+          <a:p>
+            <a:pPr algn="ctr">
+              <a:lnSpc>
+                <a:spcPct val="110000"/>
+              </a:lnSpc>
+              <a:spcBef>
+                <a:spcPts val="0"/>
+              </a:spcBef>
+              <a:spcAft>
+                <a:spcPts val="600"/>
+              </a:spcAft>
+            </a:pPr>
+            <a:r>
+              <a:rPr sz="1300" b="0" i="0">
+                <a:solidFill>
+                  <a:srgbClr val="212121"/>
+                </a:solidFill>
+                <a:latin typeface="Open Sans"/>
+              </a:rPr>
+              <a:t>vs Availability — exaustão de recursos</a:t>
+            </a:r>
+          </a:p>
+        </p:txBody>
+      </p:sp>
+      <p:sp>
+        <p:nvSpPr>
+          <p:cNvPr id="30" name="Rounded Rectangle 29"/>
+          <p:cNvSpPr/>
+          <p:nvPr/>
+        </p:nvSpPr>
+        <p:spPr>
+          <a:xfrm>
+            <a:off x="8421624" y="4023360"/>
+            <a:ext cx="3703320" cy="2468880"/>
+          </a:xfrm>
+          <a:prstGeom prst="roundRect">
+            <a:avLst/>
+          </a:prstGeom>
+          <a:solidFill>
+            <a:srgbClr val="F5F5F5"/>
+          </a:solidFill>
+          <a:ln w="19050">
+            <a:solidFill>
+              <a:srgbClr val="B71C1C"/>
+            </a:solidFill>
+          </a:ln>
+          <a:effectLst/>
+        </p:spPr>
+        <p:style>
+          <a:lnRef idx="1">
+            <a:schemeClr val="accent1"/>
+          </a:lnRef>
+          <a:fillRef idx="3">
+            <a:schemeClr val="accent1"/>
+          </a:fillRef>
+          <a:effectRef idx="2">
+            <a:schemeClr val="accent1"/>
+          </a:effectRef>
+          <a:fontRef idx="minor">
+            <a:schemeClr val="lt1"/>
+          </a:fontRef>
+        </p:style>
+        <p:txBody>
+          <a:bodyPr rtlCol="0" anchor="ctr"/>
+          <a:lstStyle/>
+          <a:p>
+            <a:pPr algn="ctr"/>
+          </a:p>
+        </p:txBody>
+      </p:sp>
+      <p:sp>
+        <p:nvSpPr>
+          <p:cNvPr id="31" name="Oval 30"/>
+          <p:cNvSpPr/>
+          <p:nvPr/>
+        </p:nvSpPr>
+        <p:spPr>
+          <a:xfrm>
+            <a:off x="9953244" y="4224528"/>
+            <a:ext cx="640080" cy="640080"/>
+          </a:xfrm>
+          <a:prstGeom prst="ellipse">
+            <a:avLst/>
+          </a:prstGeom>
+          <a:solidFill>
+            <a:srgbClr val="B71C1C"/>
+          </a:solidFill>
+          <a:ln>
+            <a:noFill/>
+          </a:ln>
+          <a:effectLst/>
+        </p:spPr>
+        <p:style>
+          <a:lnRef idx="1">
+            <a:schemeClr val="accent1"/>
+          </a:lnRef>
+          <a:fillRef idx="3">
+            <a:schemeClr val="accent1"/>
+          </a:fillRef>
+          <a:effectRef idx="2">
+            <a:schemeClr val="accent1"/>
+          </a:effectRef>
+          <a:fontRef idx="minor">
+            <a:schemeClr val="lt1"/>
+          </a:fontRef>
+        </p:style>
+        <p:txBody>
+          <a:bodyPr rtlCol="0" anchor="ctr"/>
+          <a:lstStyle/>
+          <a:p>
+            <a:pPr algn="ctr"/>
+          </a:p>
+        </p:txBody>
+      </p:sp>
+      <p:sp>
+        <p:nvSpPr>
+          <p:cNvPr id="32" name="TextBox 31"/>
+          <p:cNvSpPr txBox="1"/>
+          <p:nvPr/>
+        </p:nvSpPr>
+        <p:spPr>
+          <a:xfrm>
+            <a:off x="9953244" y="4315968"/>
+            <a:ext cx="640080" cy="457200"/>
+          </a:xfrm>
+          <a:prstGeom prst="rect">
+            <a:avLst/>
+          </a:prstGeom>
+          <a:noFill/>
+        </p:spPr>
+        <p:txBody>
+          <a:bodyPr wrap="square" anchor="t" lIns="0" rIns="0" tIns="0" bIns="0">
+            <a:spAutoFit/>
+          </a:bodyPr>
+          <a:lstStyle/>
+          <a:p>
+            <a:pPr algn="ctr">
+              <a:lnSpc>
+                <a:spcPct val="100000"/>
+              </a:lnSpc>
+              <a:spcBef>
+                <a:spcPts val="0"/>
+              </a:spcBef>
+              <a:spcAft>
+                <a:spcPts val="600"/>
+              </a:spcAft>
+            </a:pPr>
+            <a:r>
+              <a:rPr sz="1600" b="1" i="0">
+                <a:solidFill>
+                  <a:srgbClr val="FFFFFF"/>
+                </a:solidFill>
+                <a:latin typeface="Open Sans"/>
+              </a:rPr>
+              <a:t>06</a:t>
+            </a:r>
+          </a:p>
+        </p:txBody>
+      </p:sp>
+      <p:sp>
+        <p:nvSpPr>
+          <p:cNvPr id="33" name="TextBox 32"/>
+          <p:cNvSpPr txBox="1"/>
+          <p:nvPr/>
+        </p:nvSpPr>
+        <p:spPr>
+          <a:xfrm>
+            <a:off x="8604504" y="4937760"/>
+            <a:ext cx="3337560" cy="457200"/>
+          </a:xfrm>
+          <a:prstGeom prst="rect">
+            <a:avLst/>
+          </a:prstGeom>
+          <a:noFill/>
+        </p:spPr>
+        <p:txBody>
+          <a:bodyPr wrap="square" anchor="t" lIns="0" rIns="0" tIns="0" bIns="0">
+            <a:spAutoFit/>
+          </a:bodyPr>
+          <a:lstStyle/>
+          <a:p>
+            <a:pPr algn="ctr">
+              <a:lnSpc>
+                <a:spcPct val="100000"/>
+              </a:lnSpc>
+              <a:spcBef>
+                <a:spcPts val="0"/>
+              </a:spcBef>
+              <a:spcAft>
+                <a:spcPts val="600"/>
+              </a:spcAft>
+            </a:pPr>
+            <a:r>
+              <a:rPr sz="1800" b="1" i="0">
+                <a:solidFill>
+                  <a:srgbClr val="2D7A3D"/>
+                </a:solidFill>
+                <a:latin typeface="Open Sans"/>
+              </a:rPr>
+              <a:t>Elevation of Priv.</a:t>
+            </a:r>
+          </a:p>
+        </p:txBody>
+      </p:sp>
+      <p:sp>
+        <p:nvSpPr>
+          <p:cNvPr id="34" name="TextBox 33"/>
+          <p:cNvSpPr txBox="1"/>
+          <p:nvPr/>
+        </p:nvSpPr>
+        <p:spPr>
+          <a:xfrm>
+            <a:off x="8650224" y="5440680"/>
+            <a:ext cx="3246120" cy="914400"/>
+          </a:xfrm>
+          <a:prstGeom prst="rect">
+            <a:avLst/>
+          </a:prstGeom>
+          <a:noFill/>
+        </p:spPr>
+        <p:txBody>
+          <a:bodyPr wrap="square" anchor="t" lIns="0" rIns="0" tIns="0" bIns="0">
+            <a:spAutoFit/>
+          </a:bodyPr>
+          <a:lstStyle/>
+          <a:p>
+            <a:pPr algn="ctr">
+              <a:lnSpc>
+                <a:spcPct val="110000"/>
+              </a:lnSpc>
+              <a:spcBef>
+                <a:spcPts val="0"/>
+              </a:spcBef>
+              <a:spcAft>
+                <a:spcPts val="600"/>
+              </a:spcAft>
+            </a:pPr>
+            <a:r>
+              <a:rPr sz="1300" b="0" i="0">
+                <a:solidFill>
+                  <a:srgbClr val="212121"/>
+                </a:solidFill>
+                <a:latin typeface="Open Sans"/>
+              </a:rPr>
+              <a:t>vs Authorization — IDOR, JWT alg:none</a:t>
+            </a:r>
+          </a:p>
+        </p:txBody>
+      </p:sp>
+      <p:sp>
+        <p:nvSpPr>
+          <p:cNvPr id="35" name="TextBox 34"/>
           <p:cNvSpPr txBox="1"/>
           <p:nvPr/>
         </p:nvSpPr>
@@ -9084,13 +8505,13 @@
         <p:spPr>
           <a:xfrm>
             <a:off x="0" y="0"/>
-            <a:ext cx="12191695" cy="6858000"/>
+            <a:ext cx="12191695" cy="1234440"/>
           </a:xfrm>
           <a:prstGeom prst="rect">
             <a:avLst/>
           </a:prstGeom>
           <a:solidFill>
-            <a:srgbClr val="1F5232"/>
+            <a:srgbClr val="2D7A3D"/>
           </a:solidFill>
           <a:ln>
             <a:noFill/>
@@ -9127,8 +8548,188 @@
         </p:nvSpPr>
         <p:spPr>
           <a:xfrm>
-            <a:off x="457200" y="2194560"/>
-            <a:ext cx="11247120" cy="548640"/>
+            <a:off x="457200" y="164592"/>
+            <a:ext cx="11247120" cy="640080"/>
+          </a:xfrm>
+          <a:prstGeom prst="rect">
+            <a:avLst/>
+          </a:prstGeom>
+          <a:noFill/>
+        </p:spPr>
+        <p:txBody>
+          <a:bodyPr wrap="square" anchor="t" lIns="0" rIns="0" tIns="0" bIns="0">
+            <a:spAutoFit/>
+          </a:bodyPr>
+          <a:lstStyle/>
+          <a:p>
+            <a:pPr algn="l">
+              <a:lnSpc>
+                <a:spcPct val="100000"/>
+              </a:lnSpc>
+              <a:spcBef>
+                <a:spcPts val="0"/>
+              </a:spcBef>
+              <a:spcAft>
+                <a:spcPts val="600"/>
+              </a:spcAft>
+            </a:pPr>
+            <a:r>
+              <a:rPr sz="3200" b="1" i="0">
+                <a:solidFill>
+                  <a:srgbClr val="FFFFFF"/>
+                </a:solidFill>
+                <a:latin typeface="Open Sans"/>
+              </a:rPr>
+              <a:t>STRIDE-per-element (exemplo)</a:t>
+            </a:r>
+          </a:p>
+        </p:txBody>
+      </p:sp>
+      <p:sp>
+        <p:nvSpPr>
+          <p:cNvPr id="4" name="TextBox 3"/>
+          <p:cNvSpPr txBox="1"/>
+          <p:nvPr/>
+        </p:nvSpPr>
+        <p:spPr>
+          <a:xfrm>
+            <a:off x="457200" y="777240"/>
+            <a:ext cx="11247120" cy="365760"/>
+          </a:xfrm>
+          <a:prstGeom prst="rect">
+            <a:avLst/>
+          </a:prstGeom>
+          <a:noFill/>
+        </p:spPr>
+        <p:txBody>
+          <a:bodyPr wrap="square" anchor="t" lIns="0" rIns="0" tIns="0" bIns="0">
+            <a:spAutoFit/>
+          </a:bodyPr>
+          <a:lstStyle/>
+          <a:p>
+            <a:pPr algn="l">
+              <a:lnSpc>
+                <a:spcPct val="100000"/>
+              </a:lnSpc>
+              <a:spcBef>
+                <a:spcPts val="0"/>
+              </a:spcBef>
+              <a:spcAft>
+                <a:spcPts val="600"/>
+              </a:spcAft>
+            </a:pPr>
+            <a:r>
+              <a:rPr sz="1600" b="0" i="1">
+                <a:solidFill>
+                  <a:srgbClr val="E0E8DB"/>
+                </a:solidFill>
+                <a:latin typeface="Open Sans"/>
+              </a:rPr>
+              <a:t>Cada elemento × ameaça -&gt; requisito</a:t>
+            </a:r>
+          </a:p>
+        </p:txBody>
+      </p:sp>
+      <p:sp>
+        <p:nvSpPr>
+          <p:cNvPr id="5" name="Rounded Rectangle 4"/>
+          <p:cNvSpPr/>
+          <p:nvPr/>
+        </p:nvSpPr>
+        <p:spPr>
+          <a:xfrm>
+            <a:off x="411480" y="1508760"/>
+            <a:ext cx="11384280" cy="749808"/>
+          </a:xfrm>
+          <a:prstGeom prst="roundRect">
+            <a:avLst/>
+          </a:prstGeom>
+          <a:solidFill>
+            <a:srgbClr val="E8F0DB"/>
+          </a:solidFill>
+          <a:ln w="12700">
+            <a:solidFill>
+              <a:srgbClr val="7CB342"/>
+            </a:solidFill>
+          </a:ln>
+          <a:effectLst/>
+        </p:spPr>
+        <p:style>
+          <a:lnRef idx="1">
+            <a:schemeClr val="accent1"/>
+          </a:lnRef>
+          <a:fillRef idx="3">
+            <a:schemeClr val="accent1"/>
+          </a:fillRef>
+          <a:effectRef idx="2">
+            <a:schemeClr val="accent1"/>
+          </a:effectRef>
+          <a:fontRef idx="minor">
+            <a:schemeClr val="lt1"/>
+          </a:fontRef>
+        </p:style>
+        <p:txBody>
+          <a:bodyPr rtlCol="0" anchor="ctr"/>
+          <a:lstStyle/>
+          <a:p>
+            <a:pPr algn="ctr"/>
+          </a:p>
+        </p:txBody>
+      </p:sp>
+      <p:sp>
+        <p:nvSpPr>
+          <p:cNvPr id="6" name="Rounded Rectangle 5"/>
+          <p:cNvSpPr/>
+          <p:nvPr/>
+        </p:nvSpPr>
+        <p:spPr>
+          <a:xfrm>
+            <a:off x="502920" y="1600200"/>
+            <a:ext cx="1920240" cy="566927"/>
+          </a:xfrm>
+          <a:prstGeom prst="roundRect">
+            <a:avLst/>
+          </a:prstGeom>
+          <a:solidFill>
+            <a:srgbClr val="2D7A3D"/>
+          </a:solidFill>
+          <a:ln>
+            <a:noFill/>
+          </a:ln>
+          <a:effectLst/>
+        </p:spPr>
+        <p:style>
+          <a:lnRef idx="1">
+            <a:schemeClr val="accent1"/>
+          </a:lnRef>
+          <a:fillRef idx="3">
+            <a:schemeClr val="accent1"/>
+          </a:fillRef>
+          <a:effectRef idx="2">
+            <a:schemeClr val="accent1"/>
+          </a:effectRef>
+          <a:fontRef idx="minor">
+            <a:schemeClr val="lt1"/>
+          </a:fontRef>
+        </p:style>
+        <p:txBody>
+          <a:bodyPr rtlCol="0" anchor="ctr"/>
+          <a:lstStyle/>
+          <a:p>
+            <a:pPr algn="ctr"/>
+          </a:p>
+        </p:txBody>
+      </p:sp>
+      <p:sp>
+        <p:nvSpPr>
+          <p:cNvPr id="7" name="TextBox 6"/>
+          <p:cNvSpPr txBox="1"/>
+          <p:nvPr/>
+        </p:nvSpPr>
+        <p:spPr>
+          <a:xfrm>
+            <a:off x="502920" y="1709928"/>
+            <a:ext cx="1920240" cy="457200"/>
           </a:xfrm>
           <a:prstGeom prst="rect">
             <a:avLst/>
@@ -9153,27 +8754,207 @@
               </a:spcAft>
             </a:pPr>
             <a:r>
-              <a:rPr sz="2000" b="1" i="0">
-                <a:solidFill>
-                  <a:srgbClr val="7CB342"/>
+              <a:rPr sz="1800" b="1" i="0">
+                <a:solidFill>
+                  <a:srgbClr val="FFFFFF"/>
                 </a:solidFill>
                 <a:latin typeface="Open Sans"/>
               </a:rPr>
-              <a:t>PARTE 3</a:t>
-            </a:r>
-          </a:p>
-        </p:txBody>
-      </p:sp>
-      <p:sp>
-        <p:nvSpPr>
-          <p:cNvPr id="4" name="TextBox 3"/>
+              <a:t>Login (processo)</a:t>
+            </a:r>
+          </a:p>
+        </p:txBody>
+      </p:sp>
+      <p:sp>
+        <p:nvSpPr>
+          <p:cNvPr id="8" name="TextBox 7"/>
           <p:cNvSpPr txBox="1"/>
           <p:nvPr/>
         </p:nvSpPr>
         <p:spPr>
           <a:xfrm>
-            <a:off x="457200" y="2834640"/>
-            <a:ext cx="11247120" cy="1280160"/>
+            <a:off x="2697480" y="1709928"/>
+            <a:ext cx="3657600" cy="457200"/>
+          </a:xfrm>
+          <a:prstGeom prst="rect">
+            <a:avLst/>
+          </a:prstGeom>
+          <a:noFill/>
+        </p:spPr>
+        <p:txBody>
+          <a:bodyPr wrap="square" anchor="t" lIns="0" rIns="0" tIns="0" bIns="0">
+            <a:spAutoFit/>
+          </a:bodyPr>
+          <a:lstStyle/>
+          <a:p>
+            <a:pPr algn="l">
+              <a:lnSpc>
+                <a:spcPct val="100000"/>
+              </a:lnSpc>
+              <a:spcBef>
+                <a:spcPts val="0"/>
+              </a:spcBef>
+              <a:spcAft>
+                <a:spcPts val="600"/>
+              </a:spcAft>
+            </a:pPr>
+            <a:r>
+              <a:rPr sz="1500" b="1" i="0">
+                <a:solidFill>
+                  <a:srgbClr val="2D7A3D"/>
+                </a:solidFill>
+                <a:latin typeface="Open Sans"/>
+              </a:rPr>
+              <a:t>Spoofing</a:t>
+            </a:r>
+          </a:p>
+        </p:txBody>
+      </p:sp>
+      <p:sp>
+        <p:nvSpPr>
+          <p:cNvPr id="9" name="TextBox 8"/>
+          <p:cNvSpPr txBox="1"/>
+          <p:nvPr/>
+        </p:nvSpPr>
+        <p:spPr>
+          <a:xfrm>
+            <a:off x="6492240" y="1728216"/>
+            <a:ext cx="5120640" cy="457200"/>
+          </a:xfrm>
+          <a:prstGeom prst="rect">
+            <a:avLst/>
+          </a:prstGeom>
+          <a:noFill/>
+        </p:spPr>
+        <p:txBody>
+          <a:bodyPr wrap="square" anchor="t" lIns="0" rIns="0" tIns="0" bIns="0">
+            <a:spAutoFit/>
+          </a:bodyPr>
+          <a:lstStyle/>
+          <a:p>
+            <a:pPr algn="l">
+              <a:lnSpc>
+                <a:spcPct val="100000"/>
+              </a:lnSpc>
+              <a:spcBef>
+                <a:spcPts val="0"/>
+              </a:spcBef>
+              <a:spcAft>
+                <a:spcPts val="600"/>
+              </a:spcAft>
+            </a:pPr>
+            <a:r>
+              <a:rPr sz="1300" b="0" i="0">
+                <a:solidFill>
+                  <a:srgbClr val="212121"/>
+                </a:solidFill>
+                <a:latin typeface="Open Sans"/>
+              </a:rPr>
+              <a:t>MFA; bloqueio após N tentativas</a:t>
+            </a:r>
+          </a:p>
+        </p:txBody>
+      </p:sp>
+      <p:sp>
+        <p:nvSpPr>
+          <p:cNvPr id="10" name="Rounded Rectangle 9"/>
+          <p:cNvSpPr/>
+          <p:nvPr/>
+        </p:nvSpPr>
+        <p:spPr>
+          <a:xfrm>
+            <a:off x="411480" y="2313432"/>
+            <a:ext cx="11384280" cy="749808"/>
+          </a:xfrm>
+          <a:prstGeom prst="roundRect">
+            <a:avLst/>
+          </a:prstGeom>
+          <a:solidFill>
+            <a:srgbClr val="E8F0DB"/>
+          </a:solidFill>
+          <a:ln w="12700">
+            <a:solidFill>
+              <a:srgbClr val="7CB342"/>
+            </a:solidFill>
+          </a:ln>
+          <a:effectLst/>
+        </p:spPr>
+        <p:style>
+          <a:lnRef idx="1">
+            <a:schemeClr val="accent1"/>
+          </a:lnRef>
+          <a:fillRef idx="3">
+            <a:schemeClr val="accent1"/>
+          </a:fillRef>
+          <a:effectRef idx="2">
+            <a:schemeClr val="accent1"/>
+          </a:effectRef>
+          <a:fontRef idx="minor">
+            <a:schemeClr val="lt1"/>
+          </a:fontRef>
+        </p:style>
+        <p:txBody>
+          <a:bodyPr rtlCol="0" anchor="ctr"/>
+          <a:lstStyle/>
+          <a:p>
+            <a:pPr algn="ctr"/>
+          </a:p>
+        </p:txBody>
+      </p:sp>
+      <p:sp>
+        <p:nvSpPr>
+          <p:cNvPr id="11" name="Rounded Rectangle 10"/>
+          <p:cNvSpPr/>
+          <p:nvPr/>
+        </p:nvSpPr>
+        <p:spPr>
+          <a:xfrm>
+            <a:off x="502920" y="2404872"/>
+            <a:ext cx="1920240" cy="566927"/>
+          </a:xfrm>
+          <a:prstGeom prst="roundRect">
+            <a:avLst/>
+          </a:prstGeom>
+          <a:solidFill>
+            <a:srgbClr val="2D7A3D"/>
+          </a:solidFill>
+          <a:ln>
+            <a:noFill/>
+          </a:ln>
+          <a:effectLst/>
+        </p:spPr>
+        <p:style>
+          <a:lnRef idx="1">
+            <a:schemeClr val="accent1"/>
+          </a:lnRef>
+          <a:fillRef idx="3">
+            <a:schemeClr val="accent1"/>
+          </a:fillRef>
+          <a:effectRef idx="2">
+            <a:schemeClr val="accent1"/>
+          </a:effectRef>
+          <a:fontRef idx="minor">
+            <a:schemeClr val="lt1"/>
+          </a:fontRef>
+        </p:style>
+        <p:txBody>
+          <a:bodyPr rtlCol="0" anchor="ctr"/>
+          <a:lstStyle/>
+          <a:p>
+            <a:pPr algn="ctr"/>
+          </a:p>
+        </p:txBody>
+      </p:sp>
+      <p:sp>
+        <p:nvSpPr>
+          <p:cNvPr id="12" name="TextBox 11"/>
+          <p:cNvSpPr txBox="1"/>
+          <p:nvPr/>
+        </p:nvSpPr>
+        <p:spPr>
+          <a:xfrm>
+            <a:off x="502920" y="2514600"/>
+            <a:ext cx="1920240" cy="457200"/>
           </a:xfrm>
           <a:prstGeom prst="rect">
             <a:avLst/>
@@ -9198,27 +8979,207 @@
               </a:spcAft>
             </a:pPr>
             <a:r>
-              <a:rPr sz="6000" b="1" i="0">
+              <a:rPr sz="1800" b="1" i="0">
                 <a:solidFill>
                   <a:srgbClr val="FFFFFF"/>
                 </a:solidFill>
                 <a:latin typeface="Open Sans"/>
               </a:rPr>
-              <a:t>No VidaPlus</a:t>
-            </a:r>
-          </a:p>
-        </p:txBody>
-      </p:sp>
-      <p:sp>
-        <p:nvSpPr>
-          <p:cNvPr id="5" name="TextBox 4"/>
+              <a:t>Token de sessão (fluxo)</a:t>
+            </a:r>
+          </a:p>
+        </p:txBody>
+      </p:sp>
+      <p:sp>
+        <p:nvSpPr>
+          <p:cNvPr id="13" name="TextBox 12"/>
           <p:cNvSpPr txBox="1"/>
           <p:nvPr/>
         </p:nvSpPr>
         <p:spPr>
           <a:xfrm>
-            <a:off x="457200" y="4297680"/>
-            <a:ext cx="11247120" cy="457200"/>
+            <a:off x="2697480" y="2514600"/>
+            <a:ext cx="3657600" cy="457200"/>
+          </a:xfrm>
+          <a:prstGeom prst="rect">
+            <a:avLst/>
+          </a:prstGeom>
+          <a:noFill/>
+        </p:spPr>
+        <p:txBody>
+          <a:bodyPr wrap="square" anchor="t" lIns="0" rIns="0" tIns="0" bIns="0">
+            <a:spAutoFit/>
+          </a:bodyPr>
+          <a:lstStyle/>
+          <a:p>
+            <a:pPr algn="l">
+              <a:lnSpc>
+                <a:spcPct val="100000"/>
+              </a:lnSpc>
+              <a:spcBef>
+                <a:spcPts val="0"/>
+              </a:spcBef>
+              <a:spcAft>
+                <a:spcPts val="600"/>
+              </a:spcAft>
+            </a:pPr>
+            <a:r>
+              <a:rPr sz="1500" b="1" i="0">
+                <a:solidFill>
+                  <a:srgbClr val="2D7A3D"/>
+                </a:solidFill>
+                <a:latin typeface="Open Sans"/>
+              </a:rPr>
+              <a:t>Tampering</a:t>
+            </a:r>
+          </a:p>
+        </p:txBody>
+      </p:sp>
+      <p:sp>
+        <p:nvSpPr>
+          <p:cNvPr id="14" name="TextBox 13"/>
+          <p:cNvSpPr txBox="1"/>
+          <p:nvPr/>
+        </p:nvSpPr>
+        <p:spPr>
+          <a:xfrm>
+            <a:off x="6492240" y="2532887"/>
+            <a:ext cx="5120640" cy="457200"/>
+          </a:xfrm>
+          <a:prstGeom prst="rect">
+            <a:avLst/>
+          </a:prstGeom>
+          <a:noFill/>
+        </p:spPr>
+        <p:txBody>
+          <a:bodyPr wrap="square" anchor="t" lIns="0" rIns="0" tIns="0" bIns="0">
+            <a:spAutoFit/>
+          </a:bodyPr>
+          <a:lstStyle/>
+          <a:p>
+            <a:pPr algn="l">
+              <a:lnSpc>
+                <a:spcPct val="100000"/>
+              </a:lnSpc>
+              <a:spcBef>
+                <a:spcPts val="0"/>
+              </a:spcBef>
+              <a:spcAft>
+                <a:spcPts val="600"/>
+              </a:spcAft>
+            </a:pPr>
+            <a:r>
+              <a:rPr sz="1300" b="0" i="0">
+                <a:solidFill>
+                  <a:srgbClr val="212121"/>
+                </a:solidFill>
+                <a:latin typeface="Open Sans"/>
+              </a:rPr>
+              <a:t>JWT assinado; rejeitar alg:none</a:t>
+            </a:r>
+          </a:p>
+        </p:txBody>
+      </p:sp>
+      <p:sp>
+        <p:nvSpPr>
+          <p:cNvPr id="15" name="Rounded Rectangle 14"/>
+          <p:cNvSpPr/>
+          <p:nvPr/>
+        </p:nvSpPr>
+        <p:spPr>
+          <a:xfrm>
+            <a:off x="411480" y="3118103"/>
+            <a:ext cx="11384280" cy="749808"/>
+          </a:xfrm>
+          <a:prstGeom prst="roundRect">
+            <a:avLst/>
+          </a:prstGeom>
+          <a:solidFill>
+            <a:srgbClr val="E8F0DB"/>
+          </a:solidFill>
+          <a:ln w="12700">
+            <a:solidFill>
+              <a:srgbClr val="7CB342"/>
+            </a:solidFill>
+          </a:ln>
+          <a:effectLst/>
+        </p:spPr>
+        <p:style>
+          <a:lnRef idx="1">
+            <a:schemeClr val="accent1"/>
+          </a:lnRef>
+          <a:fillRef idx="3">
+            <a:schemeClr val="accent1"/>
+          </a:fillRef>
+          <a:effectRef idx="2">
+            <a:schemeClr val="accent1"/>
+          </a:effectRef>
+          <a:fontRef idx="minor">
+            <a:schemeClr val="lt1"/>
+          </a:fontRef>
+        </p:style>
+        <p:txBody>
+          <a:bodyPr rtlCol="0" anchor="ctr"/>
+          <a:lstStyle/>
+          <a:p>
+            <a:pPr algn="ctr"/>
+          </a:p>
+        </p:txBody>
+      </p:sp>
+      <p:sp>
+        <p:nvSpPr>
+          <p:cNvPr id="16" name="Rounded Rectangle 15"/>
+          <p:cNvSpPr/>
+          <p:nvPr/>
+        </p:nvSpPr>
+        <p:spPr>
+          <a:xfrm>
+            <a:off x="502920" y="3209544"/>
+            <a:ext cx="1920240" cy="566927"/>
+          </a:xfrm>
+          <a:prstGeom prst="roundRect">
+            <a:avLst/>
+          </a:prstGeom>
+          <a:solidFill>
+            <a:srgbClr val="2D7A3D"/>
+          </a:solidFill>
+          <a:ln>
+            <a:noFill/>
+          </a:ln>
+          <a:effectLst/>
+        </p:spPr>
+        <p:style>
+          <a:lnRef idx="1">
+            <a:schemeClr val="accent1"/>
+          </a:lnRef>
+          <a:fillRef idx="3">
+            <a:schemeClr val="accent1"/>
+          </a:fillRef>
+          <a:effectRef idx="2">
+            <a:schemeClr val="accent1"/>
+          </a:effectRef>
+          <a:fontRef idx="minor">
+            <a:schemeClr val="lt1"/>
+          </a:fontRef>
+        </p:style>
+        <p:txBody>
+          <a:bodyPr rtlCol="0" anchor="ctr"/>
+          <a:lstStyle/>
+          <a:p>
+            <a:pPr algn="ctr"/>
+          </a:p>
+        </p:txBody>
+      </p:sp>
+      <p:sp>
+        <p:nvSpPr>
+          <p:cNvPr id="17" name="TextBox 16"/>
+          <p:cNvSpPr txBox="1"/>
+          <p:nvPr/>
+        </p:nvSpPr>
+        <p:spPr>
+          <a:xfrm>
+            <a:off x="502920" y="3319272"/>
+            <a:ext cx="1920240" cy="457200"/>
           </a:xfrm>
           <a:prstGeom prst="rect">
             <a:avLst/>
@@ -9243,33 +9204,169 @@
               </a:spcAft>
             </a:pPr>
             <a:r>
-              <a:rPr sz="2200" b="0" i="1">
-                <a:solidFill>
-                  <a:srgbClr val="CCD7C0"/>
+              <a:rPr sz="1800" b="1" i="0">
+                <a:solidFill>
+                  <a:srgbClr val="FFFFFF"/>
                 </a:solidFill>
                 <a:latin typeface="Open Sans"/>
               </a:rPr>
-              <a:t>A etapa desta semana (Fase 2a)</a:t>
-            </a:r>
-          </a:p>
-        </p:txBody>
-      </p:sp>
-      <p:sp>
-        <p:nvSpPr>
-          <p:cNvPr id="6" name="Rectangle 5"/>
+              <a:t>Log (armazenamento)</a:t>
+            </a:r>
+          </a:p>
+        </p:txBody>
+      </p:sp>
+      <p:sp>
+        <p:nvSpPr>
+          <p:cNvPr id="18" name="TextBox 17"/>
+          <p:cNvSpPr txBox="1"/>
+          <p:nvPr/>
+        </p:nvSpPr>
+        <p:spPr>
+          <a:xfrm>
+            <a:off x="2697480" y="3319272"/>
+            <a:ext cx="3657600" cy="457200"/>
+          </a:xfrm>
+          <a:prstGeom prst="rect">
+            <a:avLst/>
+          </a:prstGeom>
+          <a:noFill/>
+        </p:spPr>
+        <p:txBody>
+          <a:bodyPr wrap="square" anchor="t" lIns="0" rIns="0" tIns="0" bIns="0">
+            <a:spAutoFit/>
+          </a:bodyPr>
+          <a:lstStyle/>
+          <a:p>
+            <a:pPr algn="l">
+              <a:lnSpc>
+                <a:spcPct val="100000"/>
+              </a:lnSpc>
+              <a:spcBef>
+                <a:spcPts val="0"/>
+              </a:spcBef>
+              <a:spcAft>
+                <a:spcPts val="600"/>
+              </a:spcAft>
+            </a:pPr>
+            <a:r>
+              <a:rPr sz="1500" b="1" i="0">
+                <a:solidFill>
+                  <a:srgbClr val="2D7A3D"/>
+                </a:solidFill>
+                <a:latin typeface="Open Sans"/>
+              </a:rPr>
+              <a:t>Repudiation</a:t>
+            </a:r>
+          </a:p>
+        </p:txBody>
+      </p:sp>
+      <p:sp>
+        <p:nvSpPr>
+          <p:cNvPr id="19" name="TextBox 18"/>
+          <p:cNvSpPr txBox="1"/>
+          <p:nvPr/>
+        </p:nvSpPr>
+        <p:spPr>
+          <a:xfrm>
+            <a:off x="6492240" y="3337559"/>
+            <a:ext cx="5120640" cy="457200"/>
+          </a:xfrm>
+          <a:prstGeom prst="rect">
+            <a:avLst/>
+          </a:prstGeom>
+          <a:noFill/>
+        </p:spPr>
+        <p:txBody>
+          <a:bodyPr wrap="square" anchor="t" lIns="0" rIns="0" tIns="0" bIns="0">
+            <a:spAutoFit/>
+          </a:bodyPr>
+          <a:lstStyle/>
+          <a:p>
+            <a:pPr algn="l">
+              <a:lnSpc>
+                <a:spcPct val="100000"/>
+              </a:lnSpc>
+              <a:spcBef>
+                <a:spcPts val="0"/>
+              </a:spcBef>
+              <a:spcAft>
+                <a:spcPts val="600"/>
+              </a:spcAft>
+            </a:pPr>
+            <a:r>
+              <a:rPr sz="1300" b="0" i="0">
+                <a:solidFill>
+                  <a:srgbClr val="212121"/>
+                </a:solidFill>
+                <a:latin typeface="Open Sans"/>
+              </a:rPr>
+              <a:t>logs assinados e imutáveis</a:t>
+            </a:r>
+          </a:p>
+        </p:txBody>
+      </p:sp>
+      <p:sp>
+        <p:nvSpPr>
+          <p:cNvPr id="20" name="Rounded Rectangle 19"/>
           <p:cNvSpPr/>
           <p:nvPr/>
         </p:nvSpPr>
         <p:spPr>
           <a:xfrm>
-            <a:off x="5184648" y="4983480"/>
-            <a:ext cx="1828800" cy="25400"/>
-          </a:xfrm>
-          <a:prstGeom prst="rect">
+            <a:off x="411480" y="3922775"/>
+            <a:ext cx="11384280" cy="749808"/>
+          </a:xfrm>
+          <a:prstGeom prst="roundRect">
             <a:avLst/>
           </a:prstGeom>
           <a:solidFill>
-            <a:srgbClr val="7CB342"/>
+            <a:srgbClr val="E8F0DB"/>
+          </a:solidFill>
+          <a:ln w="12700">
+            <a:solidFill>
+              <a:srgbClr val="7CB342"/>
+            </a:solidFill>
+          </a:ln>
+          <a:effectLst/>
+        </p:spPr>
+        <p:style>
+          <a:lnRef idx="1">
+            <a:schemeClr val="accent1"/>
+          </a:lnRef>
+          <a:fillRef idx="3">
+            <a:schemeClr val="accent1"/>
+          </a:fillRef>
+          <a:effectRef idx="2">
+            <a:schemeClr val="accent1"/>
+          </a:effectRef>
+          <a:fontRef idx="minor">
+            <a:schemeClr val="lt1"/>
+          </a:fontRef>
+        </p:style>
+        <p:txBody>
+          <a:bodyPr rtlCol="0" anchor="ctr"/>
+          <a:lstStyle/>
+          <a:p>
+            <a:pPr algn="ctr"/>
+          </a:p>
+        </p:txBody>
+      </p:sp>
+      <p:sp>
+        <p:nvSpPr>
+          <p:cNvPr id="21" name="Rounded Rectangle 20"/>
+          <p:cNvSpPr/>
+          <p:nvPr/>
+        </p:nvSpPr>
+        <p:spPr>
+          <a:xfrm>
+            <a:off x="502920" y="4014215"/>
+            <a:ext cx="1920240" cy="566927"/>
+          </a:xfrm>
+          <a:prstGeom prst="roundRect">
+            <a:avLst/>
+          </a:prstGeom>
+          <a:solidFill>
+            <a:srgbClr val="2D7A3D"/>
           </a:solidFill>
           <a:ln>
             <a:noFill/>
@@ -9295,6 +9392,411 @@
           <a:lstStyle/>
           <a:p>
             <a:pPr algn="ctr"/>
+          </a:p>
+        </p:txBody>
+      </p:sp>
+      <p:sp>
+        <p:nvSpPr>
+          <p:cNvPr id="22" name="TextBox 21"/>
+          <p:cNvSpPr txBox="1"/>
+          <p:nvPr/>
+        </p:nvSpPr>
+        <p:spPr>
+          <a:xfrm>
+            <a:off x="502920" y="4123943"/>
+            <a:ext cx="1920240" cy="457200"/>
+          </a:xfrm>
+          <a:prstGeom prst="rect">
+            <a:avLst/>
+          </a:prstGeom>
+          <a:noFill/>
+        </p:spPr>
+        <p:txBody>
+          <a:bodyPr wrap="square" anchor="t" lIns="0" rIns="0" tIns="0" bIns="0">
+            <a:spAutoFit/>
+          </a:bodyPr>
+          <a:lstStyle/>
+          <a:p>
+            <a:pPr algn="ctr">
+              <a:lnSpc>
+                <a:spcPct val="100000"/>
+              </a:lnSpc>
+              <a:spcBef>
+                <a:spcPts val="0"/>
+              </a:spcBef>
+              <a:spcAft>
+                <a:spcPts val="600"/>
+              </a:spcAft>
+            </a:pPr>
+            <a:r>
+              <a:rPr sz="1800" b="1" i="0">
+                <a:solidFill>
+                  <a:srgbClr val="FFFFFF"/>
+                </a:solidFill>
+                <a:latin typeface="Open Sans"/>
+              </a:rPr>
+              <a:t>Banco (armazenamento)</a:t>
+            </a:r>
+          </a:p>
+        </p:txBody>
+      </p:sp>
+      <p:sp>
+        <p:nvSpPr>
+          <p:cNvPr id="23" name="TextBox 22"/>
+          <p:cNvSpPr txBox="1"/>
+          <p:nvPr/>
+        </p:nvSpPr>
+        <p:spPr>
+          <a:xfrm>
+            <a:off x="2697480" y="4123943"/>
+            <a:ext cx="3657600" cy="457200"/>
+          </a:xfrm>
+          <a:prstGeom prst="rect">
+            <a:avLst/>
+          </a:prstGeom>
+          <a:noFill/>
+        </p:spPr>
+        <p:txBody>
+          <a:bodyPr wrap="square" anchor="t" lIns="0" rIns="0" tIns="0" bIns="0">
+            <a:spAutoFit/>
+          </a:bodyPr>
+          <a:lstStyle/>
+          <a:p>
+            <a:pPr algn="l">
+              <a:lnSpc>
+                <a:spcPct val="100000"/>
+              </a:lnSpc>
+              <a:spcBef>
+                <a:spcPts val="0"/>
+              </a:spcBef>
+              <a:spcAft>
+                <a:spcPts val="600"/>
+              </a:spcAft>
+            </a:pPr>
+            <a:r>
+              <a:rPr sz="1500" b="1" i="0">
+                <a:solidFill>
+                  <a:srgbClr val="2D7A3D"/>
+                </a:solidFill>
+                <a:latin typeface="Open Sans"/>
+              </a:rPr>
+              <a:t>Info disclosure</a:t>
+            </a:r>
+          </a:p>
+        </p:txBody>
+      </p:sp>
+      <p:sp>
+        <p:nvSpPr>
+          <p:cNvPr id="24" name="TextBox 23"/>
+          <p:cNvSpPr txBox="1"/>
+          <p:nvPr/>
+        </p:nvSpPr>
+        <p:spPr>
+          <a:xfrm>
+            <a:off x="6492240" y="4142231"/>
+            <a:ext cx="5120640" cy="457200"/>
+          </a:xfrm>
+          <a:prstGeom prst="rect">
+            <a:avLst/>
+          </a:prstGeom>
+          <a:noFill/>
+        </p:spPr>
+        <p:txBody>
+          <a:bodyPr wrap="square" anchor="t" lIns="0" rIns="0" tIns="0" bIns="0">
+            <a:spAutoFit/>
+          </a:bodyPr>
+          <a:lstStyle/>
+          <a:p>
+            <a:pPr algn="l">
+              <a:lnSpc>
+                <a:spcPct val="100000"/>
+              </a:lnSpc>
+              <a:spcBef>
+                <a:spcPts val="0"/>
+              </a:spcBef>
+              <a:spcAft>
+                <a:spcPts val="600"/>
+              </a:spcAft>
+            </a:pPr>
+            <a:r>
+              <a:rPr sz="1300" b="0" i="0">
+                <a:solidFill>
+                  <a:srgbClr val="212121"/>
+                </a:solidFill>
+                <a:latin typeface="Open Sans"/>
+              </a:rPr>
+              <a:t>AES-256 em repouso; acesso mínimo</a:t>
+            </a:r>
+          </a:p>
+        </p:txBody>
+      </p:sp>
+      <p:sp>
+        <p:nvSpPr>
+          <p:cNvPr id="25" name="Rounded Rectangle 24"/>
+          <p:cNvSpPr/>
+          <p:nvPr/>
+        </p:nvSpPr>
+        <p:spPr>
+          <a:xfrm>
+            <a:off x="411480" y="4727448"/>
+            <a:ext cx="11384280" cy="749808"/>
+          </a:xfrm>
+          <a:prstGeom prst="roundRect">
+            <a:avLst/>
+          </a:prstGeom>
+          <a:solidFill>
+            <a:srgbClr val="E8F0DB"/>
+          </a:solidFill>
+          <a:ln w="12700">
+            <a:solidFill>
+              <a:srgbClr val="7CB342"/>
+            </a:solidFill>
+          </a:ln>
+          <a:effectLst/>
+        </p:spPr>
+        <p:style>
+          <a:lnRef idx="1">
+            <a:schemeClr val="accent1"/>
+          </a:lnRef>
+          <a:fillRef idx="3">
+            <a:schemeClr val="accent1"/>
+          </a:fillRef>
+          <a:effectRef idx="2">
+            <a:schemeClr val="accent1"/>
+          </a:effectRef>
+          <a:fontRef idx="minor">
+            <a:schemeClr val="lt1"/>
+          </a:fontRef>
+        </p:style>
+        <p:txBody>
+          <a:bodyPr rtlCol="0" anchor="ctr"/>
+          <a:lstStyle/>
+          <a:p>
+            <a:pPr algn="ctr"/>
+          </a:p>
+        </p:txBody>
+      </p:sp>
+      <p:sp>
+        <p:nvSpPr>
+          <p:cNvPr id="26" name="Rounded Rectangle 25"/>
+          <p:cNvSpPr/>
+          <p:nvPr/>
+        </p:nvSpPr>
+        <p:spPr>
+          <a:xfrm>
+            <a:off x="502920" y="4818888"/>
+            <a:ext cx="1920240" cy="566927"/>
+          </a:xfrm>
+          <a:prstGeom prst="roundRect">
+            <a:avLst/>
+          </a:prstGeom>
+          <a:solidFill>
+            <a:srgbClr val="2D7A3D"/>
+          </a:solidFill>
+          <a:ln>
+            <a:noFill/>
+          </a:ln>
+          <a:effectLst/>
+        </p:spPr>
+        <p:style>
+          <a:lnRef idx="1">
+            <a:schemeClr val="accent1"/>
+          </a:lnRef>
+          <a:fillRef idx="3">
+            <a:schemeClr val="accent1"/>
+          </a:fillRef>
+          <a:effectRef idx="2">
+            <a:schemeClr val="accent1"/>
+          </a:effectRef>
+          <a:fontRef idx="minor">
+            <a:schemeClr val="lt1"/>
+          </a:fontRef>
+        </p:style>
+        <p:txBody>
+          <a:bodyPr rtlCol="0" anchor="ctr"/>
+          <a:lstStyle/>
+          <a:p>
+            <a:pPr algn="ctr"/>
+          </a:p>
+        </p:txBody>
+      </p:sp>
+      <p:sp>
+        <p:nvSpPr>
+          <p:cNvPr id="27" name="TextBox 26"/>
+          <p:cNvSpPr txBox="1"/>
+          <p:nvPr/>
+        </p:nvSpPr>
+        <p:spPr>
+          <a:xfrm>
+            <a:off x="502920" y="4928616"/>
+            <a:ext cx="1920240" cy="457200"/>
+          </a:xfrm>
+          <a:prstGeom prst="rect">
+            <a:avLst/>
+          </a:prstGeom>
+          <a:noFill/>
+        </p:spPr>
+        <p:txBody>
+          <a:bodyPr wrap="square" anchor="t" lIns="0" rIns="0" tIns="0" bIns="0">
+            <a:spAutoFit/>
+          </a:bodyPr>
+          <a:lstStyle/>
+          <a:p>
+            <a:pPr algn="ctr">
+              <a:lnSpc>
+                <a:spcPct val="100000"/>
+              </a:lnSpc>
+              <a:spcBef>
+                <a:spcPts val="0"/>
+              </a:spcBef>
+              <a:spcAft>
+                <a:spcPts val="600"/>
+              </a:spcAft>
+            </a:pPr>
+            <a:r>
+              <a:rPr sz="1800" b="1" i="0">
+                <a:solidFill>
+                  <a:srgbClr val="FFFFFF"/>
+                </a:solidFill>
+                <a:latin typeface="Open Sans"/>
+              </a:rPr>
+              <a:t>Download de exame</a:t>
+            </a:r>
+          </a:p>
+        </p:txBody>
+      </p:sp>
+      <p:sp>
+        <p:nvSpPr>
+          <p:cNvPr id="28" name="TextBox 27"/>
+          <p:cNvSpPr txBox="1"/>
+          <p:nvPr/>
+        </p:nvSpPr>
+        <p:spPr>
+          <a:xfrm>
+            <a:off x="2697480" y="4928616"/>
+            <a:ext cx="3657600" cy="457200"/>
+          </a:xfrm>
+          <a:prstGeom prst="rect">
+            <a:avLst/>
+          </a:prstGeom>
+          <a:noFill/>
+        </p:spPr>
+        <p:txBody>
+          <a:bodyPr wrap="square" anchor="t" lIns="0" rIns="0" tIns="0" bIns="0">
+            <a:spAutoFit/>
+          </a:bodyPr>
+          <a:lstStyle/>
+          <a:p>
+            <a:pPr algn="l">
+              <a:lnSpc>
+                <a:spcPct val="100000"/>
+              </a:lnSpc>
+              <a:spcBef>
+                <a:spcPts val="0"/>
+              </a:spcBef>
+              <a:spcAft>
+                <a:spcPts val="600"/>
+              </a:spcAft>
+            </a:pPr>
+            <a:r>
+              <a:rPr sz="1500" b="1" i="0">
+                <a:solidFill>
+                  <a:srgbClr val="2D7A3D"/>
+                </a:solidFill>
+                <a:latin typeface="Open Sans"/>
+              </a:rPr>
+              <a:t>Elevation of Priv.</a:t>
+            </a:r>
+          </a:p>
+        </p:txBody>
+      </p:sp>
+      <p:sp>
+        <p:nvSpPr>
+          <p:cNvPr id="29" name="TextBox 28"/>
+          <p:cNvSpPr txBox="1"/>
+          <p:nvPr/>
+        </p:nvSpPr>
+        <p:spPr>
+          <a:xfrm>
+            <a:off x="6492240" y="4946904"/>
+            <a:ext cx="5120640" cy="457200"/>
+          </a:xfrm>
+          <a:prstGeom prst="rect">
+            <a:avLst/>
+          </a:prstGeom>
+          <a:noFill/>
+        </p:spPr>
+        <p:txBody>
+          <a:bodyPr wrap="square" anchor="t" lIns="0" rIns="0" tIns="0" bIns="0">
+            <a:spAutoFit/>
+          </a:bodyPr>
+          <a:lstStyle/>
+          <a:p>
+            <a:pPr algn="l">
+              <a:lnSpc>
+                <a:spcPct val="100000"/>
+              </a:lnSpc>
+              <a:spcBef>
+                <a:spcPts val="0"/>
+              </a:spcBef>
+              <a:spcAft>
+                <a:spcPts val="600"/>
+              </a:spcAft>
+            </a:pPr>
+            <a:r>
+              <a:rPr sz="1300" b="0" i="0">
+                <a:solidFill>
+                  <a:srgbClr val="212121"/>
+                </a:solidFill>
+                <a:latin typeface="Open Sans"/>
+              </a:rPr>
+              <a:t>validar ownership no servidor -&gt; 403</a:t>
+            </a:r>
+          </a:p>
+        </p:txBody>
+      </p:sp>
+      <p:sp>
+        <p:nvSpPr>
+          <p:cNvPr id="30" name="TextBox 29"/>
+          <p:cNvSpPr txBox="1"/>
+          <p:nvPr/>
+        </p:nvSpPr>
+        <p:spPr>
+          <a:xfrm>
+            <a:off x="10972800" y="6446520"/>
+            <a:ext cx="914400" cy="320040"/>
+          </a:xfrm>
+          <a:prstGeom prst="rect">
+            <a:avLst/>
+          </a:prstGeom>
+          <a:noFill/>
+        </p:spPr>
+        <p:txBody>
+          <a:bodyPr wrap="square" anchor="t" lIns="0" rIns="0" tIns="0" bIns="0">
+            <a:spAutoFit/>
+          </a:bodyPr>
+          <a:lstStyle/>
+          <a:p>
+            <a:pPr algn="r">
+              <a:lnSpc>
+                <a:spcPct val="100000"/>
+              </a:lnSpc>
+              <a:spcBef>
+                <a:spcPts val="0"/>
+              </a:spcBef>
+              <a:spcAft>
+                <a:spcPts val="600"/>
+              </a:spcAft>
+            </a:pPr>
+            <a:r>
+              <a:rPr sz="1100" b="0" i="0">
+                <a:solidFill>
+                  <a:srgbClr val="616161"/>
+                </a:solidFill>
+                <a:latin typeface="Open Sans"/>
+              </a:rPr>
+              <a:t>8</a:t>
+            </a:r>
           </a:p>
         </p:txBody>
       </p:sp>
@@ -9325,13 +9827,13 @@
         <p:spPr>
           <a:xfrm>
             <a:off x="0" y="0"/>
-            <a:ext cx="12191695" cy="1234440"/>
+            <a:ext cx="12191695" cy="6858000"/>
           </a:xfrm>
           <a:prstGeom prst="rect">
             <a:avLst/>
           </a:prstGeom>
           <a:solidFill>
-            <a:srgbClr val="2D7A3D"/>
+            <a:srgbClr val="1F5232"/>
           </a:solidFill>
           <a:ln>
             <a:noFill/>
@@ -9368,8 +9870,8 @@
         </p:nvSpPr>
         <p:spPr>
           <a:xfrm>
-            <a:off x="457200" y="164592"/>
-            <a:ext cx="11247120" cy="640080"/>
+            <a:off x="457200" y="2194560"/>
+            <a:ext cx="11247120" cy="548640"/>
           </a:xfrm>
           <a:prstGeom prst="rect">
             <a:avLst/>
@@ -9382,7 +9884,7 @@
           </a:bodyPr>
           <a:lstStyle/>
           <a:p>
-            <a:pPr algn="l">
+            <a:pPr algn="ctr">
               <a:lnSpc>
                 <a:spcPct val="100000"/>
               </a:lnSpc>
@@ -9394,13 +9896,13 @@
               </a:spcAft>
             </a:pPr>
             <a:r>
-              <a:rPr sz="3200" b="1" i="0">
-                <a:solidFill>
-                  <a:srgbClr val="FFFFFF"/>
+              <a:rPr sz="2000" b="1" i="0">
+                <a:solidFill>
+                  <a:srgbClr val="7CB342"/>
                 </a:solidFill>
                 <a:latin typeface="Open Sans"/>
               </a:rPr>
-              <a:t>Entregável da Fase 2a</a:t>
+              <a:t>PARTE 3</a:t>
             </a:r>
           </a:p>
         </p:txBody>
@@ -9413,8 +9915,8 @@
         </p:nvSpPr>
         <p:spPr>
           <a:xfrm>
-            <a:off x="457200" y="777240"/>
-            <a:ext cx="11247120" cy="365760"/>
+            <a:off x="457200" y="2834640"/>
+            <a:ext cx="11247120" cy="1280160"/>
           </a:xfrm>
           <a:prstGeom prst="rect">
             <a:avLst/>
@@ -9427,7 +9929,7 @@
           </a:bodyPr>
           <a:lstStyle/>
           <a:p>
-            <a:pPr algn="l">
+            <a:pPr algn="ctr">
               <a:lnSpc>
                 <a:spcPct val="100000"/>
               </a:lnSpc>
@@ -9439,281 +9941,27 @@
               </a:spcAft>
             </a:pPr>
             <a:r>
-              <a:rPr sz="1600" b="0" i="1">
-                <a:solidFill>
-                  <a:srgbClr val="E0E8DB"/>
+              <a:rPr sz="6000" b="1" i="0">
+                <a:solidFill>
+                  <a:srgbClr val="FFFFFF"/>
                 </a:solidFill>
                 <a:latin typeface="Open Sans"/>
               </a:rPr>
-              <a:t>Modelo de ameaças de segurança</a:t>
-            </a:r>
-          </a:p>
-        </p:txBody>
-      </p:sp>
-      <p:sp>
-        <p:nvSpPr>
-          <p:cNvPr id="5" name="Rounded Rectangle 4"/>
-          <p:cNvSpPr/>
-          <p:nvPr/>
-        </p:nvSpPr>
-        <p:spPr>
-          <a:xfrm>
-            <a:off x="411480" y="1463040"/>
-            <a:ext cx="11384280" cy="5029200"/>
-          </a:xfrm>
-          <a:prstGeom prst="roundRect">
-            <a:avLst/>
-          </a:prstGeom>
-          <a:solidFill>
-            <a:srgbClr val="F5F5F5"/>
-          </a:solidFill>
-          <a:ln w="15875">
-            <a:solidFill>
-              <a:srgbClr val="7CB342"/>
-            </a:solidFill>
-          </a:ln>
-          <a:effectLst/>
-        </p:spPr>
-        <p:style>
-          <a:lnRef idx="1">
-            <a:schemeClr val="accent1"/>
-          </a:lnRef>
-          <a:fillRef idx="3">
-            <a:schemeClr val="accent1"/>
-          </a:fillRef>
-          <a:effectRef idx="2">
-            <a:schemeClr val="accent1"/>
-          </a:effectRef>
-          <a:fontRef idx="minor">
-            <a:schemeClr val="lt1"/>
-          </a:fontRef>
-        </p:style>
-        <p:txBody>
-          <a:bodyPr rtlCol="0" anchor="ctr"/>
-          <a:lstStyle/>
-          <a:p>
-            <a:pPr algn="ctr"/>
-          </a:p>
-        </p:txBody>
-      </p:sp>
-      <p:sp>
-        <p:nvSpPr>
-          <p:cNvPr id="6" name="TextBox 5"/>
+              <a:t>No VidaPlus</a:t>
+            </a:r>
+          </a:p>
+        </p:txBody>
+      </p:sp>
+      <p:sp>
+        <p:nvSpPr>
+          <p:cNvPr id="5" name="TextBox 4"/>
           <p:cNvSpPr txBox="1"/>
           <p:nvPr/>
         </p:nvSpPr>
         <p:spPr>
           <a:xfrm>
-            <a:off x="868680" y="1783080"/>
-            <a:ext cx="10515600" cy="4572000"/>
-          </a:xfrm>
-          <a:prstGeom prst="rect">
-            <a:avLst/>
-          </a:prstGeom>
-          <a:noFill/>
-        </p:spPr>
-        <p:txBody>
-          <a:bodyPr wrap="square">
-            <a:spAutoFit/>
-          </a:bodyPr>
-          <a:lstStyle/>
-          <a:p>
-            <a:pPr algn="l">
-              <a:lnSpc>
-                <a:spcPct val="110000"/>
-              </a:lnSpc>
-              <a:spcAft>
-                <a:spcPts val="1400"/>
-              </a:spcAft>
-            </a:pPr>
-            <a:r>
-              <a:rPr sz="2000" b="1">
-                <a:solidFill>
-                  <a:srgbClr val="7CB342"/>
-                </a:solidFill>
-                <a:latin typeface="Open Sans"/>
-              </a:rPr>
-              <a:t>▸ </a:t>
-            </a:r>
-            <a:r>
-              <a:rPr sz="1800" b="1">
-                <a:solidFill>
-                  <a:srgbClr val="2D7A3D"/>
-                </a:solidFill>
-                <a:latin typeface="Open Sans"/>
-              </a:rPr>
-              <a:t>DFD: </a:t>
-            </a:r>
-            <a:r>
-              <a:rPr sz="1800">
-                <a:solidFill>
-                  <a:srgbClr val="212121"/>
-                </a:solidFill>
-                <a:latin typeface="Open Sans"/>
-              </a:rPr>
-              <a:t>desenhe o recorte (login, download de laudo) com as fronteiras.</a:t>
-            </a:r>
-          </a:p>
-          <a:p>
-            <a:pPr algn="l">
-              <a:lnSpc>
-                <a:spcPct val="110000"/>
-              </a:lnSpc>
-              <a:spcAft>
-                <a:spcPts val="1400"/>
-              </a:spcAft>
-            </a:pPr>
-            <a:r>
-              <a:rPr sz="2000" b="1">
-                <a:solidFill>
-                  <a:srgbClr val="7CB342"/>
-                </a:solidFill>
-                <a:latin typeface="Open Sans"/>
-              </a:rPr>
-              <a:t>▸ </a:t>
-            </a:r>
-            <a:r>
-              <a:rPr sz="1800" b="1">
-                <a:solidFill>
-                  <a:srgbClr val="2D7A3D"/>
-                </a:solidFill>
-                <a:latin typeface="Open Sans"/>
-              </a:rPr>
-              <a:t>STRIDE-per-element: </a:t>
-            </a:r>
-            <a:r>
-              <a:rPr sz="1800">
-                <a:solidFill>
-                  <a:srgbClr val="212121"/>
-                </a:solidFill>
-                <a:latin typeface="Open Sans"/>
-              </a:rPr>
-              <a:t>para cada elemento, marque as ameaças e o requisito.</a:t>
-            </a:r>
-          </a:p>
-          <a:p>
-            <a:pPr algn="l">
-              <a:lnSpc>
-                <a:spcPct val="110000"/>
-              </a:lnSpc>
-              <a:spcAft>
-                <a:spcPts val="1400"/>
-              </a:spcAft>
-            </a:pPr>
-            <a:r>
-              <a:rPr sz="2000" b="1">
-                <a:solidFill>
-                  <a:srgbClr val="7CB342"/>
-                </a:solidFill>
-                <a:latin typeface="Open Sans"/>
-              </a:rPr>
-              <a:t>▸ </a:t>
-            </a:r>
-            <a:r>
-              <a:rPr sz="1800" b="1">
-                <a:solidFill>
-                  <a:srgbClr val="2D7A3D"/>
-                </a:solidFill>
-                <a:latin typeface="Open Sans"/>
-              </a:rPr>
-              <a:t>Árvore de ataque: </a:t>
-            </a:r>
-            <a:r>
-              <a:rPr sz="1800">
-                <a:solidFill>
-                  <a:srgbClr val="212121"/>
-                </a:solidFill>
-                <a:latin typeface="Open Sans"/>
-              </a:rPr>
-              <a:t>decomponha o objetivo 'obter laudo de outro paciente'.</a:t>
-            </a:r>
-          </a:p>
-          <a:p>
-            <a:pPr algn="l">
-              <a:lnSpc>
-                <a:spcPct val="110000"/>
-              </a:lnSpc>
-              <a:spcAft>
-                <a:spcPts val="1400"/>
-              </a:spcAft>
-            </a:pPr>
-            <a:r>
-              <a:rPr sz="2000" b="1">
-                <a:solidFill>
-                  <a:srgbClr val="7CB342"/>
-                </a:solidFill>
-                <a:latin typeface="Open Sans"/>
-              </a:rPr>
-              <a:t>▸ </a:t>
-            </a:r>
-            <a:r>
-              <a:rPr sz="1800" b="1">
-                <a:solidFill>
-                  <a:srgbClr val="2D7A3D"/>
-                </a:solidFill>
-                <a:latin typeface="Open Sans"/>
-              </a:rPr>
-              <a:t>Derive requisitos: </a:t>
-            </a:r>
-            <a:r>
-              <a:rPr sz="1800">
-                <a:solidFill>
-                  <a:srgbClr val="212121"/>
-                </a:solidFill>
-                <a:latin typeface="Open Sans"/>
-              </a:rPr>
-              <a:t>cada ameaça concreta vira um requisito testável.</a:t>
-            </a:r>
-          </a:p>
-          <a:p>
-            <a:pPr algn="l">
-              <a:lnSpc>
-                <a:spcPct val="110000"/>
-              </a:lnSpc>
-              <a:spcAft>
-                <a:spcPts val="1400"/>
-              </a:spcAft>
-            </a:pPr>
-            <a:r>
-              <a:rPr sz="2000" b="1">
-                <a:solidFill>
-                  <a:srgbClr val="7CB342"/>
-                </a:solidFill>
-                <a:latin typeface="Open Sans"/>
-              </a:rPr>
-              <a:t>▸ </a:t>
-            </a:r>
-            <a:r>
-              <a:rPr sz="1800" b="1">
-                <a:solidFill>
-                  <a:srgbClr val="2D7A3D"/>
-                </a:solidFill>
-                <a:latin typeface="Open Sans"/>
-              </a:rPr>
-              <a:t>Alvo do exercício: </a:t>
-            </a:r>
-            <a:r>
-              <a:rPr sz="1800">
-                <a:solidFill>
-                  <a:srgbClr val="212121"/>
-                </a:solidFill>
-                <a:latin typeface="Open Sans"/>
-              </a:rPr>
-              <a:t>o IDOR no download (paciente A baixa o exame de B).</a:t>
-            </a:r>
-          </a:p>
-        </p:txBody>
-      </p:sp>
-      <p:sp>
-        <p:nvSpPr>
-          <p:cNvPr id="7" name="TextBox 6"/>
-          <p:cNvSpPr txBox="1"/>
-          <p:nvPr/>
-        </p:nvSpPr>
-        <p:spPr>
-          <a:xfrm>
-            <a:off x="10972800" y="6446520"/>
-            <a:ext cx="914400" cy="320040"/>
+            <a:off x="457200" y="4297680"/>
+            <a:ext cx="11247120" cy="457200"/>
           </a:xfrm>
           <a:prstGeom prst="rect">
             <a:avLst/>
@@ -9726,7 +9974,7 @@
           </a:bodyPr>
           <a:lstStyle/>
           <a:p>
-            <a:pPr algn="r">
+            <a:pPr algn="ctr">
               <a:lnSpc>
                 <a:spcPct val="100000"/>
               </a:lnSpc>
@@ -9738,14 +9986,58 @@
               </a:spcAft>
             </a:pPr>
             <a:r>
-              <a:rPr sz="1100" b="0" i="0">
-                <a:solidFill>
-                  <a:srgbClr val="616161"/>
+              <a:rPr sz="2200" b="0" i="1">
+                <a:solidFill>
+                  <a:srgbClr val="CCD7C0"/>
                 </a:solidFill>
                 <a:latin typeface="Open Sans"/>
               </a:rPr>
-              <a:t>9</a:t>
-            </a:r>
+              <a:t>A etapa desta semana (Fase 2a)</a:t>
+            </a:r>
+          </a:p>
+        </p:txBody>
+      </p:sp>
+      <p:sp>
+        <p:nvSpPr>
+          <p:cNvPr id="6" name="Rectangle 5"/>
+          <p:cNvSpPr/>
+          <p:nvPr/>
+        </p:nvSpPr>
+        <p:spPr>
+          <a:xfrm>
+            <a:off x="5184648" y="4983480"/>
+            <a:ext cx="1828800" cy="25400"/>
+          </a:xfrm>
+          <a:prstGeom prst="rect">
+            <a:avLst/>
+          </a:prstGeom>
+          <a:solidFill>
+            <a:srgbClr val="7CB342"/>
+          </a:solidFill>
+          <a:ln>
+            <a:noFill/>
+          </a:ln>
+          <a:effectLst/>
+        </p:spPr>
+        <p:style>
+          <a:lnRef idx="1">
+            <a:schemeClr val="accent1"/>
+          </a:lnRef>
+          <a:fillRef idx="3">
+            <a:schemeClr val="accent1"/>
+          </a:fillRef>
+          <a:effectRef idx="2">
+            <a:schemeClr val="accent1"/>
+          </a:effectRef>
+          <a:fontRef idx="minor">
+            <a:schemeClr val="lt1"/>
+          </a:fontRef>
+        </p:style>
+        <p:txBody>
+          <a:bodyPr rtlCol="0" anchor="ctr"/>
+          <a:lstStyle/>
+          <a:p>
+            <a:pPr algn="ctr"/>
           </a:p>
         </p:txBody>
       </p:sp>

--- a/aulas/aula-03-dfd-e-stride.pptx
+++ b/aulas/aula-03-dfd-e-stride.pptx
@@ -4422,7 +4422,7 @@
                 </a:solidFill>
                 <a:latin typeface="Open Sans"/>
               </a:rPr>
-              <a:t>Modelo de ameaças de segurança</a:t>
+              <a:t>Threat model de segurança — STRIDE (dossiê §3)</a:t>
             </a:r>
           </a:p>
         </p:txBody>
@@ -4519,7 +4519,7 @@
                 </a:solidFill>
                 <a:latin typeface="Open Sans"/>
               </a:rPr>
-              <a:t>DFD: </a:t>
+              <a:t>Entregar: </a:t>
             </a:r>
             <a:r>
               <a:rPr sz="1800">
@@ -4528,7 +4528,7 @@
                 </a:solidFill>
                 <a:latin typeface="Open Sans"/>
               </a:rPr>
-              <a:t>desenhe o recorte (login, download de laudo) com as fronteiras.</a:t>
+              <a:t>DFD do recorte (login + download de laudo) com trust boundaries.</a:t>
             </a:r>
           </a:p>
           <a:p>
@@ -4565,7 +4565,7 @@
                 </a:solidFill>
                 <a:latin typeface="Open Sans"/>
               </a:rPr>
-              <a:t>para cada elemento, marque as ameaças e o requisito.</a:t>
+              <a:t>tabela — cada elemento × ameaça -&gt; requisito.</a:t>
             </a:r>
           </a:p>
           <a:p>
@@ -4602,7 +4602,7 @@
                 </a:solidFill>
                 <a:latin typeface="Open Sans"/>
               </a:rPr>
-              <a:t>decomponha o objetivo 'obter laudo de outro paciente'.</a:t>
+              <a:t>para 'obter laudo de outro paciente' (alvo: o IDOR).</a:t>
             </a:r>
           </a:p>
           <a:p>
@@ -4630,7 +4630,7 @@
                 </a:solidFill>
                 <a:latin typeface="Open Sans"/>
               </a:rPr>
-              <a:t>Derive requisitos: </a:t>
+              <a:t>Requisitos: </a:t>
             </a:r>
             <a:r>
               <a:rPr sz="1800">
@@ -4639,7 +4639,7 @@
                 </a:solidFill>
                 <a:latin typeface="Open Sans"/>
               </a:rPr>
-              <a:t>cada ameaça concreta vira um requisito testável.</a:t>
+              <a:t>cada ameaça priorizada vira um requisito testável.</a:t>
             </a:r>
           </a:p>
           <a:p>
@@ -4667,7 +4667,7 @@
                 </a:solidFill>
                 <a:latin typeface="Open Sans"/>
               </a:rPr>
-              <a:t>Alvo do exercício: </a:t>
+              <a:t>Pronto quando: </a:t>
             </a:r>
             <a:r>
               <a:rPr sz="1800">
@@ -4676,7 +4676,7 @@
                 </a:solidFill>
                 <a:latin typeface="Open Sans"/>
               </a:rPr>
-              <a:t>o IDOR no download (paciente A baixa o exame de B).</a:t>
+              <a:t>todo elemento do DFD passou pelo STRIDE e gerou requisito.</a:t>
             </a:r>
           </a:p>
         </p:txBody>

--- a/aulas/aula-03-dfd-e-stride.pptx
+++ b/aulas/aula-03-dfd-e-stride.pptx
@@ -4225,7 +4225,7 @@
                 </a:solidFill>
                 <a:latin typeface="Open Sans"/>
               </a:rPr>
-              <a:t>TADS · Segurança em Sistemas Computacionais</a:t>
+              <a:t>TADS · Segurança de Sistemas Computacionais</a:t>
             </a:r>
           </a:p>
         </p:txBody>

--- a/aulas/aula-03-dfd-e-stride.pptx
+++ b/aulas/aula-03-dfd-e-stride.pptx
@@ -7258,7 +7258,7 @@
                 </a:solidFill>
                 <a:latin typeface="Open Sans"/>
               </a:rPr>
-              <a:t>Spoofing</a:t>
+              <a:t>Falsificação (Spoofing)</a:t>
             </a:r>
           </a:p>
         </p:txBody>
@@ -7483,7 +7483,7 @@
                 </a:solidFill>
                 <a:latin typeface="Open Sans"/>
               </a:rPr>
-              <a:t>Tampering</a:t>
+              <a:t>Adulteração (Tampering)</a:t>
             </a:r>
           </a:p>
         </p:txBody>
@@ -7708,7 +7708,7 @@
                 </a:solidFill>
                 <a:latin typeface="Open Sans"/>
               </a:rPr>
-              <a:t>Repudiation</a:t>
+              <a:t>Repúdio</a:t>
             </a:r>
           </a:p>
         </p:txBody>
@@ -7933,7 +7933,7 @@
                 </a:solidFill>
                 <a:latin typeface="Open Sans"/>
               </a:rPr>
-              <a:t>Info disclosure</a:t>
+              <a:t>Divulgação (Info. Disclosure)</a:t>
             </a:r>
           </a:p>
         </p:txBody>
@@ -8158,7 +8158,7 @@
                 </a:solidFill>
                 <a:latin typeface="Open Sans"/>
               </a:rPr>
-              <a:t>Denial of Service</a:t>
+              <a:t>Negação de serviço (DoS)</a:t>
             </a:r>
           </a:p>
         </p:txBody>
@@ -8383,7 +8383,7 @@
                 </a:solidFill>
                 <a:latin typeface="Open Sans"/>
               </a:rPr>
-              <a:t>Elevation of Priv.</a:t>
+              <a:t>Elevação de privilégio</a:t>
             </a:r>
           </a:p>
         </p:txBody>
@@ -8805,7 +8805,7 @@
                 </a:solidFill>
                 <a:latin typeface="Open Sans"/>
               </a:rPr>
-              <a:t>Spoofing</a:t>
+              <a:t>Falsificação (Spoofing)</a:t>
             </a:r>
           </a:p>
         </p:txBody>
@@ -8985,7 +8985,7 @@
                 </a:solidFill>
                 <a:latin typeface="Open Sans"/>
               </a:rPr>
-              <a:t>Token de sessão (fluxo)</a:t>
+              <a:t>Token de sessão</a:t>
             </a:r>
           </a:p>
         </p:txBody>
@@ -9030,7 +9030,7 @@
                 </a:solidFill>
                 <a:latin typeface="Open Sans"/>
               </a:rPr>
-              <a:t>Tampering</a:t>
+              <a:t>Adulteração (Tampering)</a:t>
             </a:r>
           </a:p>
         </p:txBody>
@@ -9210,7 +9210,7 @@
                 </a:solidFill>
                 <a:latin typeface="Open Sans"/>
               </a:rPr>
-              <a:t>Log (armazenamento)</a:t>
+              <a:t>Log</a:t>
             </a:r>
           </a:p>
         </p:txBody>
@@ -9255,7 +9255,7 @@
                 </a:solidFill>
                 <a:latin typeface="Open Sans"/>
               </a:rPr>
-              <a:t>Repudiation</a:t>
+              <a:t>Repúdio</a:t>
             </a:r>
           </a:p>
         </p:txBody>
@@ -9435,7 +9435,7 @@
                 </a:solidFill>
                 <a:latin typeface="Open Sans"/>
               </a:rPr>
-              <a:t>Banco (armazenamento)</a:t>
+              <a:t>Banco</a:t>
             </a:r>
           </a:p>
         </p:txBody>
@@ -9480,7 +9480,7 @@
                 </a:solidFill>
                 <a:latin typeface="Open Sans"/>
               </a:rPr>
-              <a:t>Info disclosure</a:t>
+              <a:t>Divulgação (Disclosure)</a:t>
             </a:r>
           </a:p>
         </p:txBody>
@@ -9705,7 +9705,7 @@
                 </a:solidFill>
                 <a:latin typeface="Open Sans"/>
               </a:rPr>
-              <a:t>Elevation of Priv.</a:t>
+              <a:t>Elevação de privilégio</a:t>
             </a:r>
           </a:p>
         </p:txBody>
